--- a/Files/GrowNear_Apresentacao.pptx
+++ b/Files/GrowNear_Apresentacao.pptx
@@ -4,6 +4,9 @@
   <p:sldMasterIdLst>
     <p:sldMasterId id="2147483648" r:id="rId1"/>
   </p:sldMasterIdLst>
+  <p:notesMasterIdLst>
+    <p:notesMasterId r:id="rId13"/>
+  </p:notesMasterIdLst>
   <p:sldIdLst>
     <p:sldId id="256" r:id="rId2"/>
     <p:sldId id="257" r:id="rId3"/>
@@ -12,12 +15,12 @@
     <p:sldId id="260" r:id="rId6"/>
     <p:sldId id="261" r:id="rId7"/>
     <p:sldId id="262" r:id="rId8"/>
-    <p:sldId id="263" r:id="rId9"/>
+    <p:sldId id="264" r:id="rId9"/>
+    <p:sldId id="265" r:id="rId10"/>
+    <p:sldId id="266" r:id="rId11"/>
+    <p:sldId id="263" r:id="rId12"/>
   </p:sldIdLst>
-  <p:notesMasterIdLst>
-    <p:notesMasterId r:id="rId10"/>
-  </p:notesMasterIdLst>
-  <p:sldSz cx="9144000" cy="5143500"/>
+  <p:sldSz cx="9144000" cy="5143500" type="screen16x9"/>
   <p:notesSz cx="5143500" cy="9144000"/>
   <p:defaultTextStyle>
     <a:lvl1pPr marL="0" algn="l" defTabSz="914400" rtl="0" eaLnBrk="1" latinLnBrk="0" hangingPunct="1">
@@ -114,30 +117,33 @@
   <p:extLst>
     <p:ext uri="{521415D9-36F7-43E2-AB2F-B90AF26B5E84}">
       <p14:sectionLst xmlns:p14="http://schemas.microsoft.com/office/powerpoint/2010/main">
-        <p14:section name="Abertura" id="{c7b6bec3-5ffa-1f6c-cadc-8b377c9bb49e}">
+        <p14:section name="Abertura" id="{C7B6BEC3-5FFA-1F6C-CADC-8B377C9BB49E}">
           <p14:sldIdLst>
             <p14:sldId id="256"/>
           </p14:sldIdLst>
         </p14:section>
-        <p14:section name="Negócio" id="{e2230ac3-a40b-6d03-21f1-637f00b87afd}">
+        <p14:section name="Negócio" id="{E2230AC3-A40B-6D03-21F1-637F00B87AFD}">
           <p14:sldIdLst>
             <p14:sldId id="257"/>
             <p14:sldId id="258"/>
           </p14:sldIdLst>
         </p14:section>
-        <p14:section name="Estratégia" id="{ef18c047-c854-dbeb-674b-6d70687d1027}">
+        <p14:section name="Estratégia" id="{EF18C047-C854-DBEB-674B-6D70687D1027}">
           <p14:sldIdLst>
             <p14:sldId id="259"/>
             <p14:sldId id="260"/>
           </p14:sldIdLst>
         </p14:section>
-        <p14:section name="Estudo de mercado" id="{05a40766-9846-85f3-805c-0ecf99c0dee0}">
+        <p14:section name="Estudo de mercado" id="{05A40766-9846-85F3-805C-0ECF99C0DEE0}">
           <p14:sldIdLst>
             <p14:sldId id="261"/>
             <p14:sldId id="262"/>
+            <p14:sldId id="264"/>
+            <p14:sldId id="265"/>
+            <p14:sldId id="266"/>
           </p14:sldIdLst>
         </p14:section>
-        <p14:section name="Fecho" id="{fea013e2-7e1a-e39e-8d09-d76271b6f0d8}">
+        <p14:section name="Fecho" id="{FEA013E2-7E1A-E39E-8D09-D76271B6F0D8}">
           <p14:sldIdLst>
             <p14:sldId id="263"/>
           </p14:sldIdLst>
@@ -173,234 +179,10 @@
           <a:chExt cx="0" cy="0"/>
         </a:xfrm>
       </p:grpSpPr>
-      <p:sp>
-        <p:nvSpPr>
-          <p:cNvPr id="2" name="Header Placeholder 1"/>
-          <p:cNvSpPr>
-            <a:spLocks noGrp="1"/>
-          </p:cNvSpPr>
-          <p:nvPr>
-            <p:ph type="hdr" sz="quarter"/>
-          </p:nvPr>
-        </p:nvSpPr>
-        <p:spPr>
-          <a:xfrm>
-            <a:off x="0" y="0"/>
-            <a:ext cx="2971800" cy="458788"/>
-          </a:xfrm>
-          <a:prstGeom prst="rect">
-            <a:avLst/>
-          </a:prstGeom>
-        </p:spPr>
-        <p:txBody>
-          <a:bodyPr vert="horz" lIns="91440" tIns="45720" rIns="91440" bIns="45720" rtlCol="0"/>
-          <a:lstStyle>
-            <a:lvl1pPr algn="l">
-              <a:defRPr sz="1200"/>
-            </a:lvl1pPr>
-          </a:lstStyle>
-          <a:p>
-            <a:endParaRPr lang="en-US"/>
-          </a:p>
-        </p:txBody>
-      </p:sp>
-      <p:sp>
-        <p:nvSpPr>
-          <p:cNvPr id="3" name="Date Placeholder 2"/>
-          <p:cNvSpPr>
-            <a:spLocks noGrp="1"/>
-          </p:cNvSpPr>
-          <p:nvPr>
-            <p:ph type="dt" idx="1"/>
-          </p:nvPr>
-        </p:nvSpPr>
-        <p:spPr>
-          <a:xfrm>
-            <a:off x="3884613" y="0"/>
-            <a:ext cx="2971800" cy="458788"/>
-          </a:xfrm>
-          <a:prstGeom prst="rect">
-            <a:avLst/>
-          </a:prstGeom>
-        </p:spPr>
-        <p:txBody>
-          <a:bodyPr vert="horz" lIns="91440" tIns="45720" rIns="91440" bIns="45720" rtlCol="0"/>
-          <a:lstStyle>
-            <a:lvl1pPr algn="r">
-              <a:defRPr sz="1200"/>
-            </a:lvl1pPr>
-          </a:lstStyle>
-          <a:p>
-            <a:fld id="{5282F153-3F37-0F45-9E97-73ACFA13230C}" type="datetimeFigureOut">
-              <a:rPr lang="en-US"/>
-              <a:t>7/23/19</a:t>
-            </a:fld>
-            <a:endParaRPr lang="en-US"/>
-          </a:p>
-        </p:txBody>
-      </p:sp>
-      <p:sp>
-        <p:nvSpPr>
-          <p:cNvPr id="4" name="Slide Image Placeholder 3"/>
-          <p:cNvSpPr>
-            <a:spLocks noGrp="1" noRot="1" noChangeAspect="1"/>
-          </p:cNvSpPr>
-          <p:nvPr>
-            <p:ph type="sldImg" idx="2"/>
-          </p:nvPr>
-        </p:nvSpPr>
-        <p:spPr>
-          <a:xfrm>
-            <a:off x="685800" y="1143000"/>
-            <a:ext cx="5486400" cy="3086100"/>
-          </a:xfrm>
-          <a:prstGeom prst="rect">
-            <a:avLst/>
-          </a:prstGeom>
-          <a:noFill/>
-          <a:ln w="12700">
-            <a:solidFill>
-              <a:prstClr val="black"/>
-            </a:solidFill>
-          </a:ln>
-        </p:spPr>
-        <p:txBody>
-          <a:bodyPr vert="horz" lIns="91440" tIns="45720" rIns="91440" bIns="45720" rtlCol="0" anchor="ctr"/>
-          <a:lstStyle/>
-          <a:p>
-            <a:endParaRPr lang="en-US"/>
-          </a:p>
-        </p:txBody>
-      </p:sp>
-      <p:sp>
-        <p:nvSpPr>
-          <p:cNvPr id="5" name="Notes Placeholder 4"/>
-          <p:cNvSpPr>
-            <a:spLocks noGrp="1"/>
-          </p:cNvSpPr>
-          <p:nvPr>
-            <p:ph type="body" sz="quarter" idx="3"/>
-          </p:nvPr>
-        </p:nvSpPr>
-        <p:spPr>
-          <a:xfrm>
-            <a:off x="685800" y="4400550"/>
-            <a:ext cx="5486400" cy="3600450"/>
-          </a:xfrm>
-          <a:prstGeom prst="rect">
-            <a:avLst/>
-          </a:prstGeom>
-        </p:spPr>
-        <p:txBody>
-          <a:bodyPr vert="horz" lIns="91440" tIns="45720" rIns="91440" bIns="45720" rtlCol="0"/>
-          <a:lstStyle/>
-          <a:p>
-            <a:pPr lvl="0"/>
-            <a:r>
-              <a:rPr lang="en-US"/>
-              <a:t>Click to edit Master text styles</a:t>
-            </a:r>
-          </a:p>
-          <a:p>
-            <a:pPr lvl="1"/>
-            <a:r>
-              <a:rPr lang="en-US"/>
-              <a:t>Second level</a:t>
-            </a:r>
-          </a:p>
-          <a:p>
-            <a:pPr lvl="2"/>
-            <a:r>
-              <a:rPr lang="en-US"/>
-              <a:t>Third level</a:t>
-            </a:r>
-          </a:p>
-          <a:p>
-            <a:pPr lvl="3"/>
-            <a:r>
-              <a:rPr lang="en-US"/>
-              <a:t>Fourth level</a:t>
-            </a:r>
-          </a:p>
-          <a:p>
-            <a:pPr lvl="4"/>
-            <a:r>
-              <a:rPr lang="en-US"/>
-              <a:t>Fifth level</a:t>
-            </a:r>
-          </a:p>
-        </p:txBody>
-      </p:sp>
-      <p:sp>
-        <p:nvSpPr>
-          <p:cNvPr id="6" name="Footer Placeholder 5"/>
-          <p:cNvSpPr>
-            <a:spLocks noGrp="1"/>
-          </p:cNvSpPr>
-          <p:nvPr>
-            <p:ph type="ftr" sz="quarter" idx="4"/>
-          </p:nvPr>
-        </p:nvSpPr>
-        <p:spPr>
-          <a:xfrm>
-            <a:off x="0" y="8685213"/>
-            <a:ext cx="2971800" cy="458787"/>
-          </a:xfrm>
-          <a:prstGeom prst="rect">
-            <a:avLst/>
-          </a:prstGeom>
-        </p:spPr>
-        <p:txBody>
-          <a:bodyPr vert="horz" lIns="91440" tIns="45720" rIns="91440" bIns="45720" rtlCol="0" anchor="b"/>
-          <a:lstStyle>
-            <a:lvl1pPr algn="l">
-              <a:defRPr sz="1200"/>
-            </a:lvl1pPr>
-          </a:lstStyle>
-          <a:p>
-            <a:endParaRPr lang="en-US"/>
-          </a:p>
-        </p:txBody>
-      </p:sp>
-      <p:sp>
-        <p:nvSpPr>
-          <p:cNvPr id="7" name="Slide Number Placeholder 6"/>
-          <p:cNvSpPr>
-            <a:spLocks noGrp="1"/>
-          </p:cNvSpPr>
-          <p:nvPr>
-            <p:ph type="sldNum" sz="quarter" idx="5"/>
-          </p:nvPr>
-        </p:nvSpPr>
-        <p:spPr>
-          <a:xfrm>
-            <a:off x="3884613" y="8685213"/>
-            <a:ext cx="2971800" cy="458787"/>
-          </a:xfrm>
-          <a:prstGeom prst="rect">
-            <a:avLst/>
-          </a:prstGeom>
-        </p:spPr>
-        <p:txBody>
-          <a:bodyPr vert="horz" lIns="91440" tIns="45720" rIns="91440" bIns="45720" rtlCol="0" anchor="b"/>
-          <a:lstStyle>
-            <a:lvl1pPr algn="r">
-              <a:defRPr sz="1200"/>
-            </a:lvl1pPr>
-          </a:lstStyle>
-          <a:p>
-            <a:fld id="{CE5E9CC1-C706-0F49-92D6-E571CC5EEA8F}" type="slidenum">
-              <a:rPr lang="en-US"/>
-              <a:t>‹#›</a:t>
-            </a:fld>
-            <a:endParaRPr lang="en-US"/>
-          </a:p>
-        </p:txBody>
-      </p:sp>
     </p:spTree>
     <p:extLst>
       <p:ext uri="{BB962C8B-B14F-4D97-AF65-F5344CB8AC3E}">
-        <p14:creationId xmlns:p14="http://schemas.microsoft.com/office/powerpoint/2010/main" val="1024086991"/>
+        <p14:creationId xmlns:p14="http://schemas.microsoft.com/office/powerpoint/2010/main" val="4257326735"/>
       </p:ext>
     </p:extLst>
   </p:cSld>
@@ -548,7 +330,6 @@
               <a:rPr lang="en-US" dirty="0"/>
               <a:t>Apresentar o grupo e a GrowNear numa frase: uma app que liga quem tem excedentes da horta, do pomar ou do galinheiro aos vizinhos que querem comprar produtos locais.</a:t>
             </a:r>
-            <a:endParaRPr lang="en-US" dirty="0"/>
           </a:p>
         </p:txBody>
       </p:sp>
@@ -570,6 +351,178 @@
             <a:fld id="{F7021451-1387-4CA6-816F-3879F97B5CBC}" type="slidenum">
               <a:rPr lang="en-US"/>
               <a:t>1</a:t>
+            </a:fld>
+            <a:endParaRPr lang="en-US"/>
+          </a:p>
+        </p:txBody>
+      </p:sp>
+    </p:spTree>
+    <p:extLst>
+      <p:ext uri="{BB962C8B-B14F-4D97-AF65-F5344CB8AC3E}">
+        <p14:creationId xmlns:p14="http://schemas.microsoft.com/office/powerpoint/2010/main" val="1024086991"/>
+      </p:ext>
+    </p:extLst>
+  </p:cSld>
+  <p:clrMapOvr>
+    <a:masterClrMapping/>
+  </p:clrMapOvr>
+</p:notes>
+</file>
+
+<file path=ppt/notesSlides/notesSlide10.xml><?xml version="1.0" encoding="utf-8"?>
+<p:notes xmlns:a="http://schemas.openxmlformats.org/drawingml/2006/main" xmlns:r="http://schemas.openxmlformats.org/officeDocument/2006/relationships" xmlns:p="http://schemas.openxmlformats.org/presentationml/2006/main">
+  <p:cSld>
+    <p:spTree>
+      <p:nvGrpSpPr>
+        <p:cNvPr id="1" name=""/>
+        <p:cNvGrpSpPr/>
+        <p:nvPr/>
+      </p:nvGrpSpPr>
+      <p:grpSpPr>
+        <a:xfrm>
+          <a:off x="0" y="0"/>
+          <a:ext cx="0" cy="0"/>
+          <a:chOff x="0" y="0"/>
+          <a:chExt cx="0" cy="0"/>
+        </a:xfrm>
+      </p:grpSpPr>
+      <p:sp>
+        <p:nvSpPr>
+          <p:cNvPr id="2" name="Slide Image Placeholder 1"/>
+          <p:cNvSpPr>
+            <a:spLocks noGrp="1" noRot="1" noChangeAspect="1"/>
+          </p:cNvSpPr>
+          <p:nvPr>
+            <p:ph type="sldImg"/>
+          </p:nvPr>
+        </p:nvSpPr>
+        <p:spPr/>
+      </p:sp>
+      <p:sp>
+        <p:nvSpPr>
+          <p:cNvPr id="3" name="Notes Placeholder 2"/>
+          <p:cNvSpPr>
+            <a:spLocks noGrp="1"/>
+          </p:cNvSpPr>
+          <p:nvPr>
+            <p:ph type="body" idx="1"/>
+          </p:nvPr>
+        </p:nvSpPr>
+        <p:spPr/>
+        <p:txBody>
+          <a:bodyPr/>
+          <a:lstStyle/>
+          <a:p>
+            <a:r>
+              <a:rPr lang="pt-PT"/>
+              <a:t>Os resultados confirmam a taxa e os pontos de recolha e obrigam a três ajustes: comunicar a frescura em vez do preço, limitar o raio de pesquisa a 10 minutos e resolver a desconfiança no pagamento antecipado com reembolso garantido e pagamento ao produtor só depois da recolha.</a:t>
+            </a:r>
+            <a:endParaRPr lang="en-US" dirty="0"/>
+          </a:p>
+        </p:txBody>
+      </p:sp>
+      <p:sp>
+        <p:nvSpPr>
+          <p:cNvPr id="4" name="Slide Number Placeholder 3"/>
+          <p:cNvSpPr>
+            <a:spLocks noGrp="1"/>
+          </p:cNvSpPr>
+          <p:nvPr>
+            <p:ph type="sldNum" sz="quarter" idx="10"/>
+          </p:nvPr>
+        </p:nvSpPr>
+        <p:spPr/>
+        <p:txBody>
+          <a:bodyPr/>
+          <a:lstStyle/>
+          <a:p>
+            <a:fld id="{F7021451-1387-4CA6-816F-3879F97B5CBC}" type="slidenum">
+              <a:rPr lang="en-US"/>
+              <a:t>10</a:t>
+            </a:fld>
+            <a:endParaRPr lang="en-US"/>
+          </a:p>
+        </p:txBody>
+      </p:sp>
+    </p:spTree>
+    <p:extLst>
+      <p:ext uri="{BB962C8B-B14F-4D97-AF65-F5344CB8AC3E}">
+        <p14:creationId xmlns:p14="http://schemas.microsoft.com/office/powerpoint/2010/main" val="1024086991"/>
+      </p:ext>
+    </p:extLst>
+  </p:cSld>
+  <p:clrMapOvr>
+    <a:masterClrMapping/>
+  </p:clrMapOvr>
+</p:notes>
+</file>
+
+<file path=ppt/notesSlides/notesSlide11.xml><?xml version="1.0" encoding="utf-8"?>
+<p:notes xmlns:a="http://schemas.openxmlformats.org/drawingml/2006/main" xmlns:r="http://schemas.openxmlformats.org/officeDocument/2006/relationships" xmlns:p="http://schemas.openxmlformats.org/presentationml/2006/main">
+  <p:cSld>
+    <p:spTree>
+      <p:nvGrpSpPr>
+        <p:cNvPr id="1" name=""/>
+        <p:cNvGrpSpPr/>
+        <p:nvPr/>
+      </p:nvGrpSpPr>
+      <p:grpSpPr>
+        <a:xfrm>
+          <a:off x="0" y="0"/>
+          <a:ext cx="0" cy="0"/>
+          <a:chOff x="0" y="0"/>
+          <a:chExt cx="0" cy="0"/>
+        </a:xfrm>
+      </p:grpSpPr>
+      <p:sp>
+        <p:nvSpPr>
+          <p:cNvPr id="2" name="Slide Image Placeholder 1"/>
+          <p:cNvSpPr>
+            <a:spLocks noGrp="1" noRot="1" noChangeAspect="1"/>
+          </p:cNvSpPr>
+          <p:nvPr>
+            <p:ph type="sldImg"/>
+          </p:nvPr>
+        </p:nvSpPr>
+        <p:spPr/>
+      </p:sp>
+      <p:sp>
+        <p:nvSpPr>
+          <p:cNvPr id="3" name="Notes Placeholder 2"/>
+          <p:cNvSpPr>
+            <a:spLocks noGrp="1"/>
+          </p:cNvSpPr>
+          <p:nvPr>
+            <p:ph type="body" idx="1"/>
+          </p:nvPr>
+        </p:nvSpPr>
+        <p:spPr/>
+        <p:txBody>
+          <a:bodyPr/>
+          <a:lstStyle/>
+          <a:p>
+            <a:endParaRPr lang="en-US" dirty="0"/>
+          </a:p>
+        </p:txBody>
+      </p:sp>
+      <p:sp>
+        <p:nvSpPr>
+          <p:cNvPr id="4" name="Slide Number Placeholder 3"/>
+          <p:cNvSpPr>
+            <a:spLocks noGrp="1"/>
+          </p:cNvSpPr>
+          <p:nvPr>
+            <p:ph type="sldNum" sz="quarter" idx="10"/>
+          </p:nvPr>
+        </p:nvSpPr>
+        <p:spPr/>
+        <p:txBody>
+          <a:bodyPr/>
+          <a:lstStyle/>
+          <a:p>
+            <a:fld id="{F7021451-1387-4CA6-816F-3879F97B5CBC}" type="slidenum">
+              <a:rPr lang="en-US"/>
+              <a:t>11</a:t>
             </a:fld>
             <a:endParaRPr lang="en-US"/>
           </a:p>
@@ -636,7 +589,6 @@
               <a:rPr lang="en-US" dirty="0"/>
               <a:t>Problema: excedentes de pequenos produtores perdem-se. Solução: app com mapa, reserva e recolha. Modelo: vender é grátis; o comprador paga 0,50 € + 5 % por compra paga na app, com garantia de reembolso.</a:t>
             </a:r>
-            <a:endParaRPr lang="en-US" dirty="0"/>
           </a:p>
         </p:txBody>
       </p:sp>
@@ -724,7 +676,6 @@
               <a:rPr lang="en-US" dirty="0"/>
               <a:t>Ler a declaração Para / Que / A / Que / Ao contrário de. Sublinhar a diferença: foco nos excedentes de quem não vive da produção, sem burocracia nem intermediários.</a:t>
             </a:r>
-            <a:endParaRPr lang="en-US" dirty="0"/>
           </a:p>
         </p:txBody>
       </p:sp>
@@ -812,7 +763,6 @@
               <a:rPr lang="en-US" dirty="0"/>
               <a:t>Percorrer da direita para a esquerda: segmentos (vendedores e compradores, plataforma multilateral), proposta de valor, canais e relação, fontes de receita (taxa ao comprador), recursos, atividades, parceiros e custos.</a:t>
             </a:r>
-            <a:endParaRPr lang="en-US" dirty="0"/>
           </a:p>
         </p:txBody>
       </p:sp>
@@ -900,7 +850,6 @@
               <a:rPr lang="en-US" dirty="0"/>
               <a:t>Forças: modelo leve, vender grátis, nicho sem concorrente dedicado. Fraquezas e ameaças principais: fuga à plataforma, alternativas grátis, oferta sazonal. Explicar como o modelo responde a cada uma.</a:t>
             </a:r>
-            <a:endParaRPr lang="en-US" dirty="0"/>
           </a:p>
         </p:txBody>
       </p:sp>
@@ -988,7 +937,6 @@
               <a:rPr lang="en-US" dirty="0"/>
               <a:t>Um só estudo, dirigido aos compradores. O objetivo geral responde a: quem são os compradores mais interessados e em que condições comprariam. OE7 é a síntese, feita na análise.</a:t>
             </a:r>
-            <a:endParaRPr lang="en-US" dirty="0"/>
           </a:p>
         </p:txBody>
       </p:sp>
@@ -1073,8 +1021,8 @@
           <a:lstStyle/>
           <a:p>
             <a:r>
-              <a:rPr lang="en-US" dirty="0"/>
-              <a:t>A completar quando o inquérito fechar: número de respostas obtidas, período de recolha e entrega do Excel em bruto.</a:t>
+              <a:rPr lang="pt-PT"/>
+              <a:t>O inquérito esteve aberto de 8 a 11 de outubro e recebeu 114 respostas completas. Excluímos uma de quem vive fora de Portugal, ficando 113 válidas, com margem de erro de cerca de 9 pontos. A amostra é por conveniência: mais velha e mais feminina do que a população, mas é quem decide as compras da casa.</a:t>
             </a:r>
             <a:endParaRPr lang="en-US" dirty="0"/>
           </a:p>
@@ -1161,8 +1109,8 @@
           <a:lstStyle/>
           <a:p>
             <a:r>
-              <a:rPr lang="en-US" dirty="0"/>
-              <a:t/>
+              <a:rPr lang="pt-PT"/>
+              <a:t>Há interesse, moderado: metade dá 4 ou 5. A frescura é o argumento principal. O raio de recolha tem de ser curto, cerca de 10 minutos. A taxa é aceite, mas a maioria prefere pagar ao produtor na recolha: o problema é a confiança em pagar antes a um desconhecido. A sazonalidade é aceite, mas quando falta um produto as pessoas compram noutro lado.</a:t>
             </a:r>
             <a:endParaRPr lang="en-US" dirty="0"/>
           </a:p>
@@ -1186,6 +1134,94 @@
             <a:fld id="{F7021451-1387-4CA6-816F-3879F97B5CBC}" type="slidenum">
               <a:rPr lang="en-US"/>
               <a:t>8</a:t>
+            </a:fld>
+            <a:endParaRPr lang="en-US"/>
+          </a:p>
+        </p:txBody>
+      </p:sp>
+    </p:spTree>
+    <p:extLst>
+      <p:ext uri="{BB962C8B-B14F-4D97-AF65-F5344CB8AC3E}">
+        <p14:creationId xmlns:p14="http://schemas.microsoft.com/office/powerpoint/2010/main" val="1024086991"/>
+      </p:ext>
+    </p:extLst>
+  </p:cSld>
+  <p:clrMapOvr>
+    <a:masterClrMapping/>
+  </p:clrMapOvr>
+</p:notes>
+</file>
+
+<file path=ppt/notesSlides/notesSlide9.xml><?xml version="1.0" encoding="utf-8"?>
+<p:notes xmlns:a="http://schemas.openxmlformats.org/drawingml/2006/main" xmlns:r="http://schemas.openxmlformats.org/officeDocument/2006/relationships" xmlns:p="http://schemas.openxmlformats.org/presentationml/2006/main">
+  <p:cSld>
+    <p:spTree>
+      <p:nvGrpSpPr>
+        <p:cNvPr id="1" name=""/>
+        <p:cNvGrpSpPr/>
+        <p:nvPr/>
+      </p:nvGrpSpPr>
+      <p:grpSpPr>
+        <a:xfrm>
+          <a:off x="0" y="0"/>
+          <a:ext cx="0" cy="0"/>
+          <a:chOff x="0" y="0"/>
+          <a:chExt cx="0" cy="0"/>
+        </a:xfrm>
+      </p:grpSpPr>
+      <p:sp>
+        <p:nvSpPr>
+          <p:cNvPr id="2" name="Slide Image Placeholder 1"/>
+          <p:cNvSpPr>
+            <a:spLocks noGrp="1" noRot="1" noChangeAspect="1"/>
+          </p:cNvSpPr>
+          <p:nvPr>
+            <p:ph type="sldImg"/>
+          </p:nvPr>
+        </p:nvSpPr>
+        <p:spPr/>
+      </p:sp>
+      <p:sp>
+        <p:nvSpPr>
+          <p:cNvPr id="3" name="Notes Placeholder 2"/>
+          <p:cNvSpPr>
+            <a:spLocks noGrp="1"/>
+          </p:cNvSpPr>
+          <p:nvPr>
+            <p:ph type="body" idx="1"/>
+          </p:nvPr>
+        </p:nvSpPr>
+        <p:spPr/>
+        <p:txBody>
+          <a:bodyPr/>
+          <a:lstStyle/>
+          <a:p>
+            <a:r>
+              <a:rPr lang="pt-PT"/>
+              <a:t>Confirmámos que o interesse está acima do ponto neutro e que a taxa é aceite. Rejeitámos que metade aceite deslocar-se mais de 10 minutos. Quem já tem acesso a produtos locais, por horta ou por comprar a produtores, mostra menos interesse. O segmento prioritário são os responsáveis pelas compras, 35 a 54 anos, em meio urbano e sem horta. As diferenças sociodemográficas não são significativas; a única significativa é a confiança no pagamento.</a:t>
+            </a:r>
+            <a:endParaRPr lang="en-US" dirty="0"/>
+          </a:p>
+        </p:txBody>
+      </p:sp>
+      <p:sp>
+        <p:nvSpPr>
+          <p:cNvPr id="4" name="Slide Number Placeholder 3"/>
+          <p:cNvSpPr>
+            <a:spLocks noGrp="1"/>
+          </p:cNvSpPr>
+          <p:nvPr>
+            <p:ph type="sldNum" sz="quarter" idx="10"/>
+          </p:nvPr>
+        </p:nvSpPr>
+        <p:spPr/>
+        <p:txBody>
+          <a:bodyPr/>
+          <a:lstStyle/>
+          <a:p>
+            <a:fld id="{F7021451-1387-4CA6-816F-3879F97B5CBC}" type="slidenum">
+              <a:rPr lang="en-US"/>
+              <a:t>9</a:t>
             </a:fld>
             <a:endParaRPr lang="en-US"/>
           </a:p>
@@ -1242,6 +1278,7 @@
         <a:solidFill>
           <a:srgbClr val="17552E"/>
         </a:solidFill>
+        <a:effectLst/>
       </p:bgPr>
     </p:bg>
     <p:spTree>
@@ -1261,9 +1298,11 @@
       <p:sp>
         <p:nvSpPr>
           <p:cNvPr id="2" name="Text 0"/>
-          <p:cNvSpPr/>
+          <p:cNvSpPr>
+            <a:spLocks noGrp="1"/>
+          </p:cNvSpPr>
           <p:nvPr>
-            <p:ph idx="100" type="title" hasCustomPrompt="1"/>
+            <p:ph type="title" idx="100" hasCustomPrompt="1"/>
           </p:nvPr>
         </p:nvSpPr>
         <p:spPr>
@@ -1280,7 +1319,7 @@
         <p:txBody>
           <a:bodyPr wrap="square" rtlCol="0"/>
           <a:lstStyle>
-            <a:lvl1pPr algn="l" indent="0" marL="0">
+            <a:lvl1pPr marL="0" indent="0" algn="l">
               <a:buNone/>
               <a:defRPr lang="en-US" sz="5400" b="1" dirty="0">
                 <a:solidFill>
@@ -1293,7 +1332,7 @@
             </a:lvl1pPr>
           </a:lstStyle>
           <a:p>
-            <a:pPr algn="l" indent="0" marL="0">
+            <a:pPr marL="0" indent="0" algn="l">
               <a:buNone/>
             </a:pPr>
             <a:endParaRPr lang="en-US" sz="5400" dirty="0"/>
@@ -1316,6 +1355,7 @@
         <a:solidFill>
           <a:schemeClr val="bg1"/>
         </a:solidFill>
+        <a:effectLst/>
       </p:bgPr>
     </p:bg>
     <p:spTree>
@@ -1335,9 +1375,11 @@
       <p:sp>
         <p:nvSpPr>
           <p:cNvPr id="2" name="Text 0"/>
-          <p:cNvSpPr/>
+          <p:cNvSpPr>
+            <a:spLocks noGrp="1"/>
+          </p:cNvSpPr>
           <p:nvPr>
-            <p:ph idx="100" type="title" hasCustomPrompt="1"/>
+            <p:ph type="title" idx="100" hasCustomPrompt="1"/>
           </p:nvPr>
         </p:nvSpPr>
         <p:spPr>
@@ -1354,7 +1396,7 @@
         <p:txBody>
           <a:bodyPr wrap="square" rtlCol="0"/>
           <a:lstStyle>
-            <a:lvl1pPr algn="l" indent="0" marL="0">
+            <a:lvl1pPr marL="0" indent="0" algn="l">
               <a:buNone/>
               <a:defRPr lang="en-US" sz="3000" b="1" dirty="0">
                 <a:solidFill>
@@ -1367,7 +1409,7 @@
             </a:lvl1pPr>
           </a:lstStyle>
           <a:p>
-            <a:pPr algn="l" indent="0" marL="0">
+            <a:pPr marL="0" indent="0" algn="l">
               <a:buNone/>
             </a:pPr>
             <a:endParaRPr lang="en-US" sz="3000" dirty="0"/>
@@ -1395,7 +1437,7 @@
           <a:bodyPr wrap="square" lIns="0" tIns="0" rIns="0" bIns="0" rtlCol="0" anchor="ctr"/>
           <a:lstStyle/>
           <a:p>
-            <a:pPr indent="0" marL="0">
+            <a:pPr marL="0" indent="0">
               <a:buNone/>
             </a:pPr>
             <a:r>
@@ -1430,7 +1472,7 @@
           </a:prstGeom>
           <a:extLst>
             <a:ext uri="{C572A759-6A51-4108-AA02-DFA0A04FC94B}">
-              <ma14:wrappingTextBoxFlag xmlns:ma14="http://schemas.microsoft.com/office/mac/drawingml/2011/main" val="0"/>
+              <ma14:wrappingTextBoxFlag xmlns:ma14="http://schemas.microsoft.com/office/mac/drawingml/2011/main" xmlns="" val="0"/>
             </a:ext>
           </a:extLst>
         </p:spPr>
@@ -1448,8 +1490,8 @@
           <a:p>
             <a:pPr algn="r"/>
             <a:fld id="{F7021451-1387-4CA6-816F-3879F97B5CBC}" type="slidenum">
-              <a:rPr b="0" lang="en-US"/>
-              <a:t>1003</a:t>
+              <a:rPr lang="en-US" b="0"/>
+              <a:t>‹#›</a:t>
             </a:fld>
             <a:endParaRPr lang="en-US"/>
           </a:p>
@@ -1466,6 +1508,11 @@
 <file path=ppt/slideMasters/slideMaster1.xml><?xml version="1.0" encoding="utf-8"?>
 <p:sldMaster xmlns:a="http://schemas.openxmlformats.org/drawingml/2006/main" xmlns:r="http://schemas.openxmlformats.org/officeDocument/2006/relationships" xmlns:p="http://schemas.openxmlformats.org/presentationml/2006/main">
   <p:cSld>
+    <p:bg>
+      <p:bgRef idx="1001">
+        <a:schemeClr val="bg1"/>
+      </p:bgRef>
+    </p:bg>
     <p:spTree>
       <p:nvGrpSpPr>
         <p:cNvPr id="1" name=""/>
@@ -1500,7 +1547,7 @@
           </a:prstGeom>
           <a:extLst>
             <a:ext uri="{C572A759-6A51-4108-AA02-DFA0A04FC94B}">
-              <ma14:wrappingTextBoxFlag xmlns:ma14="http://schemas.microsoft.com/office/mac/drawingml/2011/main" val="0"/>
+              <ma14:wrappingTextBoxFlag xmlns:ma14="http://schemas.microsoft.com/office/mac/drawingml/2011/main" xmlns="" val="0"/>
             </a:ext>
           </a:extLst>
         </p:spPr>
@@ -1518,8 +1565,8 @@
           <a:p>
             <a:pPr algn="r"/>
             <a:fld id="{F7021451-1387-4CA6-816F-3879F97B5CBC}" type="slidenum">
-              <a:rPr b="0" lang="en-US"/>
-              <a:t>null</a:t>
+              <a:rPr lang="en-US" b="0"/>
+              <a:t>‹#›</a:t>
             </a:fld>
             <a:endParaRPr lang="en-US"/>
           </a:p>
@@ -1807,9 +1854,11 @@
       <p:sp>
         <p:nvSpPr>
           <p:cNvPr id="2" name="Text 0"/>
-          <p:cNvSpPr/>
+          <p:cNvSpPr>
+            <a:spLocks noGrp="1"/>
+          </p:cNvSpPr>
           <p:nvPr>
-            <p:ph idx="100" type="title" hasCustomPrompt="1"/>
+            <p:ph type="title" idx="100" hasCustomPrompt="1"/>
           </p:nvPr>
         </p:nvSpPr>
         <p:spPr>
@@ -1827,7 +1876,7 @@
           <a:bodyPr wrap="square" lIns="0" tIns="0" rIns="0" bIns="0" rtlCol="0" anchor="b"/>
           <a:lstStyle/>
           <a:p>
-            <a:pPr algn="l" indent="0" marL="0">
+            <a:pPr marL="0" indent="0" algn="l">
               <a:buNone/>
             </a:pPr>
             <a:r>
@@ -1866,7 +1915,7 @@
           <a:bodyPr wrap="square" lIns="0" tIns="0" rIns="0" bIns="0" rtlCol="0" anchor="ctr"/>
           <a:lstStyle/>
           <a:p>
-            <a:pPr indent="0" marL="0">
+            <a:pPr marL="0" indent="0">
               <a:buNone/>
             </a:pPr>
             <a:r>
@@ -1905,7 +1954,7 @@
           <a:bodyPr wrap="square" lIns="0" tIns="0" rIns="0" bIns="0" rtlCol="0" anchor="ctr"/>
           <a:lstStyle/>
           <a:p>
-            <a:pPr indent="0" marL="0">
+            <a:pPr marL="0" indent="0">
               <a:buNone/>
             </a:pPr>
             <a:r>
@@ -1944,7 +1993,7 @@
           <a:bodyPr wrap="square" lIns="0" tIns="0" rIns="0" bIns="0" rtlCol="0" anchor="ctr"/>
           <a:lstStyle/>
           <a:p>
-            <a:pPr indent="0" marL="0">
+            <a:pPr marL="0" indent="0">
               <a:buNone/>
             </a:pPr>
             <a:r>
@@ -1961,7 +2010,7 @@
             <a:endParaRPr lang="en-US" sz="1200" dirty="0"/>
           </a:p>
           <a:p>
-            <a:pPr indent="0" marL="0">
+            <a:pPr marL="0" indent="0">
               <a:buNone/>
             </a:pPr>
             <a:r>
@@ -1973,9 +2022,1020 @@
                 <a:ea typeface="Calibri" pitchFamily="34" charset="-122"/>
                 <a:cs typeface="Calibri" pitchFamily="34" charset="-120"/>
               </a:rPr>
-              <a:t>António Guerra 1190409 · Luis [apelido] [n.º]</a:t>
+              <a:t>António Guerra 1190409 · Luis Santos 1250534</a:t>
             </a:r>
             <a:endParaRPr lang="en-US" sz="1200" dirty="0"/>
+          </a:p>
+        </p:txBody>
+      </p:sp>
+    </p:spTree>
+  </p:cSld>
+  <p:clrMapOvr>
+    <a:masterClrMapping/>
+  </p:clrMapOvr>
+</p:sld>
+</file>
+
+<file path=ppt/slides/slide10.xml><?xml version="1.0" encoding="utf-8"?>
+<p:sld xmlns:a="http://schemas.openxmlformats.org/drawingml/2006/main" xmlns:r="http://schemas.openxmlformats.org/officeDocument/2006/relationships" xmlns:p="http://schemas.openxmlformats.org/presentationml/2006/main">
+  <p:cSld name="Slide 7">
+    <p:spTree>
+      <p:nvGrpSpPr>
+        <p:cNvPr id="1" name=""/>
+        <p:cNvGrpSpPr/>
+        <p:nvPr/>
+      </p:nvGrpSpPr>
+      <p:grpSpPr>
+        <a:xfrm>
+          <a:off x="0" y="0"/>
+          <a:ext cx="0" cy="0"/>
+          <a:chOff x="0" y="0"/>
+          <a:chExt cx="0" cy="0"/>
+        </a:xfrm>
+      </p:grpSpPr>
+      <p:sp>
+        <p:nvSpPr>
+          <p:cNvPr id="2" name="Text 0"/>
+          <p:cNvSpPr>
+            <a:spLocks noGrp="1"/>
+          </p:cNvSpPr>
+          <p:nvPr>
+            <p:ph type="title" idx="100" hasCustomPrompt="1"/>
+          </p:nvPr>
+        </p:nvSpPr>
+        <p:spPr>
+          <a:xfrm>
+            <a:off x="457200" y="274320"/>
+            <a:ext cx="8229600" cy="640080"/>
+          </a:xfrm>
+          <a:prstGeom prst="rect">
+            <a:avLst/>
+          </a:prstGeom>
+          <a:noFill/>
+          <a:ln/>
+        </p:spPr>
+        <p:txBody>
+          <a:bodyPr wrap="square" lIns="0" tIns="0" rIns="0" bIns="0" rtlCol="0" anchor="ctr"/>
+          <a:lstStyle/>
+          <a:p>
+            <a:pPr marL="0" indent="0" algn="l">
+              <a:buNone/>
+            </a:pPr>
+            <a:r>
+              <a:rPr lang="pt-PT" sz="3000" b="1">
+                <a:solidFill>
+                  <a:schemeClr val="tx2"/>
+                </a:solidFill>
+                <a:latin typeface="Arial" pitchFamily="34" charset="0"/>
+                <a:ea typeface="Arial" pitchFamily="34" charset="-122"/>
+                <a:cs typeface="Arial" pitchFamily="34" charset="-120"/>
+              </a:rPr>
+              <a:t>O que muda no negócio</a:t>
+            </a:r>
+            <a:endParaRPr lang="en-US" sz="3000" dirty="0"/>
+          </a:p>
+        </p:txBody>
+      </p:sp>
+      <p:sp>
+        <p:nvSpPr>
+          <p:cNvPr id="25" name="Slide Number Placeholder 0"/>
+          <p:cNvSpPr>
+            <a:spLocks noGrp="1"/>
+          </p:cNvSpPr>
+          <p:nvPr>
+            <p:ph type="sldNum" sz="quarter" idx="4294967295"/>
+          </p:nvPr>
+        </p:nvSpPr>
+        <p:spPr>
+          <a:xfrm>
+            <a:off x="8321040" y="4754880"/>
+            <a:ext cx="365760" cy="274320"/>
+          </a:xfrm>
+          <a:prstGeom prst="rect">
+            <a:avLst/>
+          </a:prstGeom>
+          <a:extLst>
+            <a:ext uri="{C572A759-6A51-4108-AA02-DFA0A04FC94B}">
+              <ma14:wrappingTextBoxFlag xmlns="" xmlns:ma14="http://schemas.microsoft.com/office/mac/drawingml/2011/main" val="0"/>
+            </a:ext>
+          </a:extLst>
+        </p:spPr>
+        <p:txBody>
+          <a:bodyPr/>
+          <a:lstStyle>
+            <a:lvl1pPr>
+              <a:defRPr sz="1000">
+                <a:solidFill>
+                  <a:schemeClr val="accent4"/>
+                </a:solidFill>
+              </a:defRPr>
+            </a:lvl1pPr>
+          </a:lstStyle>
+          <a:p>
+            <a:pPr algn="r"/>
+            <a:fld id="{F7021451-1387-4CA6-816F-3879F97B5CBC}" type="slidenum">
+              <a:rPr lang="en-US" b="0"/>
+              <a:t>10</a:t>
+            </a:fld>
+            <a:endParaRPr lang="en-US"/>
+          </a:p>
+        </p:txBody>
+      </p:sp>
+      <p:sp>
+        <p:nvSpPr>
+          <p:cNvPr id="3" name="Implicação 1">
+            <a:extLst>
+              <a:ext uri="{FF2B5EF4-FFF2-40B4-BE49-F238E27FC236}">
+                <a16:creationId xmlns:a16="http://schemas.microsoft.com/office/drawing/2014/main" id="{A8999221-401C-0B8F-5071-932927C4ACA2}"/>
+              </a:ext>
+            </a:extLst>
+          </p:cNvPr>
+          <p:cNvSpPr/>
+          <p:nvPr/>
+        </p:nvSpPr>
+        <p:spPr>
+          <a:xfrm>
+            <a:off x="457200" y="1092200"/>
+            <a:ext cx="4038600" cy="1041400"/>
+          </a:xfrm>
+          <a:prstGeom prst="roundRect">
+            <a:avLst>
+              <a:gd name="adj" fmla="val 7317"/>
+            </a:avLst>
+          </a:prstGeom>
+          <a:solidFill>
+            <a:srgbClr val="EEF5EF"/>
+          </a:solidFill>
+          <a:ln w="12700" cap="flat" cmpd="sng" algn="ctr">
+            <a:noFill/>
+            <a:prstDash val="solid"/>
+            <a:miter lim="800000"/>
+          </a:ln>
+          <a:effectLst/>
+          <a:extLst>
+            <a:ext uri="{91240B29-F687-4F45-9708-019B960494DF}">
+              <a14:hiddenLine xmlns:a14="http://schemas.microsoft.com/office/drawing/2010/main" w="12700" cap="flat" cmpd="sng" algn="ctr">
+                <a:solidFill>
+                  <a:schemeClr val="accent1">
+                    <a:shade val="15000"/>
+                  </a:schemeClr>
+                </a:solidFill>
+                <a:prstDash val="solid"/>
+                <a:miter lim="800000"/>
+              </a14:hiddenLine>
+            </a:ext>
+          </a:extLst>
+        </p:spPr>
+        <p:style>
+          <a:lnRef idx="2">
+            <a:schemeClr val="accent1">
+              <a:shade val="15000"/>
+            </a:schemeClr>
+          </a:lnRef>
+          <a:fillRef idx="1">
+            <a:schemeClr val="accent1"/>
+          </a:fillRef>
+          <a:effectRef idx="0">
+            <a:schemeClr val="accent1"/>
+          </a:effectRef>
+          <a:fontRef idx="minor">
+            <a:schemeClr val="lt1"/>
+          </a:fontRef>
+        </p:style>
+        <p:txBody>
+          <a:bodyPr rtlCol="0" anchor="ctr"/>
+          <a:lstStyle/>
+          <a:p>
+            <a:pPr algn="ctr"/>
+            <a:endParaRPr lang="pt-PT"/>
+          </a:p>
+        </p:txBody>
+      </p:sp>
+      <p:sp>
+        <p:nvSpPr>
+          <p:cNvPr id="4" name="TextBox 3">
+            <a:extLst>
+              <a:ext uri="{FF2B5EF4-FFF2-40B4-BE49-F238E27FC236}">
+                <a16:creationId xmlns:a16="http://schemas.microsoft.com/office/drawing/2014/main" id="{D98DB2BE-5E56-8CDA-472B-2FBD4707DEAD}"/>
+              </a:ext>
+            </a:extLst>
+          </p:cNvPr>
+          <p:cNvSpPr txBox="1"/>
+          <p:nvPr/>
+        </p:nvSpPr>
+        <p:spPr>
+          <a:xfrm>
+            <a:off x="635000" y="1219199"/>
+            <a:ext cx="3683000" cy="787400"/>
+          </a:xfrm>
+          <a:prstGeom prst="rect">
+            <a:avLst/>
+          </a:prstGeom>
+          <a:noFill/>
+        </p:spPr>
+        <p:txBody>
+          <a:bodyPr vert="horz" wrap="square" lIns="0" tIns="0" rIns="0" bIns="0" rtlCol="0" anchor="ctr">
+            <a:noAutofit/>
+          </a:bodyPr>
+          <a:lstStyle/>
+          <a:p>
+            <a:pPr>
+              <a:spcAft>
+                <a:spcPts val="200"/>
+              </a:spcAft>
+            </a:pPr>
+            <a:r>
+              <a:rPr lang="pt-PT" sz="1400" b="1">
+                <a:solidFill>
+                  <a:srgbClr val="E2672B"/>
+                </a:solidFill>
+                <a:latin typeface="Calibri" panose="020F0502020204030204" pitchFamily="34" charset="0"/>
+              </a:rPr>
+              <a:t>Comunicação</a:t>
+            </a:r>
+          </a:p>
+          <a:p>
+            <a:pPr>
+              <a:spcAft>
+                <a:spcPts val="200"/>
+              </a:spcAft>
+            </a:pPr>
+            <a:r>
+              <a:rPr lang="pt-PT" sz="1300">
+                <a:solidFill>
+                  <a:srgbClr val="1F2A24"/>
+                </a:solidFill>
+                <a:latin typeface="Calibri" panose="020F0502020204030204" pitchFamily="34" charset="0"/>
+              </a:rPr>
+              <a:t>Liderar com a frescura e o "do vizinho", não com o preço</a:t>
+            </a:r>
+          </a:p>
+        </p:txBody>
+      </p:sp>
+      <p:sp>
+        <p:nvSpPr>
+          <p:cNvPr id="5" name="Implicação 2">
+            <a:extLst>
+              <a:ext uri="{FF2B5EF4-FFF2-40B4-BE49-F238E27FC236}">
+                <a16:creationId xmlns:a16="http://schemas.microsoft.com/office/drawing/2014/main" id="{5F2347EF-06E9-C856-511B-653F05E3E88C}"/>
+              </a:ext>
+            </a:extLst>
+          </p:cNvPr>
+          <p:cNvSpPr/>
+          <p:nvPr/>
+        </p:nvSpPr>
+        <p:spPr>
+          <a:xfrm>
+            <a:off x="4648200" y="1092200"/>
+            <a:ext cx="4038600" cy="1041400"/>
+          </a:xfrm>
+          <a:prstGeom prst="roundRect">
+            <a:avLst>
+              <a:gd name="adj" fmla="val 7317"/>
+            </a:avLst>
+          </a:prstGeom>
+          <a:solidFill>
+            <a:srgbClr val="EEF5EF"/>
+          </a:solidFill>
+          <a:ln w="12700" cap="flat" cmpd="sng" algn="ctr">
+            <a:noFill/>
+            <a:prstDash val="solid"/>
+            <a:miter lim="800000"/>
+          </a:ln>
+          <a:effectLst/>
+          <a:extLst>
+            <a:ext uri="{91240B29-F687-4F45-9708-019B960494DF}">
+              <a14:hiddenLine xmlns:a14="http://schemas.microsoft.com/office/drawing/2010/main" w="12700" cap="flat" cmpd="sng" algn="ctr">
+                <a:solidFill>
+                  <a:schemeClr val="accent1">
+                    <a:shade val="15000"/>
+                  </a:schemeClr>
+                </a:solidFill>
+                <a:prstDash val="solid"/>
+                <a:miter lim="800000"/>
+              </a14:hiddenLine>
+            </a:ext>
+          </a:extLst>
+        </p:spPr>
+        <p:style>
+          <a:lnRef idx="2">
+            <a:schemeClr val="accent1">
+              <a:shade val="15000"/>
+            </a:schemeClr>
+          </a:lnRef>
+          <a:fillRef idx="1">
+            <a:schemeClr val="accent1"/>
+          </a:fillRef>
+          <a:effectRef idx="0">
+            <a:schemeClr val="accent1"/>
+          </a:effectRef>
+          <a:fontRef idx="minor">
+            <a:schemeClr val="lt1"/>
+          </a:fontRef>
+        </p:style>
+        <p:txBody>
+          <a:bodyPr rtlCol="0" anchor="ctr"/>
+          <a:lstStyle/>
+          <a:p>
+            <a:pPr algn="ctr"/>
+            <a:endParaRPr lang="pt-PT"/>
+          </a:p>
+        </p:txBody>
+      </p:sp>
+      <p:sp>
+        <p:nvSpPr>
+          <p:cNvPr id="6" name="TextBox 5">
+            <a:extLst>
+              <a:ext uri="{FF2B5EF4-FFF2-40B4-BE49-F238E27FC236}">
+                <a16:creationId xmlns:a16="http://schemas.microsoft.com/office/drawing/2014/main" id="{F8B18198-600B-5E11-5E81-3B2D9CFD828C}"/>
+              </a:ext>
+            </a:extLst>
+          </p:cNvPr>
+          <p:cNvSpPr txBox="1"/>
+          <p:nvPr/>
+        </p:nvSpPr>
+        <p:spPr>
+          <a:xfrm>
+            <a:off x="4826000" y="1219199"/>
+            <a:ext cx="3683000" cy="787400"/>
+          </a:xfrm>
+          <a:prstGeom prst="rect">
+            <a:avLst/>
+          </a:prstGeom>
+          <a:noFill/>
+        </p:spPr>
+        <p:txBody>
+          <a:bodyPr vert="horz" wrap="square" lIns="0" tIns="0" rIns="0" bIns="0" rtlCol="0" anchor="ctr">
+            <a:noAutofit/>
+          </a:bodyPr>
+          <a:lstStyle/>
+          <a:p>
+            <a:pPr>
+              <a:spcAft>
+                <a:spcPts val="200"/>
+              </a:spcAft>
+            </a:pPr>
+            <a:r>
+              <a:rPr lang="pt-PT" sz="1400" b="1">
+                <a:solidFill>
+                  <a:srgbClr val="E2672B"/>
+                </a:solidFill>
+                <a:latin typeface="Calibri" panose="020F0502020204030204" pitchFamily="34" charset="0"/>
+              </a:rPr>
+              <a:t>Raio de 10 minutos</a:t>
+            </a:r>
+          </a:p>
+          <a:p>
+            <a:pPr>
+              <a:spcAft>
+                <a:spcPts val="200"/>
+              </a:spcAft>
+            </a:pPr>
+            <a:r>
+              <a:rPr lang="pt-PT" sz="1300">
+                <a:solidFill>
+                  <a:srgbClr val="1F2A24"/>
+                </a:solidFill>
+                <a:latin typeface="Calibri" panose="020F0502020204030204" pitchFamily="34" charset="0"/>
+              </a:rPr>
+              <a:t>Cerca de 3 a 5 km de carro ou 800 m a pé</a:t>
+            </a:r>
+          </a:p>
+        </p:txBody>
+      </p:sp>
+      <p:sp>
+        <p:nvSpPr>
+          <p:cNvPr id="7" name="Implicação 3">
+            <a:extLst>
+              <a:ext uri="{FF2B5EF4-FFF2-40B4-BE49-F238E27FC236}">
+                <a16:creationId xmlns:a16="http://schemas.microsoft.com/office/drawing/2014/main" id="{C5858F5B-9167-B33A-284A-E02D61230CAF}"/>
+              </a:ext>
+            </a:extLst>
+          </p:cNvPr>
+          <p:cNvSpPr/>
+          <p:nvPr/>
+        </p:nvSpPr>
+        <p:spPr>
+          <a:xfrm>
+            <a:off x="457200" y="2286000"/>
+            <a:ext cx="4038600" cy="1041400"/>
+          </a:xfrm>
+          <a:prstGeom prst="roundRect">
+            <a:avLst>
+              <a:gd name="adj" fmla="val 7317"/>
+            </a:avLst>
+          </a:prstGeom>
+          <a:solidFill>
+            <a:srgbClr val="EEF5EF"/>
+          </a:solidFill>
+          <a:ln w="12700" cap="flat" cmpd="sng" algn="ctr">
+            <a:noFill/>
+            <a:prstDash val="solid"/>
+            <a:miter lim="800000"/>
+          </a:ln>
+          <a:effectLst/>
+          <a:extLst>
+            <a:ext uri="{91240B29-F687-4F45-9708-019B960494DF}">
+              <a14:hiddenLine xmlns:a14="http://schemas.microsoft.com/office/drawing/2010/main" w="12700" cap="flat" cmpd="sng" algn="ctr">
+                <a:solidFill>
+                  <a:schemeClr val="accent1">
+                    <a:shade val="15000"/>
+                  </a:schemeClr>
+                </a:solidFill>
+                <a:prstDash val="solid"/>
+                <a:miter lim="800000"/>
+              </a14:hiddenLine>
+            </a:ext>
+          </a:extLst>
+        </p:spPr>
+        <p:style>
+          <a:lnRef idx="2">
+            <a:schemeClr val="accent1">
+              <a:shade val="15000"/>
+            </a:schemeClr>
+          </a:lnRef>
+          <a:fillRef idx="1">
+            <a:schemeClr val="accent1"/>
+          </a:fillRef>
+          <a:effectRef idx="0">
+            <a:schemeClr val="accent1"/>
+          </a:effectRef>
+          <a:fontRef idx="minor">
+            <a:schemeClr val="lt1"/>
+          </a:fontRef>
+        </p:style>
+        <p:txBody>
+          <a:bodyPr rtlCol="0" anchor="ctr"/>
+          <a:lstStyle/>
+          <a:p>
+            <a:pPr algn="ctr"/>
+            <a:endParaRPr lang="pt-PT"/>
+          </a:p>
+        </p:txBody>
+      </p:sp>
+      <p:sp>
+        <p:nvSpPr>
+          <p:cNvPr id="8" name="TextBox 7">
+            <a:extLst>
+              <a:ext uri="{FF2B5EF4-FFF2-40B4-BE49-F238E27FC236}">
+                <a16:creationId xmlns:a16="http://schemas.microsoft.com/office/drawing/2014/main" id="{2FE83CE5-D150-3FF6-2593-555636229C76}"/>
+              </a:ext>
+            </a:extLst>
+          </p:cNvPr>
+          <p:cNvSpPr txBox="1"/>
+          <p:nvPr/>
+        </p:nvSpPr>
+        <p:spPr>
+          <a:xfrm>
+            <a:off x="635000" y="2412999"/>
+            <a:ext cx="3683000" cy="787400"/>
+          </a:xfrm>
+          <a:prstGeom prst="rect">
+            <a:avLst/>
+          </a:prstGeom>
+          <a:noFill/>
+        </p:spPr>
+        <p:txBody>
+          <a:bodyPr vert="horz" wrap="square" lIns="0" tIns="0" rIns="0" bIns="0" rtlCol="0" anchor="ctr">
+            <a:noAutofit/>
+          </a:bodyPr>
+          <a:lstStyle/>
+          <a:p>
+            <a:pPr>
+              <a:spcAft>
+                <a:spcPts val="200"/>
+              </a:spcAft>
+            </a:pPr>
+            <a:r>
+              <a:rPr lang="pt-PT" sz="1400" b="1">
+                <a:solidFill>
+                  <a:srgbClr val="E2672B"/>
+                </a:solidFill>
+                <a:latin typeface="Calibri" panose="020F0502020204030204" pitchFamily="34" charset="0"/>
+              </a:rPr>
+              <a:t>Pontos de recolha</a:t>
+            </a:r>
+          </a:p>
+          <a:p>
+            <a:pPr>
+              <a:spcAft>
+                <a:spcPts val="200"/>
+              </a:spcAft>
+            </a:pPr>
+            <a:r>
+              <a:rPr lang="pt-PT" sz="1300">
+                <a:solidFill>
+                  <a:srgbClr val="1F2A24"/>
+                </a:solidFill>
+                <a:latin typeface="Calibri" panose="020F0502020204030204" pitchFamily="34" charset="0"/>
+              </a:rPr>
+              <a:t>Prioridade a cafés e mercearias parceiros</a:t>
+            </a:r>
+          </a:p>
+        </p:txBody>
+      </p:sp>
+      <p:sp>
+        <p:nvSpPr>
+          <p:cNvPr id="9" name="Implicação 4">
+            <a:extLst>
+              <a:ext uri="{FF2B5EF4-FFF2-40B4-BE49-F238E27FC236}">
+                <a16:creationId xmlns:a16="http://schemas.microsoft.com/office/drawing/2014/main" id="{DFAA907B-55E7-E6C9-4C11-9814B47E6059}"/>
+              </a:ext>
+            </a:extLst>
+          </p:cNvPr>
+          <p:cNvSpPr/>
+          <p:nvPr/>
+        </p:nvSpPr>
+        <p:spPr>
+          <a:xfrm>
+            <a:off x="4648200" y="2286000"/>
+            <a:ext cx="4038600" cy="1041400"/>
+          </a:xfrm>
+          <a:prstGeom prst="roundRect">
+            <a:avLst>
+              <a:gd name="adj" fmla="val 7317"/>
+            </a:avLst>
+          </a:prstGeom>
+          <a:solidFill>
+            <a:srgbClr val="EEF5EF"/>
+          </a:solidFill>
+          <a:ln w="12700" cap="flat" cmpd="sng" algn="ctr">
+            <a:noFill/>
+            <a:prstDash val="solid"/>
+            <a:miter lim="800000"/>
+          </a:ln>
+          <a:effectLst/>
+          <a:extLst>
+            <a:ext uri="{91240B29-F687-4F45-9708-019B960494DF}">
+              <a14:hiddenLine xmlns:a14="http://schemas.microsoft.com/office/drawing/2010/main" w="12700" cap="flat" cmpd="sng" algn="ctr">
+                <a:solidFill>
+                  <a:schemeClr val="accent1">
+                    <a:shade val="15000"/>
+                  </a:schemeClr>
+                </a:solidFill>
+                <a:prstDash val="solid"/>
+                <a:miter lim="800000"/>
+              </a14:hiddenLine>
+            </a:ext>
+          </a:extLst>
+        </p:spPr>
+        <p:style>
+          <a:lnRef idx="2">
+            <a:schemeClr val="accent1">
+              <a:shade val="15000"/>
+            </a:schemeClr>
+          </a:lnRef>
+          <a:fillRef idx="1">
+            <a:schemeClr val="accent1"/>
+          </a:fillRef>
+          <a:effectRef idx="0">
+            <a:schemeClr val="accent1"/>
+          </a:effectRef>
+          <a:fontRef idx="minor">
+            <a:schemeClr val="lt1"/>
+          </a:fontRef>
+        </p:style>
+        <p:txBody>
+          <a:bodyPr rtlCol="0" anchor="ctr"/>
+          <a:lstStyle/>
+          <a:p>
+            <a:pPr algn="ctr"/>
+            <a:endParaRPr lang="pt-PT"/>
+          </a:p>
+        </p:txBody>
+      </p:sp>
+      <p:sp>
+        <p:nvSpPr>
+          <p:cNvPr id="10" name="TextBox 9">
+            <a:extLst>
+              <a:ext uri="{FF2B5EF4-FFF2-40B4-BE49-F238E27FC236}">
+                <a16:creationId xmlns:a16="http://schemas.microsoft.com/office/drawing/2014/main" id="{2804410C-60E7-E853-1C60-9AF900B34941}"/>
+              </a:ext>
+            </a:extLst>
+          </p:cNvPr>
+          <p:cNvSpPr txBox="1"/>
+          <p:nvPr/>
+        </p:nvSpPr>
+        <p:spPr>
+          <a:xfrm>
+            <a:off x="4826000" y="2412999"/>
+            <a:ext cx="3683000" cy="787400"/>
+          </a:xfrm>
+          <a:prstGeom prst="rect">
+            <a:avLst/>
+          </a:prstGeom>
+          <a:noFill/>
+        </p:spPr>
+        <p:txBody>
+          <a:bodyPr vert="horz" wrap="square" lIns="0" tIns="0" rIns="0" bIns="0" rtlCol="0" anchor="ctr">
+            <a:noAutofit/>
+          </a:bodyPr>
+          <a:lstStyle/>
+          <a:p>
+            <a:pPr>
+              <a:spcAft>
+                <a:spcPts val="200"/>
+              </a:spcAft>
+            </a:pPr>
+            <a:r>
+              <a:rPr lang="pt-PT" sz="1400" b="1">
+                <a:solidFill>
+                  <a:srgbClr val="E2672B"/>
+                </a:solidFill>
+                <a:latin typeface="Calibri" panose="020F0502020204030204" pitchFamily="34" charset="0"/>
+              </a:rPr>
+              <a:t>Taxa mantém-se</a:t>
+            </a:r>
+          </a:p>
+          <a:p>
+            <a:pPr>
+              <a:spcAft>
+                <a:spcPts val="200"/>
+              </a:spcAft>
+            </a:pPr>
+            <a:r>
+              <a:rPr lang="pt-PT" sz="1300">
+                <a:solidFill>
+                  <a:srgbClr val="1F2A24"/>
+                </a:solidFill>
+                <a:latin typeface="Calibri" panose="020F0502020204030204" pitchFamily="34" charset="0"/>
+              </a:rPr>
+              <a:t>0,50 € + 5 % por compra; encomenda mínima de 5 €</a:t>
+            </a:r>
+          </a:p>
+        </p:txBody>
+      </p:sp>
+      <p:sp>
+        <p:nvSpPr>
+          <p:cNvPr id="11" name="Implicação 5">
+            <a:extLst>
+              <a:ext uri="{FF2B5EF4-FFF2-40B4-BE49-F238E27FC236}">
+                <a16:creationId xmlns:a16="http://schemas.microsoft.com/office/drawing/2014/main" id="{A83007FA-EE0E-77ED-911C-A934E3E4380D}"/>
+              </a:ext>
+            </a:extLst>
+          </p:cNvPr>
+          <p:cNvSpPr/>
+          <p:nvPr/>
+        </p:nvSpPr>
+        <p:spPr>
+          <a:xfrm>
+            <a:off x="457200" y="3479800"/>
+            <a:ext cx="4038600" cy="1041400"/>
+          </a:xfrm>
+          <a:prstGeom prst="roundRect">
+            <a:avLst>
+              <a:gd name="adj" fmla="val 7317"/>
+            </a:avLst>
+          </a:prstGeom>
+          <a:solidFill>
+            <a:srgbClr val="EEF5EF"/>
+          </a:solidFill>
+          <a:ln w="12700" cap="flat" cmpd="sng" algn="ctr">
+            <a:noFill/>
+            <a:prstDash val="solid"/>
+            <a:miter lim="800000"/>
+          </a:ln>
+          <a:effectLst/>
+          <a:extLst>
+            <a:ext uri="{91240B29-F687-4F45-9708-019B960494DF}">
+              <a14:hiddenLine xmlns:a14="http://schemas.microsoft.com/office/drawing/2010/main" w="12700" cap="flat" cmpd="sng" algn="ctr">
+                <a:solidFill>
+                  <a:schemeClr val="accent1">
+                    <a:shade val="15000"/>
+                  </a:schemeClr>
+                </a:solidFill>
+                <a:prstDash val="solid"/>
+                <a:miter lim="800000"/>
+              </a14:hiddenLine>
+            </a:ext>
+          </a:extLst>
+        </p:spPr>
+        <p:style>
+          <a:lnRef idx="2">
+            <a:schemeClr val="accent1">
+              <a:shade val="15000"/>
+            </a:schemeClr>
+          </a:lnRef>
+          <a:fillRef idx="1">
+            <a:schemeClr val="accent1"/>
+          </a:fillRef>
+          <a:effectRef idx="0">
+            <a:schemeClr val="accent1"/>
+          </a:effectRef>
+          <a:fontRef idx="minor">
+            <a:schemeClr val="lt1"/>
+          </a:fontRef>
+        </p:style>
+        <p:txBody>
+          <a:bodyPr rtlCol="0" anchor="ctr"/>
+          <a:lstStyle/>
+          <a:p>
+            <a:pPr algn="ctr"/>
+            <a:endParaRPr lang="pt-PT"/>
+          </a:p>
+        </p:txBody>
+      </p:sp>
+      <p:sp>
+        <p:nvSpPr>
+          <p:cNvPr id="12" name="TextBox 11">
+            <a:extLst>
+              <a:ext uri="{FF2B5EF4-FFF2-40B4-BE49-F238E27FC236}">
+                <a16:creationId xmlns:a16="http://schemas.microsoft.com/office/drawing/2014/main" id="{6EA61A54-B1F0-D44B-BD37-4AB00F0489D6}"/>
+              </a:ext>
+            </a:extLst>
+          </p:cNvPr>
+          <p:cNvSpPr txBox="1"/>
+          <p:nvPr/>
+        </p:nvSpPr>
+        <p:spPr>
+          <a:xfrm>
+            <a:off x="635000" y="3606799"/>
+            <a:ext cx="3683000" cy="787400"/>
+          </a:xfrm>
+          <a:prstGeom prst="rect">
+            <a:avLst/>
+          </a:prstGeom>
+          <a:noFill/>
+        </p:spPr>
+        <p:txBody>
+          <a:bodyPr vert="horz" wrap="square" lIns="0" tIns="0" rIns="0" bIns="0" rtlCol="0" anchor="ctr">
+            <a:noAutofit/>
+          </a:bodyPr>
+          <a:lstStyle/>
+          <a:p>
+            <a:pPr>
+              <a:spcAft>
+                <a:spcPts val="200"/>
+              </a:spcAft>
+            </a:pPr>
+            <a:r>
+              <a:rPr lang="pt-PT" sz="1400" b="1">
+                <a:solidFill>
+                  <a:srgbClr val="E2672B"/>
+                </a:solidFill>
+                <a:latin typeface="Calibri" panose="020F0502020204030204" pitchFamily="34" charset="0"/>
+              </a:rPr>
+              <a:t>Confiança no pagamento</a:t>
+            </a:r>
+          </a:p>
+          <a:p>
+            <a:pPr>
+              <a:spcAft>
+                <a:spcPts val="200"/>
+              </a:spcAft>
+            </a:pPr>
+            <a:r>
+              <a:rPr lang="pt-PT" sz="1300">
+                <a:solidFill>
+                  <a:srgbClr val="1F2A24"/>
+                </a:solidFill>
+                <a:latin typeface="Calibri" panose="020F0502020204030204" pitchFamily="34" charset="0"/>
+              </a:rPr>
+              <a:t>Reembolso garantido; o produtor só recebe após a recolha</a:t>
+            </a:r>
+          </a:p>
+        </p:txBody>
+      </p:sp>
+      <p:sp>
+        <p:nvSpPr>
+          <p:cNvPr id="13" name="Implicação 6">
+            <a:extLst>
+              <a:ext uri="{FF2B5EF4-FFF2-40B4-BE49-F238E27FC236}">
+                <a16:creationId xmlns:a16="http://schemas.microsoft.com/office/drawing/2014/main" id="{1082A239-7DAC-F328-CC73-0721E4E48DF1}"/>
+              </a:ext>
+            </a:extLst>
+          </p:cNvPr>
+          <p:cNvSpPr/>
+          <p:nvPr/>
+        </p:nvSpPr>
+        <p:spPr>
+          <a:xfrm>
+            <a:off x="4648200" y="3479800"/>
+            <a:ext cx="4038600" cy="1041400"/>
+          </a:xfrm>
+          <a:prstGeom prst="roundRect">
+            <a:avLst>
+              <a:gd name="adj" fmla="val 7317"/>
+            </a:avLst>
+          </a:prstGeom>
+          <a:solidFill>
+            <a:srgbClr val="EEF5EF"/>
+          </a:solidFill>
+          <a:ln w="12700" cap="flat" cmpd="sng" algn="ctr">
+            <a:noFill/>
+            <a:prstDash val="solid"/>
+            <a:miter lim="800000"/>
+          </a:ln>
+          <a:effectLst/>
+          <a:extLst>
+            <a:ext uri="{91240B29-F687-4F45-9708-019B960494DF}">
+              <a14:hiddenLine xmlns:a14="http://schemas.microsoft.com/office/drawing/2010/main" w="12700" cap="flat" cmpd="sng" algn="ctr">
+                <a:solidFill>
+                  <a:schemeClr val="accent1">
+                    <a:shade val="15000"/>
+                  </a:schemeClr>
+                </a:solidFill>
+                <a:prstDash val="solid"/>
+                <a:miter lim="800000"/>
+              </a14:hiddenLine>
+            </a:ext>
+          </a:extLst>
+        </p:spPr>
+        <p:style>
+          <a:lnRef idx="2">
+            <a:schemeClr val="accent1">
+              <a:shade val="15000"/>
+            </a:schemeClr>
+          </a:lnRef>
+          <a:fillRef idx="1">
+            <a:schemeClr val="accent1"/>
+          </a:fillRef>
+          <a:effectRef idx="0">
+            <a:schemeClr val="accent1"/>
+          </a:effectRef>
+          <a:fontRef idx="minor">
+            <a:schemeClr val="lt1"/>
+          </a:fontRef>
+        </p:style>
+        <p:txBody>
+          <a:bodyPr rtlCol="0" anchor="ctr"/>
+          <a:lstStyle/>
+          <a:p>
+            <a:pPr algn="ctr"/>
+            <a:endParaRPr lang="pt-PT"/>
+          </a:p>
+        </p:txBody>
+      </p:sp>
+      <p:sp>
+        <p:nvSpPr>
+          <p:cNvPr id="14" name="TextBox 13">
+            <a:extLst>
+              <a:ext uri="{FF2B5EF4-FFF2-40B4-BE49-F238E27FC236}">
+                <a16:creationId xmlns:a16="http://schemas.microsoft.com/office/drawing/2014/main" id="{CF324956-1436-B39A-FD82-2B8BC52C99BB}"/>
+              </a:ext>
+            </a:extLst>
+          </p:cNvPr>
+          <p:cNvSpPr txBox="1"/>
+          <p:nvPr/>
+        </p:nvSpPr>
+        <p:spPr>
+          <a:xfrm>
+            <a:off x="4826000" y="3606799"/>
+            <a:ext cx="3683000" cy="787400"/>
+          </a:xfrm>
+          <a:prstGeom prst="rect">
+            <a:avLst/>
+          </a:prstGeom>
+          <a:noFill/>
+        </p:spPr>
+        <p:txBody>
+          <a:bodyPr vert="horz" wrap="square" lIns="0" tIns="0" rIns="0" bIns="0" rtlCol="0" anchor="ctr">
+            <a:noAutofit/>
+          </a:bodyPr>
+          <a:lstStyle/>
+          <a:p>
+            <a:pPr>
+              <a:spcAft>
+                <a:spcPts val="200"/>
+              </a:spcAft>
+            </a:pPr>
+            <a:r>
+              <a:rPr lang="pt-PT" sz="1400" b="1">
+                <a:solidFill>
+                  <a:srgbClr val="E2672B"/>
+                </a:solidFill>
+                <a:latin typeface="Calibri" panose="020F0502020204030204" pitchFamily="34" charset="0"/>
+              </a:rPr>
+              <a:t>Metas</a:t>
+            </a:r>
+          </a:p>
+          <a:p>
+            <a:pPr>
+              <a:spcAft>
+                <a:spcPts val="200"/>
+              </a:spcAft>
+            </a:pPr>
+            <a:r>
+              <a:rPr lang="pt-PT" sz="1300">
+                <a:solidFill>
+                  <a:srgbClr val="1F2A24"/>
+                </a:solidFill>
+                <a:latin typeface="Calibri" panose="020F0502020204030204" pitchFamily="34" charset="0"/>
+              </a:rPr>
+              <a:t>16 % (prudente) a 45 % (otimista) da zona de lançamento</a:t>
+            </a:r>
+          </a:p>
+        </p:txBody>
+      </p:sp>
+    </p:spTree>
+    <p:extLst>
+      <p:ext uri="{BB962C8B-B14F-4D97-AF65-F5344CB8AC3E}">
+        <p14:creationId xmlns:p14="http://schemas.microsoft.com/office/powerpoint/2010/main" val="902016278"/>
+      </p:ext>
+    </p:extLst>
+  </p:cSld>
+  <p:clrMapOvr>
+    <a:masterClrMapping/>
+  </p:clrMapOvr>
+</p:sld>
+</file>
+
+<file path=ppt/slides/slide11.xml><?xml version="1.0" encoding="utf-8"?>
+<p:sld xmlns:a="http://schemas.openxmlformats.org/drawingml/2006/main" xmlns:r="http://schemas.openxmlformats.org/officeDocument/2006/relationships" xmlns:p="http://schemas.openxmlformats.org/presentationml/2006/main">
+  <p:cSld name="Slide 8">
+    <p:spTree>
+      <p:nvGrpSpPr>
+        <p:cNvPr id="1" name=""/>
+        <p:cNvGrpSpPr/>
+        <p:nvPr/>
+      </p:nvGrpSpPr>
+      <p:grpSpPr>
+        <a:xfrm>
+          <a:off x="0" y="0"/>
+          <a:ext cx="0" cy="0"/>
+          <a:chOff x="0" y="0"/>
+          <a:chExt cx="0" cy="0"/>
+        </a:xfrm>
+      </p:grpSpPr>
+      <p:sp>
+        <p:nvSpPr>
+          <p:cNvPr id="2" name="Text 0"/>
+          <p:cNvSpPr>
+            <a:spLocks noGrp="1"/>
+          </p:cNvSpPr>
+          <p:nvPr>
+            <p:ph type="title" idx="100" hasCustomPrompt="1"/>
+          </p:nvPr>
+        </p:nvSpPr>
+        <p:spPr>
+          <a:xfrm>
+            <a:off x="548640" y="1188720"/>
+            <a:ext cx="8046720" cy="1097280"/>
+          </a:xfrm>
+          <a:prstGeom prst="rect">
+            <a:avLst/>
+          </a:prstGeom>
+          <a:noFill/>
+          <a:ln/>
+        </p:spPr>
+        <p:txBody>
+          <a:bodyPr wrap="square" lIns="0" tIns="0" rIns="0" bIns="0" rtlCol="0" anchor="b"/>
+          <a:lstStyle/>
+          <a:p>
+            <a:pPr marL="0" indent="0" algn="l">
+              <a:buNone/>
+            </a:pPr>
+            <a:r>
+              <a:rPr lang="en-US" sz="5400" b="1" dirty="0">
+                <a:solidFill>
+                  <a:schemeClr val="bg1"/>
+                </a:solidFill>
+                <a:latin typeface="Arial" pitchFamily="34" charset="0"/>
+                <a:ea typeface="Arial" pitchFamily="34" charset="-122"/>
+                <a:cs typeface="Arial" pitchFamily="34" charset="-120"/>
+              </a:rPr>
+              <a:t>Obrigado</a:t>
+            </a:r>
+            <a:endParaRPr lang="en-US" sz="5400" dirty="0"/>
+          </a:p>
+        </p:txBody>
+      </p:sp>
+      <p:sp>
+        <p:nvSpPr>
+          <p:cNvPr id="3" name="Text 1"/>
+          <p:cNvSpPr txBox="1"/>
+          <p:nvPr/>
+        </p:nvSpPr>
+        <p:spPr>
+          <a:xfrm>
+            <a:off x="548640" y="2377440"/>
+            <a:ext cx="8046720" cy="457200"/>
+          </a:xfrm>
+          <a:prstGeom prst="rect">
+            <a:avLst/>
+          </a:prstGeom>
+          <a:noFill/>
+          <a:ln/>
+        </p:spPr>
+        <p:txBody>
+          <a:bodyPr wrap="square" lIns="0" tIns="0" rIns="0" bIns="0" rtlCol="0" anchor="ctr"/>
+          <a:lstStyle/>
+          <a:p>
+            <a:pPr marL="0" indent="0">
+              <a:buNone/>
+            </a:pPr>
+            <a:r>
+              <a:rPr lang="en-US" sz="2400" i="1" dirty="0">
+                <a:solidFill>
+                  <a:schemeClr val="accent3"/>
+                </a:solidFill>
+                <a:latin typeface="Calibri" pitchFamily="34" charset="0"/>
+                <a:ea typeface="Calibri" pitchFamily="34" charset="-122"/>
+                <a:cs typeface="Calibri" pitchFamily="34" charset="-120"/>
+              </a:rPr>
+              <a:t>Questões?</a:t>
+            </a:r>
+            <a:endParaRPr lang="en-US" sz="2400" dirty="0"/>
           </a:p>
         </p:txBody>
       </p:sp>
@@ -2007,9 +3067,11 @@
       <p:sp>
         <p:nvSpPr>
           <p:cNvPr id="2" name="Text 0"/>
-          <p:cNvSpPr/>
+          <p:cNvSpPr>
+            <a:spLocks noGrp="1"/>
+          </p:cNvSpPr>
           <p:nvPr>
-            <p:ph idx="100" type="title" hasCustomPrompt="1"/>
+            <p:ph type="title" idx="100" hasCustomPrompt="1"/>
           </p:nvPr>
         </p:nvSpPr>
         <p:spPr>
@@ -2027,7 +3089,7 @@
           <a:bodyPr wrap="square" lIns="0" tIns="0" rIns="0" bIns="0" rtlCol="0" anchor="ctr"/>
           <a:lstStyle/>
           <a:p>
-            <a:pPr algn="l" indent="0" marL="0">
+            <a:pPr marL="0" indent="0" algn="l">
               <a:buNone/>
             </a:pPr>
             <a:r>
@@ -2093,7 +3155,7 @@
           <a:bodyPr wrap="square" lIns="0" tIns="0" rIns="0" bIns="0" rtlCol="0" anchor="t"/>
           <a:lstStyle/>
           <a:p>
-            <a:pPr indent="0" marL="0">
+            <a:pPr marL="0" indent="0">
               <a:buNone/>
             </a:pPr>
             <a:r>
@@ -2110,7 +3172,7 @@
             <a:endParaRPr lang="en-US" sz="1400" dirty="0"/>
           </a:p>
           <a:p>
-            <a:pPr indent="0" marL="0">
+            <a:pPr marL="0" indent="0">
               <a:buNone/>
             </a:pPr>
             <a:r>
@@ -2176,7 +3238,7 @@
           <a:bodyPr wrap="square" lIns="0" tIns="0" rIns="0" bIns="0" rtlCol="0" anchor="t"/>
           <a:lstStyle/>
           <a:p>
-            <a:pPr indent="0" marL="0">
+            <a:pPr marL="0" indent="0">
               <a:buNone/>
             </a:pPr>
             <a:r>
@@ -2193,7 +3255,7 @@
             <a:endParaRPr lang="en-US" sz="1400" dirty="0"/>
           </a:p>
           <a:p>
-            <a:pPr indent="0" marL="0">
+            <a:pPr marL="0" indent="0">
               <a:buNone/>
             </a:pPr>
             <a:r>
@@ -2257,7 +3319,7 @@
           <a:bodyPr wrap="square" lIns="0" tIns="0" rIns="0" bIns="0" rtlCol="0" anchor="ctr"/>
           <a:lstStyle/>
           <a:p>
-            <a:pPr algn="ctr" indent="0" marL="0">
+            <a:pPr marL="0" indent="0" algn="ctr">
               <a:buNone/>
             </a:pPr>
             <a:r>
@@ -2296,7 +3358,7 @@
           <a:bodyPr wrap="square" lIns="0" tIns="0" rIns="0" bIns="0" rtlCol="0" anchor="ctr"/>
           <a:lstStyle/>
           <a:p>
-            <a:pPr indent="0" marL="0">
+            <a:pPr marL="0" indent="0">
               <a:buNone/>
             </a:pPr>
             <a:r>
@@ -2313,7 +3375,7 @@
             <a:endParaRPr lang="en-US" sz="1500" dirty="0"/>
           </a:p>
           <a:p>
-            <a:pPr indent="0" marL="0">
+            <a:pPr marL="0" indent="0">
               <a:buNone/>
             </a:pPr>
             <a:r>
@@ -2377,7 +3439,7 @@
           <a:bodyPr wrap="square" lIns="0" tIns="0" rIns="0" bIns="0" rtlCol="0" anchor="ctr"/>
           <a:lstStyle/>
           <a:p>
-            <a:pPr algn="ctr" indent="0" marL="0">
+            <a:pPr marL="0" indent="0" algn="ctr">
               <a:buNone/>
             </a:pPr>
             <a:r>
@@ -2416,7 +3478,7 @@
           <a:bodyPr wrap="square" lIns="0" tIns="0" rIns="0" bIns="0" rtlCol="0" anchor="ctr"/>
           <a:lstStyle/>
           <a:p>
-            <a:pPr indent="0" marL="0">
+            <a:pPr marL="0" indent="0">
               <a:buNone/>
             </a:pPr>
             <a:r>
@@ -2433,7 +3495,7 @@
             <a:endParaRPr lang="en-US" sz="1500" dirty="0"/>
           </a:p>
           <a:p>
-            <a:pPr indent="0" marL="0">
+            <a:pPr marL="0" indent="0">
               <a:buNone/>
             </a:pPr>
             <a:r>
@@ -2497,7 +3559,7 @@
           <a:bodyPr wrap="square" lIns="0" tIns="0" rIns="0" bIns="0" rtlCol="0" anchor="ctr"/>
           <a:lstStyle/>
           <a:p>
-            <a:pPr algn="ctr" indent="0" marL="0">
+            <a:pPr marL="0" indent="0" algn="ctr">
               <a:buNone/>
             </a:pPr>
             <a:r>
@@ -2536,7 +3598,7 @@
           <a:bodyPr wrap="square" lIns="0" tIns="0" rIns="0" bIns="0" rtlCol="0" anchor="ctr"/>
           <a:lstStyle/>
           <a:p>
-            <a:pPr indent="0" marL="0">
+            <a:pPr marL="0" indent="0">
               <a:buNone/>
             </a:pPr>
             <a:r>
@@ -2553,7 +3615,7 @@
             <a:endParaRPr lang="en-US" sz="1500" dirty="0"/>
           </a:p>
           <a:p>
-            <a:pPr indent="0" marL="0">
+            <a:pPr marL="0" indent="0">
               <a:buNone/>
             </a:pPr>
             <a:r>
@@ -2617,7 +3679,7 @@
           <a:bodyPr wrap="square" lIns="0" tIns="0" rIns="0" bIns="0" rtlCol="0" anchor="ctr"/>
           <a:lstStyle/>
           <a:p>
-            <a:pPr algn="ctr" indent="0" marL="0">
+            <a:pPr marL="0" indent="0" algn="ctr">
               <a:buNone/>
             </a:pPr>
             <a:r>
@@ -2656,7 +3718,7 @@
           <a:bodyPr wrap="square" lIns="0" tIns="0" rIns="0" bIns="0" rtlCol="0" anchor="ctr"/>
           <a:lstStyle/>
           <a:p>
-            <a:pPr indent="0" marL="0">
+            <a:pPr marL="0" indent="0">
               <a:buNone/>
             </a:pPr>
             <a:r>
@@ -2673,7 +3735,7 @@
             <a:endParaRPr lang="en-US" sz="1500" dirty="0"/>
           </a:p>
           <a:p>
-            <a:pPr indent="0" marL="0">
+            <a:pPr marL="0" indent="0">
               <a:buNone/>
             </a:pPr>
             <a:r>
@@ -2712,7 +3774,7 @@
           <a:bodyPr wrap="square" lIns="0" tIns="0" rIns="0" bIns="0" rtlCol="0" anchor="ctr"/>
           <a:lstStyle/>
           <a:p>
-            <a:pPr indent="0" marL="0">
+            <a:pPr marL="0" indent="0">
               <a:buNone/>
             </a:pPr>
             <a:r>
@@ -2726,9 +3788,6 @@
               </a:rPr>
               <a:t>Vender é grátis. </a:t>
             </a:r>
-            <a:pPr indent="0" marL="0">
-              <a:buNone/>
-            </a:pPr>
             <a:r>
               <a:rPr lang="en-US" sz="1300" dirty="0">
                 <a:solidFill>
@@ -2764,7 +3823,7 @@
           </a:prstGeom>
           <a:extLst>
             <a:ext uri="{C572A759-6A51-4108-AA02-DFA0A04FC94B}">
-              <ma14:wrappingTextBoxFlag xmlns:ma14="http://schemas.microsoft.com/office/mac/drawingml/2011/main" val="0"/>
+              <ma14:wrappingTextBoxFlag xmlns:ma14="http://schemas.microsoft.com/office/mac/drawingml/2011/main" xmlns="" val="0"/>
             </a:ext>
           </a:extLst>
         </p:spPr>
@@ -2782,7 +3841,7 @@
           <a:p>
             <a:pPr algn="r"/>
             <a:fld id="{F7021451-1387-4CA6-816F-3879F97B5CBC}" type="slidenum">
-              <a:rPr b="0" lang="en-US"/>
+              <a:rPr lang="en-US" b="0"/>
               <a:t>2</a:t>
             </a:fld>
             <a:endParaRPr lang="en-US"/>
@@ -2817,9 +3876,11 @@
       <p:sp>
         <p:nvSpPr>
           <p:cNvPr id="2" name="Text 0"/>
-          <p:cNvSpPr/>
+          <p:cNvSpPr>
+            <a:spLocks noGrp="1"/>
+          </p:cNvSpPr>
           <p:nvPr>
-            <p:ph idx="100" type="title" hasCustomPrompt="1"/>
+            <p:ph type="title" idx="100" hasCustomPrompt="1"/>
           </p:nvPr>
         </p:nvSpPr>
         <p:spPr>
@@ -2837,7 +3898,7 @@
           <a:bodyPr wrap="square" lIns="0" tIns="0" rIns="0" bIns="0" rtlCol="0" anchor="ctr"/>
           <a:lstStyle/>
           <a:p>
-            <a:pPr algn="l" indent="0" marL="0">
+            <a:pPr marL="0" indent="0" algn="l">
               <a:buNone/>
             </a:pPr>
             <a:r>
@@ -2903,7 +3964,7 @@
           <a:bodyPr wrap="square" lIns="0" tIns="0" rIns="0" bIns="0" rtlCol="0" anchor="ctr"/>
           <a:lstStyle/>
           <a:p>
-            <a:pPr algn="ctr" indent="0" marL="0">
+            <a:pPr marL="0" indent="0" algn="ctr">
               <a:buNone/>
             </a:pPr>
             <a:r>
@@ -2942,7 +4003,7 @@
           <a:bodyPr wrap="square" lIns="0" tIns="0" rIns="0" bIns="0" rtlCol="0" anchor="ctr"/>
           <a:lstStyle/>
           <a:p>
-            <a:pPr indent="0" marL="0">
+            <a:pPr marL="0" indent="0">
               <a:buNone/>
             </a:pPr>
             <a:r>
@@ -3008,7 +4069,7 @@
           <a:bodyPr wrap="square" lIns="0" tIns="0" rIns="0" bIns="0" rtlCol="0" anchor="ctr"/>
           <a:lstStyle/>
           <a:p>
-            <a:pPr algn="ctr" indent="0" marL="0">
+            <a:pPr marL="0" indent="0" algn="ctr">
               <a:buNone/>
             </a:pPr>
             <a:r>
@@ -3047,7 +4108,7 @@
           <a:bodyPr wrap="square" lIns="0" tIns="0" rIns="0" bIns="0" rtlCol="0" anchor="ctr"/>
           <a:lstStyle/>
           <a:p>
-            <a:pPr indent="0" marL="0">
+            <a:pPr marL="0" indent="0">
               <a:buNone/>
             </a:pPr>
             <a:r>
@@ -3113,7 +4174,7 @@
           <a:bodyPr wrap="square" lIns="0" tIns="0" rIns="0" bIns="0" rtlCol="0" anchor="ctr"/>
           <a:lstStyle/>
           <a:p>
-            <a:pPr algn="ctr" indent="0" marL="0">
+            <a:pPr marL="0" indent="0" algn="ctr">
               <a:buNone/>
             </a:pPr>
             <a:r>
@@ -3152,7 +4213,7 @@
           <a:bodyPr wrap="square" lIns="0" tIns="0" rIns="0" bIns="0" rtlCol="0" anchor="ctr"/>
           <a:lstStyle/>
           <a:p>
-            <a:pPr indent="0" marL="0">
+            <a:pPr marL="0" indent="0">
               <a:buNone/>
             </a:pPr>
             <a:r>
@@ -3218,7 +4279,7 @@
           <a:bodyPr wrap="square" lIns="0" tIns="0" rIns="0" bIns="0" rtlCol="0" anchor="ctr"/>
           <a:lstStyle/>
           <a:p>
-            <a:pPr algn="ctr" indent="0" marL="0">
+            <a:pPr marL="0" indent="0" algn="ctr">
               <a:buNone/>
             </a:pPr>
             <a:r>
@@ -3257,7 +4318,7 @@
           <a:bodyPr wrap="square" lIns="0" tIns="0" rIns="0" bIns="0" rtlCol="0" anchor="ctr"/>
           <a:lstStyle/>
           <a:p>
-            <a:pPr indent="0" marL="0">
+            <a:pPr marL="0" indent="0">
               <a:buNone/>
             </a:pPr>
             <a:r>
@@ -3323,7 +4384,7 @@
           <a:bodyPr wrap="square" lIns="0" tIns="0" rIns="0" bIns="0" rtlCol="0" anchor="ctr"/>
           <a:lstStyle/>
           <a:p>
-            <a:pPr algn="ctr" indent="0" marL="0">
+            <a:pPr marL="0" indent="0" algn="ctr">
               <a:buNone/>
             </a:pPr>
             <a:r>
@@ -3362,7 +4423,7 @@
           <a:bodyPr wrap="square" lIns="0" tIns="0" rIns="0" bIns="0" rtlCol="0" anchor="ctr"/>
           <a:lstStyle/>
           <a:p>
-            <a:pPr indent="0" marL="0">
+            <a:pPr marL="0" indent="0">
               <a:buNone/>
             </a:pPr>
             <a:r>
@@ -3400,7 +4461,7 @@
           </a:prstGeom>
           <a:extLst>
             <a:ext uri="{C572A759-6A51-4108-AA02-DFA0A04FC94B}">
-              <ma14:wrappingTextBoxFlag xmlns:ma14="http://schemas.microsoft.com/office/mac/drawingml/2011/main" val="0"/>
+              <ma14:wrappingTextBoxFlag xmlns:ma14="http://schemas.microsoft.com/office/mac/drawingml/2011/main" xmlns="" val="0"/>
             </a:ext>
           </a:extLst>
         </p:spPr>
@@ -3418,7 +4479,7 @@
           <a:p>
             <a:pPr algn="r"/>
             <a:fld id="{F7021451-1387-4CA6-816F-3879F97B5CBC}" type="slidenum">
-              <a:rPr b="0" lang="en-US"/>
+              <a:rPr lang="en-US" b="0"/>
               <a:t>3</a:t>
             </a:fld>
             <a:endParaRPr lang="en-US"/>
@@ -3453,9 +4514,11 @@
       <p:sp>
         <p:nvSpPr>
           <p:cNvPr id="2" name="Text 0"/>
-          <p:cNvSpPr/>
+          <p:cNvSpPr>
+            <a:spLocks noGrp="1"/>
+          </p:cNvSpPr>
           <p:nvPr>
-            <p:ph idx="100" type="title" hasCustomPrompt="1"/>
+            <p:ph type="title" idx="100" hasCustomPrompt="1"/>
           </p:nvPr>
         </p:nvSpPr>
         <p:spPr>
@@ -3473,7 +4536,7 @@
           <a:bodyPr wrap="square" lIns="0" tIns="0" rIns="0" bIns="0" rtlCol="0" anchor="ctr"/>
           <a:lstStyle/>
           <a:p>
-            <a:pPr algn="l" indent="0" marL="0">
+            <a:pPr marL="0" indent="0" algn="l">
               <a:buNone/>
             </a:pPr>
             <a:r>
@@ -3493,14 +4556,14 @@
       </p:sp>
       <p:pic>
         <p:nvPicPr>
-          <p:cNvPr id="3" name="BMC" descr="Business Model Canvas da GrowNear">    </p:cNvPr>
+          <p:cNvPr id="3" name="BMC" descr="Business Model Canvas da GrowNear"/>
           <p:cNvPicPr>
             <a:picLocks noChangeAspect="1"/>
           </p:cNvPicPr>
           <p:nvPr/>
         </p:nvPicPr>
         <p:blipFill>
-          <a:blip r:embed="rId1"/>
+          <a:blip r:embed="rId3"/>
           <a:stretch>
             <a:fillRect/>
           </a:stretch>
@@ -3535,7 +4598,7 @@
           </a:prstGeom>
           <a:extLst>
             <a:ext uri="{C572A759-6A51-4108-AA02-DFA0A04FC94B}">
-              <ma14:wrappingTextBoxFlag xmlns:ma14="http://schemas.microsoft.com/office/mac/drawingml/2011/main" val="0"/>
+              <ma14:wrappingTextBoxFlag xmlns:ma14="http://schemas.microsoft.com/office/mac/drawingml/2011/main" xmlns="" val="0"/>
             </a:ext>
           </a:extLst>
         </p:spPr>
@@ -3553,7 +4616,7 @@
           <a:p>
             <a:pPr algn="r"/>
             <a:fld id="{F7021451-1387-4CA6-816F-3879F97B5CBC}" type="slidenum">
-              <a:rPr b="0" lang="en-US"/>
+              <a:rPr lang="en-US" b="0"/>
               <a:t>4</a:t>
             </a:fld>
             <a:endParaRPr lang="en-US"/>
@@ -3588,9 +4651,11 @@
       <p:sp>
         <p:nvSpPr>
           <p:cNvPr id="2" name="Text 0"/>
-          <p:cNvSpPr/>
+          <p:cNvSpPr>
+            <a:spLocks noGrp="1"/>
+          </p:cNvSpPr>
           <p:nvPr>
-            <p:ph idx="100" type="title" hasCustomPrompt="1"/>
+            <p:ph type="title" idx="100" hasCustomPrompt="1"/>
           </p:nvPr>
         </p:nvSpPr>
         <p:spPr>
@@ -3608,7 +4673,7 @@
           <a:bodyPr wrap="square" lIns="0" tIns="0" rIns="0" bIns="0" rtlCol="0" anchor="ctr"/>
           <a:lstStyle/>
           <a:p>
-            <a:pPr algn="l" indent="0" marL="0">
+            <a:pPr marL="0" indent="0" algn="l">
               <a:buNone/>
             </a:pPr>
             <a:r>
@@ -3628,14 +4693,14 @@
       </p:sp>
       <p:pic>
         <p:nvPicPr>
-          <p:cNvPr id="3" name="SWOT" descr="Análise SWOT da GrowNear">    </p:cNvPr>
+          <p:cNvPr id="3" name="SWOT" descr="Análise SWOT da GrowNear"/>
           <p:cNvPicPr>
             <a:picLocks noChangeAspect="1"/>
           </p:cNvPicPr>
           <p:nvPr/>
         </p:nvPicPr>
         <p:blipFill>
-          <a:blip r:embed="rId1"/>
+          <a:blip r:embed="rId3"/>
           <a:stretch>
             <a:fillRect/>
           </a:stretch>
@@ -3671,7 +4736,7 @@
           <a:bodyPr wrap="square" lIns="0" tIns="0" rIns="0" bIns="0" rtlCol="0" anchor="ctr"/>
           <a:lstStyle/>
           <a:p>
-            <a:pPr indent="0" marL="0">
+            <a:pPr marL="0" indent="0">
               <a:buNone/>
             </a:pPr>
             <a:r>
@@ -3737,7 +4802,7 @@
           <a:bodyPr wrap="square" lIns="0" tIns="0" rIns="0" bIns="0" rtlCol="0" anchor="t"/>
           <a:lstStyle/>
           <a:p>
-            <a:pPr indent="0" marL="0">
+            <a:pPr marL="0" indent="0">
               <a:buNone/>
             </a:pPr>
             <a:r>
@@ -3754,7 +4819,7 @@
             <a:endParaRPr lang="en-US" sz="1300" dirty="0"/>
           </a:p>
           <a:p>
-            <a:pPr indent="0" marL="0">
+            <a:pPr marL="0" indent="0">
               <a:buNone/>
             </a:pPr>
             <a:r>
@@ -3820,7 +4885,7 @@
           <a:bodyPr wrap="square" lIns="0" tIns="0" rIns="0" bIns="0" rtlCol="0" anchor="t"/>
           <a:lstStyle/>
           <a:p>
-            <a:pPr indent="0" marL="0">
+            <a:pPr marL="0" indent="0">
               <a:buNone/>
             </a:pPr>
             <a:r>
@@ -3837,7 +4902,7 @@
             <a:endParaRPr lang="en-US" sz="1300" dirty="0"/>
           </a:p>
           <a:p>
-            <a:pPr indent="0" marL="0">
+            <a:pPr marL="0" indent="0">
               <a:buNone/>
             </a:pPr>
             <a:r>
@@ -3903,7 +4968,7 @@
           <a:bodyPr wrap="square" lIns="0" tIns="0" rIns="0" bIns="0" rtlCol="0" anchor="t"/>
           <a:lstStyle/>
           <a:p>
-            <a:pPr indent="0" marL="0">
+            <a:pPr marL="0" indent="0">
               <a:buNone/>
             </a:pPr>
             <a:r>
@@ -3920,7 +4985,7 @@
             <a:endParaRPr lang="en-US" sz="1300" dirty="0"/>
           </a:p>
           <a:p>
-            <a:pPr indent="0" marL="0">
+            <a:pPr marL="0" indent="0">
               <a:buNone/>
             </a:pPr>
             <a:r>
@@ -3958,7 +5023,7 @@
           </a:prstGeom>
           <a:extLst>
             <a:ext uri="{C572A759-6A51-4108-AA02-DFA0A04FC94B}">
-              <ma14:wrappingTextBoxFlag xmlns:ma14="http://schemas.microsoft.com/office/mac/drawingml/2011/main" val="0"/>
+              <ma14:wrappingTextBoxFlag xmlns:ma14="http://schemas.microsoft.com/office/mac/drawingml/2011/main" xmlns="" val="0"/>
             </a:ext>
           </a:extLst>
         </p:spPr>
@@ -3976,7 +5041,7 @@
           <a:p>
             <a:pPr algn="r"/>
             <a:fld id="{F7021451-1387-4CA6-816F-3879F97B5CBC}" type="slidenum">
-              <a:rPr b="0" lang="en-US"/>
+              <a:rPr lang="en-US" b="0"/>
               <a:t>5</a:t>
             </a:fld>
             <a:endParaRPr lang="en-US"/>
@@ -4011,9 +5076,11 @@
       <p:sp>
         <p:nvSpPr>
           <p:cNvPr id="2" name="Text 0"/>
-          <p:cNvSpPr/>
+          <p:cNvSpPr>
+            <a:spLocks noGrp="1"/>
+          </p:cNvSpPr>
           <p:nvPr>
-            <p:ph idx="100" type="title" hasCustomPrompt="1"/>
+            <p:ph type="title" idx="100" hasCustomPrompt="1"/>
           </p:nvPr>
         </p:nvSpPr>
         <p:spPr>
@@ -4031,7 +5098,7 @@
           <a:bodyPr wrap="square" lIns="0" tIns="0" rIns="0" bIns="0" rtlCol="0" anchor="ctr"/>
           <a:lstStyle/>
           <a:p>
-            <a:pPr algn="l" indent="0" marL="0">
+            <a:pPr marL="0" indent="0" algn="l">
               <a:buNone/>
             </a:pPr>
             <a:r>
@@ -4097,7 +5164,7 @@
           <a:bodyPr wrap="square" lIns="0" tIns="0" rIns="0" bIns="0" rtlCol="0" anchor="ctr"/>
           <a:lstStyle/>
           <a:p>
-            <a:pPr indent="0" marL="0">
+            <a:pPr marL="0" indent="0">
               <a:buNone/>
             </a:pPr>
             <a:r>
@@ -4111,9 +5178,6 @@
               </a:rPr>
               <a:t>Objetivo geral  </a:t>
             </a:r>
-            <a:pPr indent="0" marL="0">
-              <a:buNone/>
-            </a:pPr>
             <a:r>
               <a:rPr lang="en-US" sz="1400" dirty="0">
                 <a:solidFill>
@@ -4177,7 +5241,7 @@
           <a:bodyPr wrap="square" lIns="0" tIns="0" rIns="0" bIns="0" rtlCol="0" anchor="ctr"/>
           <a:lstStyle/>
           <a:p>
-            <a:pPr indent="0" marL="0">
+            <a:pPr marL="0" indent="0">
               <a:buNone/>
             </a:pPr>
             <a:r>
@@ -4216,7 +5280,7 @@
           <a:bodyPr wrap="square" lIns="0" tIns="0" rIns="0" bIns="0" rtlCol="0" anchor="ctr"/>
           <a:lstStyle/>
           <a:p>
-            <a:pPr indent="0" marL="0">
+            <a:pPr marL="0" indent="0">
               <a:buNone/>
             </a:pPr>
             <a:r>
@@ -4282,7 +5346,7 @@
           <a:bodyPr wrap="square" lIns="0" tIns="0" rIns="0" bIns="0" rtlCol="0" anchor="ctr"/>
           <a:lstStyle/>
           <a:p>
-            <a:pPr indent="0" marL="0">
+            <a:pPr marL="0" indent="0">
               <a:buNone/>
             </a:pPr>
             <a:r>
@@ -4321,7 +5385,7 @@
           <a:bodyPr wrap="square" lIns="0" tIns="0" rIns="0" bIns="0" rtlCol="0" anchor="ctr"/>
           <a:lstStyle/>
           <a:p>
-            <a:pPr indent="0" marL="0">
+            <a:pPr marL="0" indent="0">
               <a:buNone/>
             </a:pPr>
             <a:r>
@@ -4387,7 +5451,7 @@
           <a:bodyPr wrap="square" lIns="0" tIns="0" rIns="0" bIns="0" rtlCol="0" anchor="ctr"/>
           <a:lstStyle/>
           <a:p>
-            <a:pPr indent="0" marL="0">
+            <a:pPr marL="0" indent="0">
               <a:buNone/>
             </a:pPr>
             <a:r>
@@ -4426,7 +5490,7 @@
           <a:bodyPr wrap="square" lIns="0" tIns="0" rIns="0" bIns="0" rtlCol="0" anchor="ctr"/>
           <a:lstStyle/>
           <a:p>
-            <a:pPr indent="0" marL="0">
+            <a:pPr marL="0" indent="0">
               <a:buNone/>
             </a:pPr>
             <a:r>
@@ -4492,7 +5556,7 @@
           <a:bodyPr wrap="square" lIns="0" tIns="0" rIns="0" bIns="0" rtlCol="0" anchor="ctr"/>
           <a:lstStyle/>
           <a:p>
-            <a:pPr indent="0" marL="0">
+            <a:pPr marL="0" indent="0">
               <a:buNone/>
             </a:pPr>
             <a:r>
@@ -4531,7 +5595,7 @@
           <a:bodyPr wrap="square" lIns="0" tIns="0" rIns="0" bIns="0" rtlCol="0" anchor="ctr"/>
           <a:lstStyle/>
           <a:p>
-            <a:pPr indent="0" marL="0">
+            <a:pPr marL="0" indent="0">
               <a:buNone/>
             </a:pPr>
             <a:r>
@@ -4597,7 +5661,7 @@
           <a:bodyPr wrap="square" lIns="0" tIns="0" rIns="0" bIns="0" rtlCol="0" anchor="ctr"/>
           <a:lstStyle/>
           <a:p>
-            <a:pPr indent="0" marL="0">
+            <a:pPr marL="0" indent="0">
               <a:buNone/>
             </a:pPr>
             <a:r>
@@ -4636,7 +5700,7 @@
           <a:bodyPr wrap="square" lIns="0" tIns="0" rIns="0" bIns="0" rtlCol="0" anchor="ctr"/>
           <a:lstStyle/>
           <a:p>
-            <a:pPr indent="0" marL="0">
+            <a:pPr marL="0" indent="0">
               <a:buNone/>
             </a:pPr>
             <a:r>
@@ -4702,7 +5766,7 @@
           <a:bodyPr wrap="square" lIns="0" tIns="0" rIns="0" bIns="0" rtlCol="0" anchor="ctr"/>
           <a:lstStyle/>
           <a:p>
-            <a:pPr indent="0" marL="0">
+            <a:pPr marL="0" indent="0">
               <a:buNone/>
             </a:pPr>
             <a:r>
@@ -4741,7 +5805,7 @@
           <a:bodyPr wrap="square" lIns="0" tIns="0" rIns="0" bIns="0" rtlCol="0" anchor="ctr"/>
           <a:lstStyle/>
           <a:p>
-            <a:pPr indent="0" marL="0">
+            <a:pPr marL="0" indent="0">
               <a:buNone/>
             </a:pPr>
             <a:r>
@@ -4807,7 +5871,7 @@
           <a:bodyPr wrap="square" lIns="0" tIns="0" rIns="0" bIns="0" rtlCol="0" anchor="ctr"/>
           <a:lstStyle/>
           <a:p>
-            <a:pPr indent="0" marL="0">
+            <a:pPr marL="0" indent="0">
               <a:buNone/>
             </a:pPr>
             <a:r>
@@ -4846,7 +5910,7 @@
           <a:bodyPr wrap="square" lIns="0" tIns="0" rIns="0" bIns="0" rtlCol="0" anchor="ctr"/>
           <a:lstStyle/>
           <a:p>
-            <a:pPr indent="0" marL="0">
+            <a:pPr marL="0" indent="0">
               <a:buNone/>
             </a:pPr>
             <a:r>
@@ -4912,7 +5976,7 @@
           <a:bodyPr wrap="square" lIns="0" tIns="0" rIns="0" bIns="0" rtlCol="0" anchor="ctr"/>
           <a:lstStyle/>
           <a:p>
-            <a:pPr indent="0" marL="0">
+            <a:pPr marL="0" indent="0">
               <a:buNone/>
             </a:pPr>
             <a:r>
@@ -4951,7 +6015,7 @@
           <a:bodyPr wrap="square" lIns="0" tIns="0" rIns="0" bIns="0" rtlCol="0" anchor="ctr"/>
           <a:lstStyle/>
           <a:p>
-            <a:pPr indent="0" marL="0">
+            <a:pPr marL="0" indent="0">
               <a:buNone/>
             </a:pPr>
             <a:r>
@@ -4990,7 +6054,7 @@
           <a:bodyPr wrap="square" lIns="0" tIns="0" rIns="0" bIns="0" rtlCol="0" anchor="ctr"/>
           <a:lstStyle/>
           <a:p>
-            <a:pPr indent="0" marL="0">
+            <a:pPr marL="0" indent="0">
               <a:buNone/>
             </a:pPr>
             <a:r>
@@ -5010,7 +6074,7 @@
       </p:sp>
       <p:sp>
         <p:nvSpPr>
-          <p:cNvPr id="25" name="Slide Number Placeholder 0"/>
+          <p:cNvPr id="30" name="Slide Number Placeholder 0"/>
           <p:cNvSpPr>
             <a:spLocks noGrp="1"/>
           </p:cNvSpPr>
@@ -5028,7 +6092,7 @@
           </a:prstGeom>
           <a:extLst>
             <a:ext uri="{C572A759-6A51-4108-AA02-DFA0A04FC94B}">
-              <ma14:wrappingTextBoxFlag xmlns:ma14="http://schemas.microsoft.com/office/mac/drawingml/2011/main" val="0"/>
+              <ma14:wrappingTextBoxFlag xmlns:ma14="http://schemas.microsoft.com/office/mac/drawingml/2011/main" xmlns="" val="0"/>
             </a:ext>
           </a:extLst>
         </p:spPr>
@@ -5046,7 +6110,7 @@
           <a:p>
             <a:pPr algn="r"/>
             <a:fld id="{F7021451-1387-4CA6-816F-3879F97B5CBC}" type="slidenum">
-              <a:rPr b="0" lang="en-US"/>
+              <a:rPr lang="en-US" b="0"/>
               <a:t>6</a:t>
             </a:fld>
             <a:endParaRPr lang="en-US"/>
@@ -5081,9 +6145,11 @@
       <p:sp>
         <p:nvSpPr>
           <p:cNvPr id="2" name="Text 0"/>
-          <p:cNvSpPr/>
+          <p:cNvSpPr>
+            <a:spLocks noGrp="1"/>
+          </p:cNvSpPr>
           <p:nvPr>
-            <p:ph idx="100" type="title" hasCustomPrompt="1"/>
+            <p:ph type="title" idx="100" hasCustomPrompt="1"/>
           </p:nvPr>
         </p:nvSpPr>
         <p:spPr>
@@ -5101,7 +6167,7 @@
           <a:bodyPr wrap="square" lIns="0" tIns="0" rIns="0" bIns="0" rtlCol="0" anchor="ctr"/>
           <a:lstStyle/>
           <a:p>
-            <a:pPr algn="l" indent="0" marL="0">
+            <a:pPr marL="0" indent="0" algn="l">
               <a:buNone/>
             </a:pPr>
             <a:r>
@@ -5139,7 +6205,7 @@
           </a:prstGeom>
           <a:extLst>
             <a:ext uri="{C572A759-6A51-4108-AA02-DFA0A04FC94B}">
-              <ma14:wrappingTextBoxFlag xmlns:ma14="http://schemas.microsoft.com/office/mac/drawingml/2011/main" val="0"/>
+              <ma14:wrappingTextBoxFlag xmlns:ma14="http://schemas.microsoft.com/office/mac/drawingml/2011/main" xmlns="" val="0"/>
             </a:ext>
           </a:extLst>
         </p:spPr>
@@ -5157,10 +6223,848 @@
           <a:p>
             <a:pPr algn="r"/>
             <a:fld id="{F7021451-1387-4CA6-816F-3879F97B5CBC}" type="slidenum">
-              <a:rPr b="0" lang="en-US"/>
+              <a:rPr lang="en-US" b="0"/>
               <a:t>7</a:t>
             </a:fld>
             <a:endParaRPr lang="en-US"/>
+          </a:p>
+        </p:txBody>
+      </p:sp>
+      <p:sp>
+        <p:nvSpPr>
+          <p:cNvPr id="3" name="Recolha 1">
+            <a:extLst>
+              <a:ext uri="{FF2B5EF4-FFF2-40B4-BE49-F238E27FC236}">
+                <a16:creationId xmlns:a16="http://schemas.microsoft.com/office/drawing/2014/main" id="{C77A342E-360F-D0CB-583C-A5C7CDFE1C8F}"/>
+              </a:ext>
+            </a:extLst>
+          </p:cNvPr>
+          <p:cNvSpPr/>
+          <p:nvPr/>
+        </p:nvSpPr>
+        <p:spPr>
+          <a:xfrm>
+            <a:off x="457200" y="1092200"/>
+            <a:ext cx="1917700" cy="1219200"/>
+          </a:xfrm>
+          <a:prstGeom prst="roundRect">
+            <a:avLst>
+              <a:gd name="adj" fmla="val 6250"/>
+            </a:avLst>
+          </a:prstGeom>
+          <a:solidFill>
+            <a:srgbClr val="EEF5EF"/>
+          </a:solidFill>
+          <a:ln w="12700" cap="flat" cmpd="sng" algn="ctr">
+            <a:noFill/>
+            <a:prstDash val="solid"/>
+            <a:miter lim="800000"/>
+          </a:ln>
+          <a:effectLst/>
+          <a:extLst>
+            <a:ext uri="{91240B29-F687-4F45-9708-019B960494DF}">
+              <a14:hiddenLine xmlns:a14="http://schemas.microsoft.com/office/drawing/2010/main" w="12700" cap="flat" cmpd="sng" algn="ctr">
+                <a:solidFill>
+                  <a:schemeClr val="accent1">
+                    <a:shade val="15000"/>
+                  </a:schemeClr>
+                </a:solidFill>
+                <a:prstDash val="solid"/>
+                <a:miter lim="800000"/>
+              </a14:hiddenLine>
+            </a:ext>
+          </a:extLst>
+        </p:spPr>
+        <p:style>
+          <a:lnRef idx="2">
+            <a:schemeClr val="accent1">
+              <a:shade val="15000"/>
+            </a:schemeClr>
+          </a:lnRef>
+          <a:fillRef idx="1">
+            <a:schemeClr val="accent1"/>
+          </a:fillRef>
+          <a:effectRef idx="0">
+            <a:schemeClr val="accent1"/>
+          </a:effectRef>
+          <a:fontRef idx="minor">
+            <a:schemeClr val="lt1"/>
+          </a:fontRef>
+        </p:style>
+        <p:txBody>
+          <a:bodyPr rtlCol="0" anchor="ctr"/>
+          <a:lstStyle/>
+          <a:p>
+            <a:pPr algn="ctr"/>
+            <a:endParaRPr lang="pt-PT"/>
+          </a:p>
+        </p:txBody>
+      </p:sp>
+      <p:sp>
+        <p:nvSpPr>
+          <p:cNvPr id="4" name="TextBox 3">
+            <a:extLst>
+              <a:ext uri="{FF2B5EF4-FFF2-40B4-BE49-F238E27FC236}">
+                <a16:creationId xmlns:a16="http://schemas.microsoft.com/office/drawing/2014/main" id="{6463E819-8B97-8E5F-4DC8-FE4302E46E57}"/>
+              </a:ext>
+            </a:extLst>
+          </p:cNvPr>
+          <p:cNvSpPr txBox="1"/>
+          <p:nvPr/>
+        </p:nvSpPr>
+        <p:spPr>
+          <a:xfrm>
+            <a:off x="609600" y="1244599"/>
+            <a:ext cx="1612900" cy="914400"/>
+          </a:xfrm>
+          <a:prstGeom prst="rect">
+            <a:avLst/>
+          </a:prstGeom>
+          <a:noFill/>
+        </p:spPr>
+        <p:txBody>
+          <a:bodyPr vert="horz" wrap="square" lIns="0" tIns="0" rIns="0" bIns="0" rtlCol="0" anchor="ctr">
+            <a:noAutofit/>
+          </a:bodyPr>
+          <a:lstStyle/>
+          <a:p>
+            <a:r>
+              <a:rPr lang="pt-PT" sz="3000" b="1">
+                <a:solidFill>
+                  <a:srgbClr val="1E8A44"/>
+                </a:solidFill>
+                <a:latin typeface="Arial" panose="020B0604020202020204" pitchFamily="34" charset="0"/>
+              </a:rPr>
+              <a:t>114</a:t>
+            </a:r>
+          </a:p>
+          <a:p>
+            <a:r>
+              <a:rPr lang="pt-PT" sz="1400">
+                <a:solidFill>
+                  <a:srgbClr val="1F2A24"/>
+                </a:solidFill>
+                <a:latin typeface="Calibri" panose="020F0502020204030204" pitchFamily="34" charset="0"/>
+              </a:rPr>
+              <a:t>respostas recebidas</a:t>
+            </a:r>
+          </a:p>
+        </p:txBody>
+      </p:sp>
+      <p:sp>
+        <p:nvSpPr>
+          <p:cNvPr id="5" name="Recolha 2">
+            <a:extLst>
+              <a:ext uri="{FF2B5EF4-FFF2-40B4-BE49-F238E27FC236}">
+                <a16:creationId xmlns:a16="http://schemas.microsoft.com/office/drawing/2014/main" id="{6CF048B0-D18B-8A30-B8A9-475EE0F1A99C}"/>
+              </a:ext>
+            </a:extLst>
+          </p:cNvPr>
+          <p:cNvSpPr/>
+          <p:nvPr/>
+        </p:nvSpPr>
+        <p:spPr>
+          <a:xfrm>
+            <a:off x="2569591" y="1092200"/>
+            <a:ext cx="1917700" cy="1219200"/>
+          </a:xfrm>
+          <a:prstGeom prst="roundRect">
+            <a:avLst>
+              <a:gd name="adj" fmla="val 6250"/>
+            </a:avLst>
+          </a:prstGeom>
+          <a:solidFill>
+            <a:srgbClr val="EEF5EF"/>
+          </a:solidFill>
+          <a:ln w="12700" cap="flat" cmpd="sng" algn="ctr">
+            <a:noFill/>
+            <a:prstDash val="solid"/>
+            <a:miter lim="800000"/>
+          </a:ln>
+          <a:effectLst/>
+          <a:extLst>
+            <a:ext uri="{91240B29-F687-4F45-9708-019B960494DF}">
+              <a14:hiddenLine xmlns:a14="http://schemas.microsoft.com/office/drawing/2010/main" w="12700" cap="flat" cmpd="sng" algn="ctr">
+                <a:solidFill>
+                  <a:schemeClr val="accent1">
+                    <a:shade val="15000"/>
+                  </a:schemeClr>
+                </a:solidFill>
+                <a:prstDash val="solid"/>
+                <a:miter lim="800000"/>
+              </a14:hiddenLine>
+            </a:ext>
+          </a:extLst>
+        </p:spPr>
+        <p:style>
+          <a:lnRef idx="2">
+            <a:schemeClr val="accent1">
+              <a:shade val="15000"/>
+            </a:schemeClr>
+          </a:lnRef>
+          <a:fillRef idx="1">
+            <a:schemeClr val="accent1"/>
+          </a:fillRef>
+          <a:effectRef idx="0">
+            <a:schemeClr val="accent1"/>
+          </a:effectRef>
+          <a:fontRef idx="minor">
+            <a:schemeClr val="lt1"/>
+          </a:fontRef>
+        </p:style>
+        <p:txBody>
+          <a:bodyPr rtlCol="0" anchor="ctr"/>
+          <a:lstStyle/>
+          <a:p>
+            <a:pPr algn="ctr"/>
+            <a:endParaRPr lang="pt-PT"/>
+          </a:p>
+        </p:txBody>
+      </p:sp>
+      <p:sp>
+        <p:nvSpPr>
+          <p:cNvPr id="6" name="TextBox 5">
+            <a:extLst>
+              <a:ext uri="{FF2B5EF4-FFF2-40B4-BE49-F238E27FC236}">
+                <a16:creationId xmlns:a16="http://schemas.microsoft.com/office/drawing/2014/main" id="{AAA5FAC2-FEA0-7415-3975-A76460927AB1}"/>
+              </a:ext>
+            </a:extLst>
+          </p:cNvPr>
+          <p:cNvSpPr txBox="1"/>
+          <p:nvPr/>
+        </p:nvSpPr>
+        <p:spPr>
+          <a:xfrm>
+            <a:off x="2721991" y="1244599"/>
+            <a:ext cx="1612900" cy="914400"/>
+          </a:xfrm>
+          <a:prstGeom prst="rect">
+            <a:avLst/>
+          </a:prstGeom>
+          <a:noFill/>
+        </p:spPr>
+        <p:txBody>
+          <a:bodyPr vert="horz" wrap="square" lIns="0" tIns="0" rIns="0" bIns="0" rtlCol="0" anchor="ctr">
+            <a:noAutofit/>
+          </a:bodyPr>
+          <a:lstStyle/>
+          <a:p>
+            <a:r>
+              <a:rPr lang="pt-PT" sz="3000" b="1">
+                <a:solidFill>
+                  <a:srgbClr val="1E8A44"/>
+                </a:solidFill>
+                <a:latin typeface="Arial" panose="020B0604020202020204" pitchFamily="34" charset="0"/>
+              </a:rPr>
+              <a:t>113</a:t>
+            </a:r>
+          </a:p>
+          <a:p>
+            <a:r>
+              <a:rPr lang="pt-PT" sz="1400">
+                <a:solidFill>
+                  <a:srgbClr val="1F2A24"/>
+                </a:solidFill>
+                <a:latin typeface="Calibri" panose="020F0502020204030204" pitchFamily="34" charset="0"/>
+              </a:rPr>
+              <a:t>respostas válidas</a:t>
+            </a:r>
+          </a:p>
+        </p:txBody>
+      </p:sp>
+      <p:sp>
+        <p:nvSpPr>
+          <p:cNvPr id="7" name="Recolha 3">
+            <a:extLst>
+              <a:ext uri="{FF2B5EF4-FFF2-40B4-BE49-F238E27FC236}">
+                <a16:creationId xmlns:a16="http://schemas.microsoft.com/office/drawing/2014/main" id="{77B7FE52-3E3B-8231-8885-3DCCC37F1D6F}"/>
+              </a:ext>
+            </a:extLst>
+          </p:cNvPr>
+          <p:cNvSpPr/>
+          <p:nvPr/>
+        </p:nvSpPr>
+        <p:spPr>
+          <a:xfrm>
+            <a:off x="4681982" y="1092200"/>
+            <a:ext cx="1917700" cy="1219200"/>
+          </a:xfrm>
+          <a:prstGeom prst="roundRect">
+            <a:avLst>
+              <a:gd name="adj" fmla="val 6250"/>
+            </a:avLst>
+          </a:prstGeom>
+          <a:solidFill>
+            <a:srgbClr val="EEF5EF"/>
+          </a:solidFill>
+          <a:ln w="12700" cap="flat" cmpd="sng" algn="ctr">
+            <a:noFill/>
+            <a:prstDash val="solid"/>
+            <a:miter lim="800000"/>
+          </a:ln>
+          <a:effectLst/>
+          <a:extLst>
+            <a:ext uri="{91240B29-F687-4F45-9708-019B960494DF}">
+              <a14:hiddenLine xmlns:a14="http://schemas.microsoft.com/office/drawing/2010/main" w="12700" cap="flat" cmpd="sng" algn="ctr">
+                <a:solidFill>
+                  <a:schemeClr val="accent1">
+                    <a:shade val="15000"/>
+                  </a:schemeClr>
+                </a:solidFill>
+                <a:prstDash val="solid"/>
+                <a:miter lim="800000"/>
+              </a14:hiddenLine>
+            </a:ext>
+          </a:extLst>
+        </p:spPr>
+        <p:style>
+          <a:lnRef idx="2">
+            <a:schemeClr val="accent1">
+              <a:shade val="15000"/>
+            </a:schemeClr>
+          </a:lnRef>
+          <a:fillRef idx="1">
+            <a:schemeClr val="accent1"/>
+          </a:fillRef>
+          <a:effectRef idx="0">
+            <a:schemeClr val="accent1"/>
+          </a:effectRef>
+          <a:fontRef idx="minor">
+            <a:schemeClr val="lt1"/>
+          </a:fontRef>
+        </p:style>
+        <p:txBody>
+          <a:bodyPr rtlCol="0" anchor="ctr"/>
+          <a:lstStyle/>
+          <a:p>
+            <a:pPr algn="ctr"/>
+            <a:endParaRPr lang="pt-PT"/>
+          </a:p>
+        </p:txBody>
+      </p:sp>
+      <p:sp>
+        <p:nvSpPr>
+          <p:cNvPr id="8" name="TextBox 7">
+            <a:extLst>
+              <a:ext uri="{FF2B5EF4-FFF2-40B4-BE49-F238E27FC236}">
+                <a16:creationId xmlns:a16="http://schemas.microsoft.com/office/drawing/2014/main" id="{011F74FD-066C-0C9B-12E4-F450EE39D0F0}"/>
+              </a:ext>
+            </a:extLst>
+          </p:cNvPr>
+          <p:cNvSpPr txBox="1"/>
+          <p:nvPr/>
+        </p:nvSpPr>
+        <p:spPr>
+          <a:xfrm>
+            <a:off x="4834382" y="1244599"/>
+            <a:ext cx="1612900" cy="914400"/>
+          </a:xfrm>
+          <a:prstGeom prst="rect">
+            <a:avLst/>
+          </a:prstGeom>
+          <a:noFill/>
+        </p:spPr>
+        <p:txBody>
+          <a:bodyPr vert="horz" wrap="square" lIns="0" tIns="0" rIns="0" bIns="0" rtlCol="0" anchor="ctr">
+            <a:noAutofit/>
+          </a:bodyPr>
+          <a:lstStyle/>
+          <a:p>
+            <a:r>
+              <a:rPr lang="pt-PT" sz="3000" b="1">
+                <a:solidFill>
+                  <a:srgbClr val="1E8A44"/>
+                </a:solidFill>
+                <a:latin typeface="Arial" panose="020B0604020202020204" pitchFamily="34" charset="0"/>
+              </a:rPr>
+              <a:t>4 dias</a:t>
+            </a:r>
+          </a:p>
+          <a:p>
+            <a:r>
+              <a:rPr lang="pt-PT" sz="1400">
+                <a:solidFill>
+                  <a:srgbClr val="1F2A24"/>
+                </a:solidFill>
+                <a:latin typeface="Calibri" panose="020F0502020204030204" pitchFamily="34" charset="0"/>
+              </a:rPr>
+              <a:t>de 08 a 11/10/2026</a:t>
+            </a:r>
+          </a:p>
+        </p:txBody>
+      </p:sp>
+      <p:sp>
+        <p:nvSpPr>
+          <p:cNvPr id="9" name="Recolha 4">
+            <a:extLst>
+              <a:ext uri="{FF2B5EF4-FFF2-40B4-BE49-F238E27FC236}">
+                <a16:creationId xmlns:a16="http://schemas.microsoft.com/office/drawing/2014/main" id="{7409832E-0EC7-D0FB-0100-74503BDDA463}"/>
+              </a:ext>
+            </a:extLst>
+          </p:cNvPr>
+          <p:cNvSpPr/>
+          <p:nvPr/>
+        </p:nvSpPr>
+        <p:spPr>
+          <a:xfrm>
+            <a:off x="6794373" y="1092200"/>
+            <a:ext cx="1917700" cy="1219200"/>
+          </a:xfrm>
+          <a:prstGeom prst="roundRect">
+            <a:avLst>
+              <a:gd name="adj" fmla="val 6250"/>
+            </a:avLst>
+          </a:prstGeom>
+          <a:solidFill>
+            <a:srgbClr val="EEF5EF"/>
+          </a:solidFill>
+          <a:ln w="12700" cap="flat" cmpd="sng" algn="ctr">
+            <a:noFill/>
+            <a:prstDash val="solid"/>
+            <a:miter lim="800000"/>
+          </a:ln>
+          <a:effectLst/>
+          <a:extLst>
+            <a:ext uri="{91240B29-F687-4F45-9708-019B960494DF}">
+              <a14:hiddenLine xmlns:a14="http://schemas.microsoft.com/office/drawing/2010/main" w="12700" cap="flat" cmpd="sng" algn="ctr">
+                <a:solidFill>
+                  <a:schemeClr val="accent1">
+                    <a:shade val="15000"/>
+                  </a:schemeClr>
+                </a:solidFill>
+                <a:prstDash val="solid"/>
+                <a:miter lim="800000"/>
+              </a14:hiddenLine>
+            </a:ext>
+          </a:extLst>
+        </p:spPr>
+        <p:style>
+          <a:lnRef idx="2">
+            <a:schemeClr val="accent1">
+              <a:shade val="15000"/>
+            </a:schemeClr>
+          </a:lnRef>
+          <a:fillRef idx="1">
+            <a:schemeClr val="accent1"/>
+          </a:fillRef>
+          <a:effectRef idx="0">
+            <a:schemeClr val="accent1"/>
+          </a:effectRef>
+          <a:fontRef idx="minor">
+            <a:schemeClr val="lt1"/>
+          </a:fontRef>
+        </p:style>
+        <p:txBody>
+          <a:bodyPr rtlCol="0" anchor="ctr"/>
+          <a:lstStyle/>
+          <a:p>
+            <a:pPr algn="ctr"/>
+            <a:endParaRPr lang="pt-PT"/>
+          </a:p>
+        </p:txBody>
+      </p:sp>
+      <p:sp>
+        <p:nvSpPr>
+          <p:cNvPr id="10" name="TextBox 9">
+            <a:extLst>
+              <a:ext uri="{FF2B5EF4-FFF2-40B4-BE49-F238E27FC236}">
+                <a16:creationId xmlns:a16="http://schemas.microsoft.com/office/drawing/2014/main" id="{C9C259C3-DD0D-4E42-4903-491D90C08E16}"/>
+              </a:ext>
+            </a:extLst>
+          </p:cNvPr>
+          <p:cNvSpPr txBox="1"/>
+          <p:nvPr/>
+        </p:nvSpPr>
+        <p:spPr>
+          <a:xfrm>
+            <a:off x="6946773" y="1244599"/>
+            <a:ext cx="1612900" cy="914400"/>
+          </a:xfrm>
+          <a:prstGeom prst="rect">
+            <a:avLst/>
+          </a:prstGeom>
+          <a:noFill/>
+        </p:spPr>
+        <p:txBody>
+          <a:bodyPr vert="horz" wrap="square" lIns="0" tIns="0" rIns="0" bIns="0" rtlCol="0" anchor="ctr">
+            <a:noAutofit/>
+          </a:bodyPr>
+          <a:lstStyle/>
+          <a:p>
+            <a:r>
+              <a:rPr lang="pt-PT" sz="3000" b="1">
+                <a:solidFill>
+                  <a:srgbClr val="1E8A44"/>
+                </a:solidFill>
+                <a:latin typeface="Arial" panose="020B0604020202020204" pitchFamily="34" charset="0"/>
+              </a:rPr>
+              <a:t>±9,2 pp</a:t>
+            </a:r>
+          </a:p>
+          <a:p>
+            <a:r>
+              <a:rPr lang="pt-PT" sz="1400">
+                <a:solidFill>
+                  <a:srgbClr val="1F2A24"/>
+                </a:solidFill>
+                <a:latin typeface="Calibri" panose="020F0502020204030204" pitchFamily="34" charset="0"/>
+              </a:rPr>
+              <a:t>margem de erro</a:t>
+            </a:r>
+          </a:p>
+        </p:txBody>
+      </p:sp>
+      <p:sp>
+        <p:nvSpPr>
+          <p:cNvPr id="11" name="Perfil">
+            <a:extLst>
+              <a:ext uri="{FF2B5EF4-FFF2-40B4-BE49-F238E27FC236}">
+                <a16:creationId xmlns:a16="http://schemas.microsoft.com/office/drawing/2014/main" id="{A428F4FF-0E88-C428-FCE5-E5B8F808F505}"/>
+              </a:ext>
+            </a:extLst>
+          </p:cNvPr>
+          <p:cNvSpPr/>
+          <p:nvPr/>
+        </p:nvSpPr>
+        <p:spPr>
+          <a:xfrm>
+            <a:off x="457200" y="2514600"/>
+            <a:ext cx="8229600" cy="1524000"/>
+          </a:xfrm>
+          <a:prstGeom prst="roundRect">
+            <a:avLst>
+              <a:gd name="adj" fmla="val 5000"/>
+            </a:avLst>
+          </a:prstGeom>
+          <a:solidFill>
+            <a:srgbClr val="17552E"/>
+          </a:solidFill>
+          <a:ln w="12700" cap="flat" cmpd="sng" algn="ctr">
+            <a:noFill/>
+            <a:prstDash val="solid"/>
+            <a:miter lim="800000"/>
+          </a:ln>
+          <a:effectLst/>
+          <a:extLst>
+            <a:ext uri="{91240B29-F687-4F45-9708-019B960494DF}">
+              <a14:hiddenLine xmlns:a14="http://schemas.microsoft.com/office/drawing/2010/main" w="12700" cap="flat" cmpd="sng" algn="ctr">
+                <a:solidFill>
+                  <a:schemeClr val="accent1">
+                    <a:shade val="15000"/>
+                  </a:schemeClr>
+                </a:solidFill>
+                <a:prstDash val="solid"/>
+                <a:miter lim="800000"/>
+              </a14:hiddenLine>
+            </a:ext>
+          </a:extLst>
+        </p:spPr>
+        <p:style>
+          <a:lnRef idx="2">
+            <a:schemeClr val="accent1">
+              <a:shade val="15000"/>
+            </a:schemeClr>
+          </a:lnRef>
+          <a:fillRef idx="1">
+            <a:schemeClr val="accent1"/>
+          </a:fillRef>
+          <a:effectRef idx="0">
+            <a:schemeClr val="accent1"/>
+          </a:effectRef>
+          <a:fontRef idx="minor">
+            <a:schemeClr val="lt1"/>
+          </a:fontRef>
+        </p:style>
+        <p:txBody>
+          <a:bodyPr rtlCol="0" anchor="ctr"/>
+          <a:lstStyle/>
+          <a:p>
+            <a:pPr algn="ctr"/>
+            <a:endParaRPr lang="pt-PT"/>
+          </a:p>
+        </p:txBody>
+      </p:sp>
+      <p:sp>
+        <p:nvSpPr>
+          <p:cNvPr id="12" name="TextBox 11">
+            <a:extLst>
+              <a:ext uri="{FF2B5EF4-FFF2-40B4-BE49-F238E27FC236}">
+                <a16:creationId xmlns:a16="http://schemas.microsoft.com/office/drawing/2014/main" id="{7D1DC598-8D74-6E93-A72F-142314F1EB0D}"/>
+              </a:ext>
+            </a:extLst>
+          </p:cNvPr>
+          <p:cNvSpPr txBox="1"/>
+          <p:nvPr/>
+        </p:nvSpPr>
+        <p:spPr>
+          <a:xfrm>
+            <a:off x="660400" y="2666999"/>
+            <a:ext cx="7823200" cy="279400"/>
+          </a:xfrm>
+          <a:prstGeom prst="rect">
+            <a:avLst/>
+          </a:prstGeom>
+          <a:noFill/>
+        </p:spPr>
+        <p:txBody>
+          <a:bodyPr vert="horz" wrap="square" lIns="0" tIns="0" rIns="0" bIns="0" rtlCol="0" anchor="t">
+            <a:noAutofit/>
+          </a:bodyPr>
+          <a:lstStyle/>
+          <a:p>
+            <a:r>
+              <a:rPr lang="pt-PT" sz="1400" b="1">
+                <a:solidFill>
+                  <a:srgbClr val="8CC63F"/>
+                </a:solidFill>
+                <a:latin typeface="Calibri" panose="020F0502020204030204" pitchFamily="34" charset="0"/>
+              </a:rPr>
+              <a:t>Quem respondeu</a:t>
+            </a:r>
+          </a:p>
+        </p:txBody>
+      </p:sp>
+      <p:sp>
+        <p:nvSpPr>
+          <p:cNvPr id="13" name="TextBox 12">
+            <a:extLst>
+              <a:ext uri="{FF2B5EF4-FFF2-40B4-BE49-F238E27FC236}">
+                <a16:creationId xmlns:a16="http://schemas.microsoft.com/office/drawing/2014/main" id="{F3A7CCF1-AFD3-BEC2-3C4B-5085DB4ED192}"/>
+              </a:ext>
+            </a:extLst>
+          </p:cNvPr>
+          <p:cNvSpPr txBox="1"/>
+          <p:nvPr/>
+        </p:nvSpPr>
+        <p:spPr>
+          <a:xfrm>
+            <a:off x="660400" y="3047999"/>
+            <a:ext cx="1828800" cy="1066800"/>
+          </a:xfrm>
+          <a:prstGeom prst="rect">
+            <a:avLst/>
+          </a:prstGeom>
+          <a:noFill/>
+        </p:spPr>
+        <p:txBody>
+          <a:bodyPr vert="horz" wrap="square" lIns="0" tIns="0" rIns="0" bIns="0" rtlCol="0" anchor="t">
+            <a:noAutofit/>
+          </a:bodyPr>
+          <a:lstStyle/>
+          <a:p>
+            <a:r>
+              <a:rPr lang="pt-PT" sz="2600" b="1">
+                <a:solidFill>
+                  <a:srgbClr val="FFFFFF"/>
+                </a:solidFill>
+                <a:latin typeface="Arial" panose="020B0604020202020204" pitchFamily="34" charset="0"/>
+              </a:rPr>
+              <a:t>69 %</a:t>
+            </a:r>
+          </a:p>
+          <a:p>
+            <a:r>
+              <a:rPr lang="pt-PT" sz="1300">
+                <a:solidFill>
+                  <a:srgbClr val="FFFFFF"/>
+                </a:solidFill>
+                <a:latin typeface="Calibri" panose="020F0502020204030204" pitchFamily="34" charset="0"/>
+              </a:rPr>
+              <a:t>têm 45 a 64 anos</a:t>
+            </a:r>
+          </a:p>
+        </p:txBody>
+      </p:sp>
+      <p:sp>
+        <p:nvSpPr>
+          <p:cNvPr id="14" name="TextBox 13">
+            <a:extLst>
+              <a:ext uri="{FF2B5EF4-FFF2-40B4-BE49-F238E27FC236}">
+                <a16:creationId xmlns:a16="http://schemas.microsoft.com/office/drawing/2014/main" id="{F1F31E2B-95A0-DB9C-038F-D6340A043B2B}"/>
+              </a:ext>
+            </a:extLst>
+          </p:cNvPr>
+          <p:cNvSpPr txBox="1"/>
+          <p:nvPr/>
+        </p:nvSpPr>
+        <p:spPr>
+          <a:xfrm>
+            <a:off x="2641600" y="3047999"/>
+            <a:ext cx="1828800" cy="1066800"/>
+          </a:xfrm>
+          <a:prstGeom prst="rect">
+            <a:avLst/>
+          </a:prstGeom>
+          <a:noFill/>
+        </p:spPr>
+        <p:txBody>
+          <a:bodyPr vert="horz" wrap="square" lIns="0" tIns="0" rIns="0" bIns="0" rtlCol="0" anchor="t">
+            <a:noAutofit/>
+          </a:bodyPr>
+          <a:lstStyle/>
+          <a:p>
+            <a:r>
+              <a:rPr lang="pt-PT" sz="2600" b="1">
+                <a:solidFill>
+                  <a:srgbClr val="FFFFFF"/>
+                </a:solidFill>
+                <a:latin typeface="Arial" panose="020B0604020202020204" pitchFamily="34" charset="0"/>
+              </a:rPr>
+              <a:t>65 %</a:t>
+            </a:r>
+          </a:p>
+          <a:p>
+            <a:r>
+              <a:rPr lang="pt-PT" sz="1300">
+                <a:solidFill>
+                  <a:srgbClr val="FFFFFF"/>
+                </a:solidFill>
+                <a:latin typeface="Calibri" panose="020F0502020204030204" pitchFamily="34" charset="0"/>
+              </a:rPr>
+              <a:t>são mulheres</a:t>
+            </a:r>
+          </a:p>
+        </p:txBody>
+      </p:sp>
+      <p:sp>
+        <p:nvSpPr>
+          <p:cNvPr id="15" name="TextBox 14">
+            <a:extLst>
+              <a:ext uri="{FF2B5EF4-FFF2-40B4-BE49-F238E27FC236}">
+                <a16:creationId xmlns:a16="http://schemas.microsoft.com/office/drawing/2014/main" id="{FCE386AB-17EE-3360-1377-6D7B953275F6}"/>
+              </a:ext>
+            </a:extLst>
+          </p:cNvPr>
+          <p:cNvSpPr txBox="1"/>
+          <p:nvPr/>
+        </p:nvSpPr>
+        <p:spPr>
+          <a:xfrm>
+            <a:off x="4622800" y="3047999"/>
+            <a:ext cx="1828800" cy="1066800"/>
+          </a:xfrm>
+          <a:prstGeom prst="rect">
+            <a:avLst/>
+          </a:prstGeom>
+          <a:noFill/>
+        </p:spPr>
+        <p:txBody>
+          <a:bodyPr vert="horz" wrap="square" lIns="0" tIns="0" rIns="0" bIns="0" rtlCol="0" anchor="t">
+            <a:noAutofit/>
+          </a:bodyPr>
+          <a:lstStyle/>
+          <a:p>
+            <a:r>
+              <a:rPr lang="pt-PT" sz="2600" b="1">
+                <a:solidFill>
+                  <a:srgbClr val="FFFFFF"/>
+                </a:solidFill>
+                <a:latin typeface="Arial" panose="020B0604020202020204" pitchFamily="34" charset="0"/>
+              </a:rPr>
+              <a:t>65 %</a:t>
+            </a:r>
+          </a:p>
+          <a:p>
+            <a:r>
+              <a:rPr lang="pt-PT" sz="1300">
+                <a:solidFill>
+                  <a:srgbClr val="FFFFFF"/>
+                </a:solidFill>
+                <a:latin typeface="Calibri" panose="020F0502020204030204" pitchFamily="34" charset="0"/>
+              </a:rPr>
+              <a:t>vivem em zona urbana</a:t>
+            </a:r>
+          </a:p>
+        </p:txBody>
+      </p:sp>
+      <p:sp>
+        <p:nvSpPr>
+          <p:cNvPr id="16" name="TextBox 15">
+            <a:extLst>
+              <a:ext uri="{FF2B5EF4-FFF2-40B4-BE49-F238E27FC236}">
+                <a16:creationId xmlns:a16="http://schemas.microsoft.com/office/drawing/2014/main" id="{83A02518-6E2C-246D-4251-B8A8C80318E5}"/>
+              </a:ext>
+            </a:extLst>
+          </p:cNvPr>
+          <p:cNvSpPr txBox="1"/>
+          <p:nvPr/>
+        </p:nvSpPr>
+        <p:spPr>
+          <a:xfrm>
+            <a:off x="6604000" y="3047999"/>
+            <a:ext cx="1828800" cy="1066800"/>
+          </a:xfrm>
+          <a:prstGeom prst="rect">
+            <a:avLst/>
+          </a:prstGeom>
+          <a:noFill/>
+        </p:spPr>
+        <p:txBody>
+          <a:bodyPr vert="horz" wrap="square" lIns="0" tIns="0" rIns="0" bIns="0" rtlCol="0" anchor="t">
+            <a:noAutofit/>
+          </a:bodyPr>
+          <a:lstStyle/>
+          <a:p>
+            <a:r>
+              <a:rPr lang="pt-PT" sz="2600" b="1">
+                <a:solidFill>
+                  <a:srgbClr val="FFFFFF"/>
+                </a:solidFill>
+                <a:latin typeface="Arial" panose="020B0604020202020204" pitchFamily="34" charset="0"/>
+              </a:rPr>
+              <a:t>92 %</a:t>
+            </a:r>
+          </a:p>
+          <a:p>
+            <a:r>
+              <a:rPr lang="pt-PT" sz="1300">
+                <a:solidFill>
+                  <a:srgbClr val="FFFFFF"/>
+                </a:solidFill>
+                <a:latin typeface="Calibri" panose="020F0502020204030204" pitchFamily="34" charset="0"/>
+              </a:rPr>
+              <a:t>decidem as compras da casa</a:t>
+            </a:r>
+          </a:p>
+        </p:txBody>
+      </p:sp>
+      <p:sp>
+        <p:nvSpPr>
+          <p:cNvPr id="17" name="TextBox 16">
+            <a:extLst>
+              <a:ext uri="{FF2B5EF4-FFF2-40B4-BE49-F238E27FC236}">
+                <a16:creationId xmlns:a16="http://schemas.microsoft.com/office/drawing/2014/main" id="{5F42EBA4-8D30-3E0D-4815-BB19087C8270}"/>
+              </a:ext>
+            </a:extLst>
+          </p:cNvPr>
+          <p:cNvSpPr txBox="1"/>
+          <p:nvPr/>
+        </p:nvSpPr>
+        <p:spPr>
+          <a:xfrm>
+            <a:off x="457200" y="4191000"/>
+            <a:ext cx="7683500" cy="228600"/>
+          </a:xfrm>
+          <a:prstGeom prst="rect">
+            <a:avLst/>
+          </a:prstGeom>
+          <a:noFill/>
+        </p:spPr>
+        <p:txBody>
+          <a:bodyPr vert="horz" wrap="square" lIns="0" tIns="0" rIns="0" bIns="0" rtlCol="0" anchor="ctr">
+            <a:noAutofit/>
+          </a:bodyPr>
+          <a:lstStyle/>
+          <a:p>
+            <a:r>
+              <a:rPr lang="pt-PT" sz="1100" i="1">
+                <a:solidFill>
+                  <a:srgbClr val="5B6B60"/>
+                </a:solidFill>
+                <a:latin typeface="Calibri" panose="020F0502020204030204" pitchFamily="34" charset="0"/>
+              </a:rPr>
+              <a:t>Amostra por conveniência, não representativa da população. As respostas em bruto seguem no Excel.</a:t>
+            </a:r>
           </a:p>
         </p:txBody>
       </p:sp>
@@ -5174,7 +7078,7 @@
 
 <file path=ppt/slides/slide8.xml><?xml version="1.0" encoding="utf-8"?>
 <p:sld xmlns:a="http://schemas.openxmlformats.org/drawingml/2006/main" xmlns:r="http://schemas.openxmlformats.org/officeDocument/2006/relationships" xmlns:p="http://schemas.openxmlformats.org/presentationml/2006/main">
-  <p:cSld name="Slide 8">
+  <p:cSld name="Slide 7">
     <p:spTree>
       <p:nvGrpSpPr>
         <p:cNvPr id="1" name=""/>
@@ -5192,15 +7096,17 @@
       <p:sp>
         <p:nvSpPr>
           <p:cNvPr id="2" name="Text 0"/>
-          <p:cNvSpPr/>
+          <p:cNvSpPr>
+            <a:spLocks noGrp="1"/>
+          </p:cNvSpPr>
           <p:nvPr>
-            <p:ph idx="100" type="title" hasCustomPrompt="1"/>
+            <p:ph type="title" idx="100" hasCustomPrompt="1"/>
           </p:nvPr>
         </p:nvSpPr>
         <p:spPr>
           <a:xfrm>
-            <a:off x="548640" y="1188720"/>
-            <a:ext cx="8046720" cy="1097280"/>
+            <a:off x="457200" y="274320"/>
+            <a:ext cx="8229600" cy="640080"/>
           </a:xfrm>
           <a:prstGeom prst="rect">
             <a:avLst/>
@@ -5209,37 +7115,998 @@
           <a:ln/>
         </p:spPr>
         <p:txBody>
-          <a:bodyPr wrap="square" lIns="0" tIns="0" rIns="0" bIns="0" rtlCol="0" anchor="b"/>
-          <a:lstStyle/>
-          <a:p>
-            <a:pPr algn="l" indent="0" marL="0">
+          <a:bodyPr wrap="square" lIns="0" tIns="0" rIns="0" bIns="0" rtlCol="0" anchor="ctr"/>
+          <a:lstStyle/>
+          <a:p>
+            <a:pPr marL="0" indent="0" algn="l">
               <a:buNone/>
             </a:pPr>
             <a:r>
-              <a:rPr lang="en-US" sz="5400" b="1" dirty="0">
-                <a:solidFill>
-                  <a:schemeClr val="bg1"/>
+              <a:rPr lang="en-US" sz="3000" b="1">
+                <a:solidFill>
+                  <a:schemeClr val="tx2"/>
                 </a:solidFill>
                 <a:latin typeface="Arial" pitchFamily="34" charset="0"/>
                 <a:ea typeface="Arial" pitchFamily="34" charset="-122"/>
                 <a:cs typeface="Arial" pitchFamily="34" charset="-120"/>
               </a:rPr>
-              <a:t>Obrigado</a:t>
-            </a:r>
-            <a:endParaRPr lang="en-US" sz="5400" dirty="0"/>
-          </a:p>
-        </p:txBody>
-      </p:sp>
-      <p:sp>
-        <p:nvSpPr>
-          <p:cNvPr id="3" name="Text 1"/>
+              <a:t>Principais resultados</a:t>
+            </a:r>
+            <a:endParaRPr lang="en-US" sz="3000" dirty="0"/>
+          </a:p>
+        </p:txBody>
+      </p:sp>
+      <p:sp>
+        <p:nvSpPr>
+          <p:cNvPr id="25" name="Slide Number Placeholder 0"/>
+          <p:cNvSpPr>
+            <a:spLocks noGrp="1"/>
+          </p:cNvSpPr>
+          <p:nvPr>
+            <p:ph type="sldNum" sz="quarter" idx="4294967295"/>
+          </p:nvPr>
+        </p:nvSpPr>
+        <p:spPr>
+          <a:xfrm>
+            <a:off x="8321040" y="4754880"/>
+            <a:ext cx="365760" cy="274320"/>
+          </a:xfrm>
+          <a:prstGeom prst="rect">
+            <a:avLst/>
+          </a:prstGeom>
+          <a:extLst>
+            <a:ext uri="{C572A759-6A51-4108-AA02-DFA0A04FC94B}">
+              <ma14:wrappingTextBoxFlag xmlns="" xmlns:ma14="http://schemas.microsoft.com/office/mac/drawingml/2011/main" val="0"/>
+            </a:ext>
+          </a:extLst>
+        </p:spPr>
+        <p:txBody>
+          <a:bodyPr/>
+          <a:lstStyle>
+            <a:lvl1pPr>
+              <a:defRPr sz="1000">
+                <a:solidFill>
+                  <a:schemeClr val="accent4"/>
+                </a:solidFill>
+              </a:defRPr>
+            </a:lvl1pPr>
+          </a:lstStyle>
+          <a:p>
+            <a:pPr algn="r"/>
+            <a:fld id="{F7021451-1387-4CA6-816F-3879F97B5CBC}" type="slidenum">
+              <a:rPr lang="en-US" b="0"/>
+              <a:t>8</a:t>
+            </a:fld>
+            <a:endParaRPr lang="en-US"/>
+          </a:p>
+        </p:txBody>
+      </p:sp>
+      <p:sp>
+        <p:nvSpPr>
+          <p:cNvPr id="3" name="Resultado 1">
+            <a:extLst>
+              <a:ext uri="{FF2B5EF4-FFF2-40B4-BE49-F238E27FC236}">
+                <a16:creationId xmlns:a16="http://schemas.microsoft.com/office/drawing/2014/main" id="{ECB0EE73-1CB6-E423-707B-9ADFF784AF2B}"/>
+              </a:ext>
+            </a:extLst>
+          </p:cNvPr>
+          <p:cNvSpPr/>
+          <p:nvPr/>
+        </p:nvSpPr>
+        <p:spPr>
+          <a:xfrm>
+            <a:off x="457200" y="1092200"/>
+            <a:ext cx="2616200" cy="1625600"/>
+          </a:xfrm>
+          <a:prstGeom prst="roundRect">
+            <a:avLst>
+              <a:gd name="adj" fmla="val 4688"/>
+            </a:avLst>
+          </a:prstGeom>
+          <a:solidFill>
+            <a:srgbClr val="EEF5EF"/>
+          </a:solidFill>
+          <a:ln w="12700" cap="flat" cmpd="sng" algn="ctr">
+            <a:noFill/>
+            <a:prstDash val="solid"/>
+            <a:miter lim="800000"/>
+          </a:ln>
+          <a:effectLst/>
+          <a:extLst>
+            <a:ext uri="{91240B29-F687-4F45-9708-019B960494DF}">
+              <a14:hiddenLine xmlns:a14="http://schemas.microsoft.com/office/drawing/2010/main" w="12700" cap="flat" cmpd="sng" algn="ctr">
+                <a:solidFill>
+                  <a:schemeClr val="accent1">
+                    <a:shade val="15000"/>
+                  </a:schemeClr>
+                </a:solidFill>
+                <a:prstDash val="solid"/>
+                <a:miter lim="800000"/>
+              </a14:hiddenLine>
+            </a:ext>
+          </a:extLst>
+        </p:spPr>
+        <p:style>
+          <a:lnRef idx="2">
+            <a:schemeClr val="accent1">
+              <a:shade val="15000"/>
+            </a:schemeClr>
+          </a:lnRef>
+          <a:fillRef idx="1">
+            <a:schemeClr val="accent1"/>
+          </a:fillRef>
+          <a:effectRef idx="0">
+            <a:schemeClr val="accent1"/>
+          </a:effectRef>
+          <a:fontRef idx="minor">
+            <a:schemeClr val="lt1"/>
+          </a:fontRef>
+        </p:style>
+        <p:txBody>
+          <a:bodyPr rtlCol="0" anchor="ctr"/>
+          <a:lstStyle/>
+          <a:p>
+            <a:pPr algn="ctr"/>
+            <a:endParaRPr lang="pt-PT"/>
+          </a:p>
+        </p:txBody>
+      </p:sp>
+      <p:sp>
+        <p:nvSpPr>
+          <p:cNvPr id="4" name="TextBox 3">
+            <a:extLst>
+              <a:ext uri="{FF2B5EF4-FFF2-40B4-BE49-F238E27FC236}">
+                <a16:creationId xmlns:a16="http://schemas.microsoft.com/office/drawing/2014/main" id="{482840EF-A3DF-BA1B-8A52-D34679F5B325}"/>
+              </a:ext>
+            </a:extLst>
+          </p:cNvPr>
           <p:cNvSpPr txBox="1"/>
           <p:nvPr/>
         </p:nvSpPr>
         <p:spPr>
           <a:xfrm>
-            <a:off x="548640" y="2377440"/>
-            <a:ext cx="8046720" cy="457200"/>
+            <a:off x="635000" y="1244599"/>
+            <a:ext cx="2260600" cy="1320800"/>
+          </a:xfrm>
+          <a:prstGeom prst="rect">
+            <a:avLst/>
+          </a:prstGeom>
+          <a:noFill/>
+        </p:spPr>
+        <p:txBody>
+          <a:bodyPr vert="horz" wrap="square" lIns="0" tIns="0" rIns="0" bIns="0" rtlCol="0" anchor="t">
+            <a:noAutofit/>
+          </a:bodyPr>
+          <a:lstStyle/>
+          <a:p>
+            <a:pPr>
+              <a:spcAft>
+                <a:spcPts val="300"/>
+              </a:spcAft>
+            </a:pPr>
+            <a:r>
+              <a:rPr lang="pt-PT" sz="2800" b="1">
+                <a:solidFill>
+                  <a:srgbClr val="1E8A44"/>
+                </a:solidFill>
+                <a:latin typeface="Arial" panose="020B0604020202020204" pitchFamily="34" charset="0"/>
+              </a:rPr>
+              <a:t>53 %</a:t>
+            </a:r>
+          </a:p>
+          <a:p>
+            <a:pPr>
+              <a:spcAft>
+                <a:spcPts val="300"/>
+              </a:spcAft>
+            </a:pPr>
+            <a:r>
+              <a:rPr lang="pt-PT" sz="1400" b="1">
+                <a:solidFill>
+                  <a:srgbClr val="1F2A24"/>
+                </a:solidFill>
+                <a:latin typeface="Calibri" panose="020F0502020204030204" pitchFamily="34" charset="0"/>
+              </a:rPr>
+              <a:t>interessados na app</a:t>
+            </a:r>
+          </a:p>
+          <a:p>
+            <a:pPr>
+              <a:spcAft>
+                <a:spcPts val="300"/>
+              </a:spcAft>
+            </a:pPr>
+            <a:r>
+              <a:rPr lang="pt-PT" sz="1200">
+                <a:solidFill>
+                  <a:srgbClr val="1F2A24"/>
+                </a:solidFill>
+                <a:latin typeface="Calibri" panose="020F0502020204030204" pitchFamily="34" charset="0"/>
+              </a:rPr>
+              <a:t>Interesse médio 3,45 em 5; 16 % são entusiastas</a:t>
+            </a:r>
+          </a:p>
+        </p:txBody>
+      </p:sp>
+      <p:sp>
+        <p:nvSpPr>
+          <p:cNvPr id="5" name="Resultado 2">
+            <a:extLst>
+              <a:ext uri="{FF2B5EF4-FFF2-40B4-BE49-F238E27FC236}">
+                <a16:creationId xmlns:a16="http://schemas.microsoft.com/office/drawing/2014/main" id="{019B6C0F-0D9A-F52F-F717-0197C9F42CCE}"/>
+              </a:ext>
+            </a:extLst>
+          </p:cNvPr>
+          <p:cNvSpPr/>
+          <p:nvPr/>
+        </p:nvSpPr>
+        <p:spPr>
+          <a:xfrm>
+            <a:off x="3268091" y="1092200"/>
+            <a:ext cx="2616200" cy="1625600"/>
+          </a:xfrm>
+          <a:prstGeom prst="roundRect">
+            <a:avLst>
+              <a:gd name="adj" fmla="val 4688"/>
+            </a:avLst>
+          </a:prstGeom>
+          <a:solidFill>
+            <a:srgbClr val="EEF5EF"/>
+          </a:solidFill>
+          <a:ln w="12700" cap="flat" cmpd="sng" algn="ctr">
+            <a:noFill/>
+            <a:prstDash val="solid"/>
+            <a:miter lim="800000"/>
+          </a:ln>
+          <a:effectLst/>
+          <a:extLst>
+            <a:ext uri="{91240B29-F687-4F45-9708-019B960494DF}">
+              <a14:hiddenLine xmlns:a14="http://schemas.microsoft.com/office/drawing/2010/main" w="12700" cap="flat" cmpd="sng" algn="ctr">
+                <a:solidFill>
+                  <a:schemeClr val="accent1">
+                    <a:shade val="15000"/>
+                  </a:schemeClr>
+                </a:solidFill>
+                <a:prstDash val="solid"/>
+                <a:miter lim="800000"/>
+              </a14:hiddenLine>
+            </a:ext>
+          </a:extLst>
+        </p:spPr>
+        <p:style>
+          <a:lnRef idx="2">
+            <a:schemeClr val="accent1">
+              <a:shade val="15000"/>
+            </a:schemeClr>
+          </a:lnRef>
+          <a:fillRef idx="1">
+            <a:schemeClr val="accent1"/>
+          </a:fillRef>
+          <a:effectRef idx="0">
+            <a:schemeClr val="accent1"/>
+          </a:effectRef>
+          <a:fontRef idx="minor">
+            <a:schemeClr val="lt1"/>
+          </a:fontRef>
+        </p:style>
+        <p:txBody>
+          <a:bodyPr rtlCol="0" anchor="ctr"/>
+          <a:lstStyle/>
+          <a:p>
+            <a:pPr algn="ctr"/>
+            <a:endParaRPr lang="pt-PT"/>
+          </a:p>
+        </p:txBody>
+      </p:sp>
+      <p:sp>
+        <p:nvSpPr>
+          <p:cNvPr id="6" name="TextBox 5">
+            <a:extLst>
+              <a:ext uri="{FF2B5EF4-FFF2-40B4-BE49-F238E27FC236}">
+                <a16:creationId xmlns:a16="http://schemas.microsoft.com/office/drawing/2014/main" id="{96C98292-2C2C-8451-E8B3-20D75AF341F5}"/>
+              </a:ext>
+            </a:extLst>
+          </p:cNvPr>
+          <p:cNvSpPr txBox="1"/>
+          <p:nvPr/>
+        </p:nvSpPr>
+        <p:spPr>
+          <a:xfrm>
+            <a:off x="3445891" y="1244599"/>
+            <a:ext cx="2260600" cy="1320800"/>
+          </a:xfrm>
+          <a:prstGeom prst="rect">
+            <a:avLst/>
+          </a:prstGeom>
+          <a:noFill/>
+        </p:spPr>
+        <p:txBody>
+          <a:bodyPr vert="horz" wrap="square" lIns="0" tIns="0" rIns="0" bIns="0" rtlCol="0" anchor="t">
+            <a:noAutofit/>
+          </a:bodyPr>
+          <a:lstStyle/>
+          <a:p>
+            <a:pPr>
+              <a:spcAft>
+                <a:spcPts val="300"/>
+              </a:spcAft>
+            </a:pPr>
+            <a:r>
+              <a:rPr lang="pt-PT" sz="2800" b="1">
+                <a:solidFill>
+                  <a:srgbClr val="1E8A44"/>
+                </a:solidFill>
+                <a:latin typeface="Arial" panose="020B0604020202020204" pitchFamily="34" charset="0"/>
+              </a:rPr>
+              <a:t>84 %</a:t>
+            </a:r>
+          </a:p>
+          <a:p>
+            <a:pPr>
+              <a:spcAft>
+                <a:spcPts val="300"/>
+              </a:spcAft>
+            </a:pPr>
+            <a:r>
+              <a:rPr lang="pt-PT" sz="1400" b="1">
+                <a:solidFill>
+                  <a:srgbClr val="1F2A24"/>
+                </a:solidFill>
+                <a:latin typeface="Calibri" panose="020F0502020204030204" pitchFamily="34" charset="0"/>
+              </a:rPr>
+              <a:t>valorizam a frescura</a:t>
+            </a:r>
+          </a:p>
+          <a:p>
+            <a:pPr>
+              <a:spcAft>
+                <a:spcPts val="300"/>
+              </a:spcAft>
+            </a:pPr>
+            <a:r>
+              <a:rPr lang="pt-PT" sz="1200">
+                <a:solidFill>
+                  <a:srgbClr val="1F2A24"/>
+                </a:solidFill>
+                <a:latin typeface="Calibri" panose="020F0502020204030204" pitchFamily="34" charset="0"/>
+              </a:rPr>
+              <a:t>1.º critério de compra; saber quem produziu é o último</a:t>
+            </a:r>
+          </a:p>
+        </p:txBody>
+      </p:sp>
+      <p:sp>
+        <p:nvSpPr>
+          <p:cNvPr id="7" name="Resultado 3">
+            <a:extLst>
+              <a:ext uri="{FF2B5EF4-FFF2-40B4-BE49-F238E27FC236}">
+                <a16:creationId xmlns:a16="http://schemas.microsoft.com/office/drawing/2014/main" id="{A87230BD-D0F6-D088-3178-6D69BC83D50D}"/>
+              </a:ext>
+            </a:extLst>
+          </p:cNvPr>
+          <p:cNvSpPr/>
+          <p:nvPr/>
+        </p:nvSpPr>
+        <p:spPr>
+          <a:xfrm>
+            <a:off x="6078982" y="1092200"/>
+            <a:ext cx="2616200" cy="1625600"/>
+          </a:xfrm>
+          <a:prstGeom prst="roundRect">
+            <a:avLst>
+              <a:gd name="adj" fmla="val 4688"/>
+            </a:avLst>
+          </a:prstGeom>
+          <a:solidFill>
+            <a:srgbClr val="EEF5EF"/>
+          </a:solidFill>
+          <a:ln w="12700" cap="flat" cmpd="sng" algn="ctr">
+            <a:noFill/>
+            <a:prstDash val="solid"/>
+            <a:miter lim="800000"/>
+          </a:ln>
+          <a:effectLst/>
+          <a:extLst>
+            <a:ext uri="{91240B29-F687-4F45-9708-019B960494DF}">
+              <a14:hiddenLine xmlns:a14="http://schemas.microsoft.com/office/drawing/2010/main" w="12700" cap="flat" cmpd="sng" algn="ctr">
+                <a:solidFill>
+                  <a:schemeClr val="accent1">
+                    <a:shade val="15000"/>
+                  </a:schemeClr>
+                </a:solidFill>
+                <a:prstDash val="solid"/>
+                <a:miter lim="800000"/>
+              </a14:hiddenLine>
+            </a:ext>
+          </a:extLst>
+        </p:spPr>
+        <p:style>
+          <a:lnRef idx="2">
+            <a:schemeClr val="accent1">
+              <a:shade val="15000"/>
+            </a:schemeClr>
+          </a:lnRef>
+          <a:fillRef idx="1">
+            <a:schemeClr val="accent1"/>
+          </a:fillRef>
+          <a:effectRef idx="0">
+            <a:schemeClr val="accent1"/>
+          </a:effectRef>
+          <a:fontRef idx="minor">
+            <a:schemeClr val="lt1"/>
+          </a:fontRef>
+        </p:style>
+        <p:txBody>
+          <a:bodyPr rtlCol="0" anchor="ctr"/>
+          <a:lstStyle/>
+          <a:p>
+            <a:pPr algn="ctr"/>
+            <a:endParaRPr lang="pt-PT"/>
+          </a:p>
+        </p:txBody>
+      </p:sp>
+      <p:sp>
+        <p:nvSpPr>
+          <p:cNvPr id="8" name="TextBox 7">
+            <a:extLst>
+              <a:ext uri="{FF2B5EF4-FFF2-40B4-BE49-F238E27FC236}">
+                <a16:creationId xmlns:a16="http://schemas.microsoft.com/office/drawing/2014/main" id="{2B06C9C1-A893-8C1D-0E1C-DB29CE807EBA}"/>
+              </a:ext>
+            </a:extLst>
+          </p:cNvPr>
+          <p:cNvSpPr txBox="1"/>
+          <p:nvPr/>
+        </p:nvSpPr>
+        <p:spPr>
+          <a:xfrm>
+            <a:off x="6256782" y="1244599"/>
+            <a:ext cx="2260600" cy="1320800"/>
+          </a:xfrm>
+          <a:prstGeom prst="rect">
+            <a:avLst/>
+          </a:prstGeom>
+          <a:noFill/>
+        </p:spPr>
+        <p:txBody>
+          <a:bodyPr vert="horz" wrap="square" lIns="0" tIns="0" rIns="0" bIns="0" rtlCol="0" anchor="t">
+            <a:noAutofit/>
+          </a:bodyPr>
+          <a:lstStyle/>
+          <a:p>
+            <a:pPr>
+              <a:spcAft>
+                <a:spcPts val="300"/>
+              </a:spcAft>
+            </a:pPr>
+            <a:r>
+              <a:rPr lang="pt-PT" sz="2800" b="1">
+                <a:solidFill>
+                  <a:srgbClr val="1E8A44"/>
+                </a:solidFill>
+                <a:latin typeface="Arial" panose="020B0604020202020204" pitchFamily="34" charset="0"/>
+              </a:rPr>
+              <a:t>33 %</a:t>
+            </a:r>
+          </a:p>
+          <a:p>
+            <a:pPr>
+              <a:spcAft>
+                <a:spcPts val="300"/>
+              </a:spcAft>
+            </a:pPr>
+            <a:r>
+              <a:rPr lang="pt-PT" sz="1400" b="1">
+                <a:solidFill>
+                  <a:srgbClr val="1F2A24"/>
+                </a:solidFill>
+                <a:latin typeface="Calibri" panose="020F0502020204030204" pitchFamily="34" charset="0"/>
+              </a:rPr>
+              <a:t>aceitam mais de 10 min</a:t>
+            </a:r>
+          </a:p>
+          <a:p>
+            <a:pPr>
+              <a:spcAft>
+                <a:spcPts val="300"/>
+              </a:spcAft>
+            </a:pPr>
+            <a:r>
+              <a:rPr lang="pt-PT" sz="1200">
+                <a:solidFill>
+                  <a:srgbClr val="1F2A24"/>
+                </a:solidFill>
+                <a:latin typeface="Calibri" panose="020F0502020204030204" pitchFamily="34" charset="0"/>
+              </a:rPr>
+              <a:t>44 % preferem um ponto de recolha à casa do produtor</a:t>
+            </a:r>
+          </a:p>
+        </p:txBody>
+      </p:sp>
+      <p:sp>
+        <p:nvSpPr>
+          <p:cNvPr id="9" name="Resultado 4">
+            <a:extLst>
+              <a:ext uri="{FF2B5EF4-FFF2-40B4-BE49-F238E27FC236}">
+                <a16:creationId xmlns:a16="http://schemas.microsoft.com/office/drawing/2014/main" id="{B7E4ECB4-339F-C481-4EA4-B33B3B456468}"/>
+              </a:ext>
+            </a:extLst>
+          </p:cNvPr>
+          <p:cNvSpPr/>
+          <p:nvPr/>
+        </p:nvSpPr>
+        <p:spPr>
+          <a:xfrm>
+            <a:off x="457200" y="2870200"/>
+            <a:ext cx="2616200" cy="1625600"/>
+          </a:xfrm>
+          <a:prstGeom prst="roundRect">
+            <a:avLst>
+              <a:gd name="adj" fmla="val 4688"/>
+            </a:avLst>
+          </a:prstGeom>
+          <a:solidFill>
+            <a:srgbClr val="EEF5EF"/>
+          </a:solidFill>
+          <a:ln w="12700" cap="flat" cmpd="sng" algn="ctr">
+            <a:noFill/>
+            <a:prstDash val="solid"/>
+            <a:miter lim="800000"/>
+          </a:ln>
+          <a:effectLst/>
+          <a:extLst>
+            <a:ext uri="{91240B29-F687-4F45-9708-019B960494DF}">
+              <a14:hiddenLine xmlns:a14="http://schemas.microsoft.com/office/drawing/2010/main" w="12700" cap="flat" cmpd="sng" algn="ctr">
+                <a:solidFill>
+                  <a:schemeClr val="accent1">
+                    <a:shade val="15000"/>
+                  </a:schemeClr>
+                </a:solidFill>
+                <a:prstDash val="solid"/>
+                <a:miter lim="800000"/>
+              </a14:hiddenLine>
+            </a:ext>
+          </a:extLst>
+        </p:spPr>
+        <p:style>
+          <a:lnRef idx="2">
+            <a:schemeClr val="accent1">
+              <a:shade val="15000"/>
+            </a:schemeClr>
+          </a:lnRef>
+          <a:fillRef idx="1">
+            <a:schemeClr val="accent1"/>
+          </a:fillRef>
+          <a:effectRef idx="0">
+            <a:schemeClr val="accent1"/>
+          </a:effectRef>
+          <a:fontRef idx="minor">
+            <a:schemeClr val="lt1"/>
+          </a:fontRef>
+        </p:style>
+        <p:txBody>
+          <a:bodyPr rtlCol="0" anchor="ctr"/>
+          <a:lstStyle/>
+          <a:p>
+            <a:pPr algn="ctr"/>
+            <a:endParaRPr lang="pt-PT"/>
+          </a:p>
+        </p:txBody>
+      </p:sp>
+      <p:sp>
+        <p:nvSpPr>
+          <p:cNvPr id="10" name="TextBox 9">
+            <a:extLst>
+              <a:ext uri="{FF2B5EF4-FFF2-40B4-BE49-F238E27FC236}">
+                <a16:creationId xmlns:a16="http://schemas.microsoft.com/office/drawing/2014/main" id="{95615DAD-9250-D605-92EB-B48FDC9639AB}"/>
+              </a:ext>
+            </a:extLst>
+          </p:cNvPr>
+          <p:cNvSpPr txBox="1"/>
+          <p:nvPr/>
+        </p:nvSpPr>
+        <p:spPr>
+          <a:xfrm>
+            <a:off x="635000" y="3022599"/>
+            <a:ext cx="2260600" cy="1320800"/>
+          </a:xfrm>
+          <a:prstGeom prst="rect">
+            <a:avLst/>
+          </a:prstGeom>
+          <a:noFill/>
+        </p:spPr>
+        <p:txBody>
+          <a:bodyPr vert="horz" wrap="square" lIns="0" tIns="0" rIns="0" bIns="0" rtlCol="0" anchor="t">
+            <a:noAutofit/>
+          </a:bodyPr>
+          <a:lstStyle/>
+          <a:p>
+            <a:pPr>
+              <a:spcAft>
+                <a:spcPts val="300"/>
+              </a:spcAft>
+            </a:pPr>
+            <a:r>
+              <a:rPr lang="pt-PT" sz="2800" b="1">
+                <a:solidFill>
+                  <a:srgbClr val="1E8A44"/>
+                </a:solidFill>
+                <a:latin typeface="Arial" panose="020B0604020202020204" pitchFamily="34" charset="0"/>
+              </a:rPr>
+              <a:t>64 %</a:t>
+            </a:r>
+          </a:p>
+          <a:p>
+            <a:pPr>
+              <a:spcAft>
+                <a:spcPts val="300"/>
+              </a:spcAft>
+            </a:pPr>
+            <a:r>
+              <a:rPr lang="pt-PT" sz="1400" b="1">
+                <a:solidFill>
+                  <a:srgbClr val="1F2A24"/>
+                </a:solidFill>
+                <a:latin typeface="Calibri" panose="020F0502020204030204" pitchFamily="34" charset="0"/>
+              </a:rPr>
+              <a:t>aceitam a taxa de 1 €</a:t>
+            </a:r>
+          </a:p>
+          <a:p>
+            <a:pPr>
+              <a:spcAft>
+                <a:spcPts val="300"/>
+              </a:spcAft>
+            </a:pPr>
+            <a:r>
+              <a:rPr lang="pt-PT" sz="1200">
+                <a:solidFill>
+                  <a:srgbClr val="1F2A24"/>
+                </a:solidFill>
+                <a:latin typeface="Calibri" panose="020F0502020204030204" pitchFamily="34" charset="0"/>
+              </a:rPr>
+              <a:t>Só 5 % a apontam como motivo para não usar</a:t>
+            </a:r>
+          </a:p>
+        </p:txBody>
+      </p:sp>
+      <p:sp>
+        <p:nvSpPr>
+          <p:cNvPr id="11" name="Resultado 5">
+            <a:extLst>
+              <a:ext uri="{FF2B5EF4-FFF2-40B4-BE49-F238E27FC236}">
+                <a16:creationId xmlns:a16="http://schemas.microsoft.com/office/drawing/2014/main" id="{82056729-A3D6-2173-283D-CCF5651D311F}"/>
+              </a:ext>
+            </a:extLst>
+          </p:cNvPr>
+          <p:cNvSpPr/>
+          <p:nvPr/>
+        </p:nvSpPr>
+        <p:spPr>
+          <a:xfrm>
+            <a:off x="3268091" y="2870200"/>
+            <a:ext cx="2616200" cy="1625600"/>
+          </a:xfrm>
+          <a:prstGeom prst="roundRect">
+            <a:avLst>
+              <a:gd name="adj" fmla="val 4688"/>
+            </a:avLst>
+          </a:prstGeom>
+          <a:solidFill>
+            <a:srgbClr val="F6D7C6"/>
+          </a:solidFill>
+          <a:ln w="12700" cap="flat" cmpd="sng" algn="ctr">
+            <a:noFill/>
+            <a:prstDash val="solid"/>
+            <a:miter lim="800000"/>
+          </a:ln>
+          <a:effectLst/>
+          <a:extLst>
+            <a:ext uri="{91240B29-F687-4F45-9708-019B960494DF}">
+              <a14:hiddenLine xmlns:a14="http://schemas.microsoft.com/office/drawing/2010/main" w="12700" cap="flat" cmpd="sng" algn="ctr">
+                <a:solidFill>
+                  <a:schemeClr val="accent1">
+                    <a:shade val="15000"/>
+                  </a:schemeClr>
+                </a:solidFill>
+                <a:prstDash val="solid"/>
+                <a:miter lim="800000"/>
+              </a14:hiddenLine>
+            </a:ext>
+          </a:extLst>
+        </p:spPr>
+        <p:style>
+          <a:lnRef idx="2">
+            <a:schemeClr val="accent1">
+              <a:shade val="15000"/>
+            </a:schemeClr>
+          </a:lnRef>
+          <a:fillRef idx="1">
+            <a:schemeClr val="accent1"/>
+          </a:fillRef>
+          <a:effectRef idx="0">
+            <a:schemeClr val="accent1"/>
+          </a:effectRef>
+          <a:fontRef idx="minor">
+            <a:schemeClr val="lt1"/>
+          </a:fontRef>
+        </p:style>
+        <p:txBody>
+          <a:bodyPr rtlCol="0" anchor="ctr"/>
+          <a:lstStyle/>
+          <a:p>
+            <a:pPr algn="ctr"/>
+            <a:endParaRPr lang="pt-PT"/>
+          </a:p>
+        </p:txBody>
+      </p:sp>
+      <p:sp>
+        <p:nvSpPr>
+          <p:cNvPr id="12" name="TextBox 11">
+            <a:extLst>
+              <a:ext uri="{FF2B5EF4-FFF2-40B4-BE49-F238E27FC236}">
+                <a16:creationId xmlns:a16="http://schemas.microsoft.com/office/drawing/2014/main" id="{6BF596D4-C2C2-A695-48D0-64DE9A0A901B}"/>
+              </a:ext>
+            </a:extLst>
+          </p:cNvPr>
+          <p:cNvSpPr txBox="1"/>
+          <p:nvPr/>
+        </p:nvSpPr>
+        <p:spPr>
+          <a:xfrm>
+            <a:off x="3445891" y="3022599"/>
+            <a:ext cx="2260600" cy="1320800"/>
+          </a:xfrm>
+          <a:prstGeom prst="rect">
+            <a:avLst/>
+          </a:prstGeom>
+          <a:noFill/>
+        </p:spPr>
+        <p:txBody>
+          <a:bodyPr vert="horz" wrap="square" lIns="0" tIns="0" rIns="0" bIns="0" rtlCol="0" anchor="t">
+            <a:noAutofit/>
+          </a:bodyPr>
+          <a:lstStyle/>
+          <a:p>
+            <a:pPr>
+              <a:spcAft>
+                <a:spcPts val="300"/>
+              </a:spcAft>
+            </a:pPr>
+            <a:r>
+              <a:rPr lang="pt-PT" sz="2800" b="1">
+                <a:solidFill>
+                  <a:srgbClr val="E2672B"/>
+                </a:solidFill>
+                <a:latin typeface="Arial" panose="020B0604020202020204" pitchFamily="34" charset="0"/>
+              </a:rPr>
+              <a:t>52 %</a:t>
+            </a:r>
+          </a:p>
+          <a:p>
+            <a:pPr>
+              <a:spcAft>
+                <a:spcPts val="300"/>
+              </a:spcAft>
+            </a:pPr>
+            <a:r>
+              <a:rPr lang="pt-PT" sz="1400" b="1">
+                <a:solidFill>
+                  <a:srgbClr val="1F2A24"/>
+                </a:solidFill>
+                <a:latin typeface="Calibri" panose="020F0502020204030204" pitchFamily="34" charset="0"/>
+              </a:rPr>
+              <a:t>preferem pagar na recolha</a:t>
+            </a:r>
+          </a:p>
+          <a:p>
+            <a:pPr>
+              <a:spcAft>
+                <a:spcPts val="300"/>
+              </a:spcAft>
+            </a:pPr>
+            <a:r>
+              <a:rPr lang="pt-PT" sz="1200">
+                <a:solidFill>
+                  <a:srgbClr val="1F2A24"/>
+                </a:solidFill>
+                <a:latin typeface="Calibri" panose="020F0502020204030204" pitchFamily="34" charset="0"/>
+              </a:rPr>
+              <a:t>Só 16 % na app; 54 % não confiam em pagar antes</a:t>
+            </a:r>
+          </a:p>
+        </p:txBody>
+      </p:sp>
+      <p:sp>
+        <p:nvSpPr>
+          <p:cNvPr id="13" name="Resultado 6">
+            <a:extLst>
+              <a:ext uri="{FF2B5EF4-FFF2-40B4-BE49-F238E27FC236}">
+                <a16:creationId xmlns:a16="http://schemas.microsoft.com/office/drawing/2014/main" id="{8BD4E254-92D7-1AEF-366E-8EAB83EDEB3E}"/>
+              </a:ext>
+            </a:extLst>
+          </p:cNvPr>
+          <p:cNvSpPr/>
+          <p:nvPr/>
+        </p:nvSpPr>
+        <p:spPr>
+          <a:xfrm>
+            <a:off x="6078982" y="2870200"/>
+            <a:ext cx="2616200" cy="1625600"/>
+          </a:xfrm>
+          <a:prstGeom prst="roundRect">
+            <a:avLst>
+              <a:gd name="adj" fmla="val 4688"/>
+            </a:avLst>
+          </a:prstGeom>
+          <a:solidFill>
+            <a:srgbClr val="F6D7C6"/>
+          </a:solidFill>
+          <a:ln w="12700" cap="flat" cmpd="sng" algn="ctr">
+            <a:noFill/>
+            <a:prstDash val="solid"/>
+            <a:miter lim="800000"/>
+          </a:ln>
+          <a:effectLst/>
+          <a:extLst>
+            <a:ext uri="{91240B29-F687-4F45-9708-019B960494DF}">
+              <a14:hiddenLine xmlns:a14="http://schemas.microsoft.com/office/drawing/2010/main" w="12700" cap="flat" cmpd="sng" algn="ctr">
+                <a:solidFill>
+                  <a:schemeClr val="accent1">
+                    <a:shade val="15000"/>
+                  </a:schemeClr>
+                </a:solidFill>
+                <a:prstDash val="solid"/>
+                <a:miter lim="800000"/>
+              </a14:hiddenLine>
+            </a:ext>
+          </a:extLst>
+        </p:spPr>
+        <p:style>
+          <a:lnRef idx="2">
+            <a:schemeClr val="accent1">
+              <a:shade val="15000"/>
+            </a:schemeClr>
+          </a:lnRef>
+          <a:fillRef idx="1">
+            <a:schemeClr val="accent1"/>
+          </a:fillRef>
+          <a:effectRef idx="0">
+            <a:schemeClr val="accent1"/>
+          </a:effectRef>
+          <a:fontRef idx="minor">
+            <a:schemeClr val="lt1"/>
+          </a:fontRef>
+        </p:style>
+        <p:txBody>
+          <a:bodyPr rtlCol="0" anchor="ctr"/>
+          <a:lstStyle/>
+          <a:p>
+            <a:pPr algn="ctr"/>
+            <a:endParaRPr lang="pt-PT"/>
+          </a:p>
+        </p:txBody>
+      </p:sp>
+      <p:sp>
+        <p:nvSpPr>
+          <p:cNvPr id="14" name="TextBox 13">
+            <a:extLst>
+              <a:ext uri="{FF2B5EF4-FFF2-40B4-BE49-F238E27FC236}">
+                <a16:creationId xmlns:a16="http://schemas.microsoft.com/office/drawing/2014/main" id="{F9E8BB24-15CF-77BC-F134-E47504DE6187}"/>
+              </a:ext>
+            </a:extLst>
+          </p:cNvPr>
+          <p:cNvSpPr txBox="1"/>
+          <p:nvPr/>
+        </p:nvSpPr>
+        <p:spPr>
+          <a:xfrm>
+            <a:off x="6256782" y="3022599"/>
+            <a:ext cx="2260600" cy="1320800"/>
+          </a:xfrm>
+          <a:prstGeom prst="rect">
+            <a:avLst/>
+          </a:prstGeom>
+          <a:noFill/>
+        </p:spPr>
+        <p:txBody>
+          <a:bodyPr vert="horz" wrap="square" lIns="0" tIns="0" rIns="0" bIns="0" rtlCol="0" anchor="t">
+            <a:noAutofit/>
+          </a:bodyPr>
+          <a:lstStyle/>
+          <a:p>
+            <a:pPr>
+              <a:spcAft>
+                <a:spcPts val="300"/>
+              </a:spcAft>
+            </a:pPr>
+            <a:r>
+              <a:rPr lang="pt-PT" sz="2800" b="1">
+                <a:solidFill>
+                  <a:srgbClr val="E2672B"/>
+                </a:solidFill>
+                <a:latin typeface="Arial" panose="020B0604020202020204" pitchFamily="34" charset="0"/>
+              </a:rPr>
+              <a:t>60 %</a:t>
+            </a:r>
+          </a:p>
+          <a:p>
+            <a:pPr>
+              <a:spcAft>
+                <a:spcPts val="300"/>
+              </a:spcAft>
+            </a:pPr>
+            <a:r>
+              <a:rPr lang="pt-PT" sz="1400" b="1">
+                <a:solidFill>
+                  <a:srgbClr val="1F2A24"/>
+                </a:solidFill>
+                <a:latin typeface="Calibri" panose="020F0502020204030204" pitchFamily="34" charset="0"/>
+              </a:rPr>
+              <a:t>compram noutro lado se faltar</a:t>
+            </a:r>
+          </a:p>
+          <a:p>
+            <a:pPr>
+              <a:spcAft>
+                <a:spcPts val="300"/>
+              </a:spcAft>
+            </a:pPr>
+            <a:r>
+              <a:rPr lang="pt-PT" sz="1200">
+                <a:solidFill>
+                  <a:srgbClr val="1F2A24"/>
+                </a:solidFill>
+                <a:latin typeface="Calibri" panose="020F0502020204030204" pitchFamily="34" charset="0"/>
+              </a:rPr>
+              <a:t>Sazonalidade aceite: a app é complemento, não substituto</a:t>
+            </a:r>
+          </a:p>
+        </p:txBody>
+      </p:sp>
+    </p:spTree>
+    <p:extLst>
+      <p:ext uri="{BB962C8B-B14F-4D97-AF65-F5344CB8AC3E}">
+        <p14:creationId xmlns:p14="http://schemas.microsoft.com/office/powerpoint/2010/main" val="154099035"/>
+      </p:ext>
+    </p:extLst>
+  </p:cSld>
+  <p:clrMapOvr>
+    <a:masterClrMapping/>
+  </p:clrMapOvr>
+</p:sld>
+</file>
+
+<file path=ppt/slides/slide9.xml><?xml version="1.0" encoding="utf-8"?>
+<p:sld xmlns:a="http://schemas.openxmlformats.org/drawingml/2006/main" xmlns:r="http://schemas.openxmlformats.org/officeDocument/2006/relationships" xmlns:p="http://schemas.openxmlformats.org/presentationml/2006/main">
+  <p:cSld name="Slide 7">
+    <p:spTree>
+      <p:nvGrpSpPr>
+        <p:cNvPr id="1" name=""/>
+        <p:cNvGrpSpPr/>
+        <p:nvPr/>
+      </p:nvGrpSpPr>
+      <p:grpSpPr>
+        <a:xfrm>
+          <a:off x="0" y="0"/>
+          <a:ext cx="0" cy="0"/>
+          <a:chOff x="0" y="0"/>
+          <a:chExt cx="0" cy="0"/>
+        </a:xfrm>
+      </p:grpSpPr>
+      <p:sp>
+        <p:nvSpPr>
+          <p:cNvPr id="2" name="Text 0"/>
+          <p:cNvSpPr>
+            <a:spLocks noGrp="1"/>
+          </p:cNvSpPr>
+          <p:nvPr>
+            <p:ph type="title" idx="100" hasCustomPrompt="1"/>
+          </p:nvPr>
+        </p:nvSpPr>
+        <p:spPr>
+          <a:xfrm>
+            <a:off x="457200" y="274320"/>
+            <a:ext cx="8229600" cy="640080"/>
           </a:xfrm>
           <a:prstGeom prst="rect">
             <a:avLst/>
@@ -5251,25 +8118,1416 @@
           <a:bodyPr wrap="square" lIns="0" tIns="0" rIns="0" bIns="0" rtlCol="0" anchor="ctr"/>
           <a:lstStyle/>
           <a:p>
-            <a:pPr indent="0" marL="0">
+            <a:pPr marL="0" indent="0" algn="l">
               <a:buNone/>
             </a:pPr>
             <a:r>
-              <a:rPr lang="en-US" sz="2400" i="1" dirty="0">
-                <a:solidFill>
-                  <a:schemeClr val="accent3"/>
-                </a:solidFill>
-                <a:latin typeface="Calibri" pitchFamily="34" charset="0"/>
-                <a:ea typeface="Calibri" pitchFamily="34" charset="-122"/>
-                <a:cs typeface="Calibri" pitchFamily="34" charset="-120"/>
-              </a:rPr>
-              <a:t>Questões?</a:t>
-            </a:r>
-            <a:endParaRPr lang="en-US" sz="2400" dirty="0"/>
+              <a:rPr lang="en-US" sz="3000" b="1">
+                <a:solidFill>
+                  <a:schemeClr val="tx2"/>
+                </a:solidFill>
+                <a:latin typeface="Arial" pitchFamily="34" charset="0"/>
+                <a:ea typeface="Arial" pitchFamily="34" charset="-122"/>
+                <a:cs typeface="Arial" pitchFamily="34" charset="-120"/>
+              </a:rPr>
+              <a:t>Hipóteses e segmento prioritário</a:t>
+            </a:r>
+            <a:endParaRPr lang="en-US" sz="3000" dirty="0"/>
+          </a:p>
+        </p:txBody>
+      </p:sp>
+      <p:sp>
+        <p:nvSpPr>
+          <p:cNvPr id="25" name="Slide Number Placeholder 0"/>
+          <p:cNvSpPr>
+            <a:spLocks noGrp="1"/>
+          </p:cNvSpPr>
+          <p:nvPr>
+            <p:ph type="sldNum" sz="quarter" idx="4294967295"/>
+          </p:nvPr>
+        </p:nvSpPr>
+        <p:spPr>
+          <a:xfrm>
+            <a:off x="8321040" y="4754880"/>
+            <a:ext cx="365760" cy="274320"/>
+          </a:xfrm>
+          <a:prstGeom prst="rect">
+            <a:avLst/>
+          </a:prstGeom>
+          <a:extLst>
+            <a:ext uri="{C572A759-6A51-4108-AA02-DFA0A04FC94B}">
+              <ma14:wrappingTextBoxFlag xmlns:ma14="http://schemas.microsoft.com/office/mac/drawingml/2011/main" xmlns="" val="0"/>
+            </a:ext>
+          </a:extLst>
+        </p:spPr>
+        <p:txBody>
+          <a:bodyPr/>
+          <a:lstStyle>
+            <a:lvl1pPr>
+              <a:defRPr sz="1000">
+                <a:solidFill>
+                  <a:schemeClr val="accent4"/>
+                </a:solidFill>
+              </a:defRPr>
+            </a:lvl1pPr>
+          </a:lstStyle>
+          <a:p>
+            <a:pPr algn="r"/>
+            <a:fld id="{F7021451-1387-4CA6-816F-3879F97B5CBC}" type="slidenum">
+              <a:rPr lang="en-US" b="0"/>
+              <a:t>9</a:t>
+            </a:fld>
+            <a:endParaRPr lang="en-US"/>
+          </a:p>
+        </p:txBody>
+      </p:sp>
+      <p:sp>
+        <p:nvSpPr>
+          <p:cNvPr id="3" name="Hipótese 1">
+            <a:extLst>
+              <a:ext uri="{FF2B5EF4-FFF2-40B4-BE49-F238E27FC236}">
+                <a16:creationId xmlns:a16="http://schemas.microsoft.com/office/drawing/2014/main" id="{7E857CB2-EB10-5B9A-CDE6-A2DBE266EA1F}"/>
+              </a:ext>
+            </a:extLst>
+          </p:cNvPr>
+          <p:cNvSpPr/>
+          <p:nvPr/>
+        </p:nvSpPr>
+        <p:spPr>
+          <a:xfrm>
+            <a:off x="457200" y="1092200"/>
+            <a:ext cx="4876800" cy="508000"/>
+          </a:xfrm>
+          <a:prstGeom prst="roundRect">
+            <a:avLst>
+              <a:gd name="adj" fmla="val 8000"/>
+            </a:avLst>
+          </a:prstGeom>
+          <a:solidFill>
+            <a:srgbClr val="EEF5EF"/>
+          </a:solidFill>
+          <a:ln w="12700" cap="flat" cmpd="sng" algn="ctr">
+            <a:noFill/>
+            <a:prstDash val="solid"/>
+            <a:miter lim="800000"/>
+          </a:ln>
+          <a:effectLst/>
+          <a:extLst>
+            <a:ext uri="{91240B29-F687-4F45-9708-019B960494DF}">
+              <a14:hiddenLine xmlns:a14="http://schemas.microsoft.com/office/drawing/2010/main" w="12700" cap="flat" cmpd="sng" algn="ctr">
+                <a:solidFill>
+                  <a:schemeClr val="accent1">
+                    <a:shade val="15000"/>
+                  </a:schemeClr>
+                </a:solidFill>
+                <a:prstDash val="solid"/>
+                <a:miter lim="800000"/>
+              </a14:hiddenLine>
+            </a:ext>
+          </a:extLst>
+        </p:spPr>
+        <p:style>
+          <a:lnRef idx="2">
+            <a:schemeClr val="accent1">
+              <a:shade val="15000"/>
+            </a:schemeClr>
+          </a:lnRef>
+          <a:fillRef idx="1">
+            <a:schemeClr val="accent1"/>
+          </a:fillRef>
+          <a:effectRef idx="0">
+            <a:schemeClr val="accent1"/>
+          </a:effectRef>
+          <a:fontRef idx="minor">
+            <a:schemeClr val="lt1"/>
+          </a:fontRef>
+        </p:style>
+        <p:txBody>
+          <a:bodyPr rtlCol="0" anchor="ctr"/>
+          <a:lstStyle/>
+          <a:p>
+            <a:pPr algn="ctr"/>
+            <a:endParaRPr lang="pt-PT"/>
+          </a:p>
+        </p:txBody>
+      </p:sp>
+      <p:sp>
+        <p:nvSpPr>
+          <p:cNvPr id="4" name="TextBox 3">
+            <a:extLst>
+              <a:ext uri="{FF2B5EF4-FFF2-40B4-BE49-F238E27FC236}">
+                <a16:creationId xmlns:a16="http://schemas.microsoft.com/office/drawing/2014/main" id="{4C475CCB-9718-0BEE-0140-91FD3C6806F0}"/>
+              </a:ext>
+            </a:extLst>
+          </p:cNvPr>
+          <p:cNvSpPr txBox="1"/>
+          <p:nvPr/>
+        </p:nvSpPr>
+        <p:spPr>
+          <a:xfrm>
+            <a:off x="609600" y="1092199"/>
+            <a:ext cx="431800" cy="508000"/>
+          </a:xfrm>
+          <a:prstGeom prst="rect">
+            <a:avLst/>
+          </a:prstGeom>
+          <a:noFill/>
+        </p:spPr>
+        <p:txBody>
+          <a:bodyPr vert="horz" wrap="square" lIns="0" tIns="0" rIns="0" bIns="0" rtlCol="0" anchor="ctr">
+            <a:noAutofit/>
+          </a:bodyPr>
+          <a:lstStyle/>
+          <a:p>
+            <a:r>
+              <a:rPr lang="pt-PT" sz="1400" b="1">
+                <a:solidFill>
+                  <a:srgbClr val="1E8A44"/>
+                </a:solidFill>
+                <a:latin typeface="Arial" panose="020B0604020202020204" pitchFamily="34" charset="0"/>
+              </a:rPr>
+              <a:t>H1</a:t>
+            </a:r>
+          </a:p>
+        </p:txBody>
+      </p:sp>
+      <p:sp>
+        <p:nvSpPr>
+          <p:cNvPr id="5" name="TextBox 4">
+            <a:extLst>
+              <a:ext uri="{FF2B5EF4-FFF2-40B4-BE49-F238E27FC236}">
+                <a16:creationId xmlns:a16="http://schemas.microsoft.com/office/drawing/2014/main" id="{15482283-85A5-A5C5-47EA-695AD38D6CDA}"/>
+              </a:ext>
+            </a:extLst>
+          </p:cNvPr>
+          <p:cNvSpPr txBox="1"/>
+          <p:nvPr/>
+        </p:nvSpPr>
+        <p:spPr>
+          <a:xfrm>
+            <a:off x="1066800" y="1092199"/>
+            <a:ext cx="2921000" cy="508000"/>
+          </a:xfrm>
+          <a:prstGeom prst="rect">
+            <a:avLst/>
+          </a:prstGeom>
+          <a:noFill/>
+        </p:spPr>
+        <p:txBody>
+          <a:bodyPr vert="horz" wrap="square" lIns="0" tIns="0" rIns="0" bIns="0" rtlCol="0" anchor="ctr">
+            <a:noAutofit/>
+          </a:bodyPr>
+          <a:lstStyle/>
+          <a:p>
+            <a:r>
+              <a:rPr lang="pt-PT" sz="1200">
+                <a:solidFill>
+                  <a:srgbClr val="1F2A24"/>
+                </a:solidFill>
+                <a:latin typeface="Calibri" panose="020F0502020204030204" pitchFamily="34" charset="0"/>
+              </a:rPr>
+              <a:t>Interesse médio acima de 3</a:t>
+            </a:r>
+          </a:p>
+        </p:txBody>
+      </p:sp>
+      <p:sp>
+        <p:nvSpPr>
+          <p:cNvPr id="6" name="TextBox 5">
+            <a:extLst>
+              <a:ext uri="{FF2B5EF4-FFF2-40B4-BE49-F238E27FC236}">
+                <a16:creationId xmlns:a16="http://schemas.microsoft.com/office/drawing/2014/main" id="{8FC25417-3578-EC76-3014-44CFDA41BA9F}"/>
+              </a:ext>
+            </a:extLst>
+          </p:cNvPr>
+          <p:cNvSpPr txBox="1"/>
+          <p:nvPr/>
+        </p:nvSpPr>
+        <p:spPr>
+          <a:xfrm>
+            <a:off x="4038600" y="1092199"/>
+            <a:ext cx="1143000" cy="508000"/>
+          </a:xfrm>
+          <a:prstGeom prst="rect">
+            <a:avLst/>
+          </a:prstGeom>
+          <a:noFill/>
+        </p:spPr>
+        <p:txBody>
+          <a:bodyPr vert="horz" wrap="square" lIns="0" tIns="0" rIns="0" bIns="0" rtlCol="0" anchor="ctr">
+            <a:noAutofit/>
+          </a:bodyPr>
+          <a:lstStyle/>
+          <a:p>
+            <a:pPr algn="r"/>
+            <a:r>
+              <a:rPr lang="pt-PT" sz="1200" b="1">
+                <a:solidFill>
+                  <a:srgbClr val="1E8A44"/>
+                </a:solidFill>
+                <a:latin typeface="Calibri" panose="020F0502020204030204" pitchFamily="34" charset="0"/>
+              </a:rPr>
+              <a:t>Confirmada</a:t>
+            </a:r>
+          </a:p>
+        </p:txBody>
+      </p:sp>
+      <p:sp>
+        <p:nvSpPr>
+          <p:cNvPr id="7" name="Hipótese 2">
+            <a:extLst>
+              <a:ext uri="{FF2B5EF4-FFF2-40B4-BE49-F238E27FC236}">
+                <a16:creationId xmlns:a16="http://schemas.microsoft.com/office/drawing/2014/main" id="{9C2CCB11-D7D0-10A8-64E6-514C99B517E4}"/>
+              </a:ext>
+            </a:extLst>
+          </p:cNvPr>
+          <p:cNvSpPr/>
+          <p:nvPr/>
+        </p:nvSpPr>
+        <p:spPr>
+          <a:xfrm>
+            <a:off x="457200" y="1701800"/>
+            <a:ext cx="4876800" cy="508000"/>
+          </a:xfrm>
+          <a:prstGeom prst="roundRect">
+            <a:avLst>
+              <a:gd name="adj" fmla="val 8000"/>
+            </a:avLst>
+          </a:prstGeom>
+          <a:solidFill>
+            <a:srgbClr val="EEF5EF"/>
+          </a:solidFill>
+          <a:ln w="12700" cap="flat" cmpd="sng" algn="ctr">
+            <a:noFill/>
+            <a:prstDash val="solid"/>
+            <a:miter lim="800000"/>
+          </a:ln>
+          <a:effectLst/>
+          <a:extLst>
+            <a:ext uri="{91240B29-F687-4F45-9708-019B960494DF}">
+              <a14:hiddenLine xmlns:a14="http://schemas.microsoft.com/office/drawing/2010/main" w="12700" cap="flat" cmpd="sng" algn="ctr">
+                <a:solidFill>
+                  <a:schemeClr val="accent1">
+                    <a:shade val="15000"/>
+                  </a:schemeClr>
+                </a:solidFill>
+                <a:prstDash val="solid"/>
+                <a:miter lim="800000"/>
+              </a14:hiddenLine>
+            </a:ext>
+          </a:extLst>
+        </p:spPr>
+        <p:style>
+          <a:lnRef idx="2">
+            <a:schemeClr val="accent1">
+              <a:shade val="15000"/>
+            </a:schemeClr>
+          </a:lnRef>
+          <a:fillRef idx="1">
+            <a:schemeClr val="accent1"/>
+          </a:fillRef>
+          <a:effectRef idx="0">
+            <a:schemeClr val="accent1"/>
+          </a:effectRef>
+          <a:fontRef idx="minor">
+            <a:schemeClr val="lt1"/>
+          </a:fontRef>
+        </p:style>
+        <p:txBody>
+          <a:bodyPr rtlCol="0" anchor="ctr"/>
+          <a:lstStyle/>
+          <a:p>
+            <a:pPr algn="ctr"/>
+            <a:endParaRPr lang="pt-PT"/>
+          </a:p>
+        </p:txBody>
+      </p:sp>
+      <p:sp>
+        <p:nvSpPr>
+          <p:cNvPr id="8" name="TextBox 7">
+            <a:extLst>
+              <a:ext uri="{FF2B5EF4-FFF2-40B4-BE49-F238E27FC236}">
+                <a16:creationId xmlns:a16="http://schemas.microsoft.com/office/drawing/2014/main" id="{A557B983-5C7F-E66C-94BC-265E6F6466D2}"/>
+              </a:ext>
+            </a:extLst>
+          </p:cNvPr>
+          <p:cNvSpPr txBox="1"/>
+          <p:nvPr/>
+        </p:nvSpPr>
+        <p:spPr>
+          <a:xfrm>
+            <a:off x="609600" y="1701799"/>
+            <a:ext cx="431800" cy="508000"/>
+          </a:xfrm>
+          <a:prstGeom prst="rect">
+            <a:avLst/>
+          </a:prstGeom>
+          <a:noFill/>
+        </p:spPr>
+        <p:txBody>
+          <a:bodyPr vert="horz" wrap="square" lIns="0" tIns="0" rIns="0" bIns="0" rtlCol="0" anchor="ctr">
+            <a:noAutofit/>
+          </a:bodyPr>
+          <a:lstStyle/>
+          <a:p>
+            <a:r>
+              <a:rPr lang="pt-PT" sz="1400" b="1">
+                <a:solidFill>
+                  <a:srgbClr val="1E8A44"/>
+                </a:solidFill>
+                <a:latin typeface="Arial" panose="020B0604020202020204" pitchFamily="34" charset="0"/>
+              </a:rPr>
+              <a:t>H2</a:t>
+            </a:r>
+          </a:p>
+        </p:txBody>
+      </p:sp>
+      <p:sp>
+        <p:nvSpPr>
+          <p:cNvPr id="9" name="TextBox 8">
+            <a:extLst>
+              <a:ext uri="{FF2B5EF4-FFF2-40B4-BE49-F238E27FC236}">
+                <a16:creationId xmlns:a16="http://schemas.microsoft.com/office/drawing/2014/main" id="{61608F02-2410-2176-C5EA-57D27B5FE187}"/>
+              </a:ext>
+            </a:extLst>
+          </p:cNvPr>
+          <p:cNvSpPr txBox="1"/>
+          <p:nvPr/>
+        </p:nvSpPr>
+        <p:spPr>
+          <a:xfrm>
+            <a:off x="1066800" y="1701799"/>
+            <a:ext cx="2921000" cy="508000"/>
+          </a:xfrm>
+          <a:prstGeom prst="rect">
+            <a:avLst/>
+          </a:prstGeom>
+          <a:noFill/>
+        </p:spPr>
+        <p:txBody>
+          <a:bodyPr vert="horz" wrap="square" lIns="0" tIns="0" rIns="0" bIns="0" rtlCol="0" anchor="ctr">
+            <a:noAutofit/>
+          </a:bodyPr>
+          <a:lstStyle/>
+          <a:p>
+            <a:r>
+              <a:rPr lang="pt-PT" sz="1200">
+                <a:solidFill>
+                  <a:srgbClr val="1F2A24"/>
+                </a:solidFill>
+                <a:latin typeface="Calibri" panose="020F0502020204030204" pitchFamily="34" charset="0"/>
+              </a:rPr>
+              <a:t>Interesse difere entre zona urbana e rural</a:t>
+            </a:r>
+          </a:p>
+        </p:txBody>
+      </p:sp>
+      <p:sp>
+        <p:nvSpPr>
+          <p:cNvPr id="10" name="TextBox 9">
+            <a:extLst>
+              <a:ext uri="{FF2B5EF4-FFF2-40B4-BE49-F238E27FC236}">
+                <a16:creationId xmlns:a16="http://schemas.microsoft.com/office/drawing/2014/main" id="{2E37A75A-DECA-FED6-02CA-A9CF6B894D0F}"/>
+              </a:ext>
+            </a:extLst>
+          </p:cNvPr>
+          <p:cNvSpPr txBox="1"/>
+          <p:nvPr/>
+        </p:nvSpPr>
+        <p:spPr>
+          <a:xfrm>
+            <a:off x="4038600" y="1701799"/>
+            <a:ext cx="1143000" cy="508000"/>
+          </a:xfrm>
+          <a:prstGeom prst="rect">
+            <a:avLst/>
+          </a:prstGeom>
+          <a:noFill/>
+        </p:spPr>
+        <p:txBody>
+          <a:bodyPr vert="horz" wrap="square" lIns="0" tIns="0" rIns="0" bIns="0" rtlCol="0" anchor="ctr">
+            <a:noAutofit/>
+          </a:bodyPr>
+          <a:lstStyle/>
+          <a:p>
+            <a:pPr algn="r"/>
+            <a:r>
+              <a:rPr lang="pt-PT" sz="1200" b="1">
+                <a:solidFill>
+                  <a:srgbClr val="5B6B60"/>
+                </a:solidFill>
+                <a:latin typeface="Calibri" panose="020F0502020204030204" pitchFamily="34" charset="0"/>
+              </a:rPr>
+              <a:t>Não confirmada</a:t>
+            </a:r>
+          </a:p>
+        </p:txBody>
+      </p:sp>
+      <p:sp>
+        <p:nvSpPr>
+          <p:cNvPr id="11" name="Hipótese 3">
+            <a:extLst>
+              <a:ext uri="{FF2B5EF4-FFF2-40B4-BE49-F238E27FC236}">
+                <a16:creationId xmlns:a16="http://schemas.microsoft.com/office/drawing/2014/main" id="{7D7444DD-E10F-D544-D638-0EDEE3FBF8A5}"/>
+              </a:ext>
+            </a:extLst>
+          </p:cNvPr>
+          <p:cNvSpPr/>
+          <p:nvPr/>
+        </p:nvSpPr>
+        <p:spPr>
+          <a:xfrm>
+            <a:off x="457200" y="2311400"/>
+            <a:ext cx="4876800" cy="508000"/>
+          </a:xfrm>
+          <a:prstGeom prst="roundRect">
+            <a:avLst>
+              <a:gd name="adj" fmla="val 8000"/>
+            </a:avLst>
+          </a:prstGeom>
+          <a:solidFill>
+            <a:srgbClr val="EEF5EF"/>
+          </a:solidFill>
+          <a:ln w="12700" cap="flat" cmpd="sng" algn="ctr">
+            <a:noFill/>
+            <a:prstDash val="solid"/>
+            <a:miter lim="800000"/>
+          </a:ln>
+          <a:effectLst/>
+          <a:extLst>
+            <a:ext uri="{91240B29-F687-4F45-9708-019B960494DF}">
+              <a14:hiddenLine xmlns:a14="http://schemas.microsoft.com/office/drawing/2010/main" w="12700" cap="flat" cmpd="sng" algn="ctr">
+                <a:solidFill>
+                  <a:schemeClr val="accent1">
+                    <a:shade val="15000"/>
+                  </a:schemeClr>
+                </a:solidFill>
+                <a:prstDash val="solid"/>
+                <a:miter lim="800000"/>
+              </a14:hiddenLine>
+            </a:ext>
+          </a:extLst>
+        </p:spPr>
+        <p:style>
+          <a:lnRef idx="2">
+            <a:schemeClr val="accent1">
+              <a:shade val="15000"/>
+            </a:schemeClr>
+          </a:lnRef>
+          <a:fillRef idx="1">
+            <a:schemeClr val="accent1"/>
+          </a:fillRef>
+          <a:effectRef idx="0">
+            <a:schemeClr val="accent1"/>
+          </a:effectRef>
+          <a:fontRef idx="minor">
+            <a:schemeClr val="lt1"/>
+          </a:fontRef>
+        </p:style>
+        <p:txBody>
+          <a:bodyPr rtlCol="0" anchor="ctr"/>
+          <a:lstStyle/>
+          <a:p>
+            <a:pPr algn="ctr"/>
+            <a:endParaRPr lang="pt-PT"/>
+          </a:p>
+        </p:txBody>
+      </p:sp>
+      <p:sp>
+        <p:nvSpPr>
+          <p:cNvPr id="12" name="TextBox 11">
+            <a:extLst>
+              <a:ext uri="{FF2B5EF4-FFF2-40B4-BE49-F238E27FC236}">
+                <a16:creationId xmlns:a16="http://schemas.microsoft.com/office/drawing/2014/main" id="{E026D7F2-4B98-126F-A4C2-F36C9F4F8B6C}"/>
+              </a:ext>
+            </a:extLst>
+          </p:cNvPr>
+          <p:cNvSpPr txBox="1"/>
+          <p:nvPr/>
+        </p:nvSpPr>
+        <p:spPr>
+          <a:xfrm>
+            <a:off x="609600" y="2311399"/>
+            <a:ext cx="431800" cy="508000"/>
+          </a:xfrm>
+          <a:prstGeom prst="rect">
+            <a:avLst/>
+          </a:prstGeom>
+          <a:noFill/>
+        </p:spPr>
+        <p:txBody>
+          <a:bodyPr vert="horz" wrap="square" lIns="0" tIns="0" rIns="0" bIns="0" rtlCol="0" anchor="ctr">
+            <a:noAutofit/>
+          </a:bodyPr>
+          <a:lstStyle/>
+          <a:p>
+            <a:r>
+              <a:rPr lang="pt-PT" sz="1400" b="1">
+                <a:solidFill>
+                  <a:srgbClr val="1E8A44"/>
+                </a:solidFill>
+                <a:latin typeface="Arial" panose="020B0604020202020204" pitchFamily="34" charset="0"/>
+              </a:rPr>
+              <a:t>H3</a:t>
+            </a:r>
+          </a:p>
+        </p:txBody>
+      </p:sp>
+      <p:sp>
+        <p:nvSpPr>
+          <p:cNvPr id="13" name="TextBox 12">
+            <a:extLst>
+              <a:ext uri="{FF2B5EF4-FFF2-40B4-BE49-F238E27FC236}">
+                <a16:creationId xmlns:a16="http://schemas.microsoft.com/office/drawing/2014/main" id="{D87D871E-4425-BCE5-C6D2-7C2A0CD81DAB}"/>
+              </a:ext>
+            </a:extLst>
+          </p:cNvPr>
+          <p:cNvSpPr txBox="1"/>
+          <p:nvPr/>
+        </p:nvSpPr>
+        <p:spPr>
+          <a:xfrm>
+            <a:off x="1066800" y="2311399"/>
+            <a:ext cx="2921000" cy="508000"/>
+          </a:xfrm>
+          <a:prstGeom prst="rect">
+            <a:avLst/>
+          </a:prstGeom>
+          <a:noFill/>
+        </p:spPr>
+        <p:txBody>
+          <a:bodyPr vert="horz" wrap="square" lIns="0" tIns="0" rIns="0" bIns="0" rtlCol="0" anchor="ctr">
+            <a:noAutofit/>
+          </a:bodyPr>
+          <a:lstStyle/>
+          <a:p>
+            <a:r>
+              <a:rPr lang="pt-PT" sz="1200">
+                <a:solidFill>
+                  <a:srgbClr val="1F2A24"/>
+                </a:solidFill>
+                <a:latin typeface="Calibri" panose="020F0502020204030204" pitchFamily="34" charset="0"/>
+              </a:rPr>
+              <a:t>Quem já compra a produtores tem mais interesse</a:t>
+            </a:r>
+          </a:p>
+        </p:txBody>
+      </p:sp>
+      <p:sp>
+        <p:nvSpPr>
+          <p:cNvPr id="14" name="TextBox 13">
+            <a:extLst>
+              <a:ext uri="{FF2B5EF4-FFF2-40B4-BE49-F238E27FC236}">
+                <a16:creationId xmlns:a16="http://schemas.microsoft.com/office/drawing/2014/main" id="{18EA154A-483F-1705-9B2C-FE2A3236CEDA}"/>
+              </a:ext>
+            </a:extLst>
+          </p:cNvPr>
+          <p:cNvSpPr txBox="1"/>
+          <p:nvPr/>
+        </p:nvSpPr>
+        <p:spPr>
+          <a:xfrm>
+            <a:off x="4038600" y="2311399"/>
+            <a:ext cx="1143000" cy="508000"/>
+          </a:xfrm>
+          <a:prstGeom prst="rect">
+            <a:avLst/>
+          </a:prstGeom>
+          <a:noFill/>
+        </p:spPr>
+        <p:txBody>
+          <a:bodyPr vert="horz" wrap="square" lIns="0" tIns="0" rIns="0" bIns="0" rtlCol="0" anchor="ctr">
+            <a:noAutofit/>
+          </a:bodyPr>
+          <a:lstStyle/>
+          <a:p>
+            <a:pPr algn="r"/>
+            <a:r>
+              <a:rPr lang="pt-PT" sz="1200" b="1">
+                <a:solidFill>
+                  <a:srgbClr val="5B6B60"/>
+                </a:solidFill>
+                <a:latin typeface="Calibri" panose="020F0502020204030204" pitchFamily="34" charset="0"/>
+              </a:rPr>
+              <a:t>Não confirmada</a:t>
+            </a:r>
+          </a:p>
+        </p:txBody>
+      </p:sp>
+      <p:sp>
+        <p:nvSpPr>
+          <p:cNvPr id="15" name="Hipótese 4">
+            <a:extLst>
+              <a:ext uri="{FF2B5EF4-FFF2-40B4-BE49-F238E27FC236}">
+                <a16:creationId xmlns:a16="http://schemas.microsoft.com/office/drawing/2014/main" id="{FCDD9499-16A7-8402-7243-5D3F8D5D748C}"/>
+              </a:ext>
+            </a:extLst>
+          </p:cNvPr>
+          <p:cNvSpPr/>
+          <p:nvPr/>
+        </p:nvSpPr>
+        <p:spPr>
+          <a:xfrm>
+            <a:off x="457200" y="2921000"/>
+            <a:ext cx="4876800" cy="508000"/>
+          </a:xfrm>
+          <a:prstGeom prst="roundRect">
+            <a:avLst>
+              <a:gd name="adj" fmla="val 8000"/>
+            </a:avLst>
+          </a:prstGeom>
+          <a:solidFill>
+            <a:srgbClr val="EEF5EF"/>
+          </a:solidFill>
+          <a:ln w="12700" cap="flat" cmpd="sng" algn="ctr">
+            <a:noFill/>
+            <a:prstDash val="solid"/>
+            <a:miter lim="800000"/>
+          </a:ln>
+          <a:effectLst/>
+          <a:extLst>
+            <a:ext uri="{91240B29-F687-4F45-9708-019B960494DF}">
+              <a14:hiddenLine xmlns:a14="http://schemas.microsoft.com/office/drawing/2010/main" w="12700" cap="flat" cmpd="sng" algn="ctr">
+                <a:solidFill>
+                  <a:schemeClr val="accent1">
+                    <a:shade val="15000"/>
+                  </a:schemeClr>
+                </a:solidFill>
+                <a:prstDash val="solid"/>
+                <a:miter lim="800000"/>
+              </a14:hiddenLine>
+            </a:ext>
+          </a:extLst>
+        </p:spPr>
+        <p:style>
+          <a:lnRef idx="2">
+            <a:schemeClr val="accent1">
+              <a:shade val="15000"/>
+            </a:schemeClr>
+          </a:lnRef>
+          <a:fillRef idx="1">
+            <a:schemeClr val="accent1"/>
+          </a:fillRef>
+          <a:effectRef idx="0">
+            <a:schemeClr val="accent1"/>
+          </a:effectRef>
+          <a:fontRef idx="minor">
+            <a:schemeClr val="lt1"/>
+          </a:fontRef>
+        </p:style>
+        <p:txBody>
+          <a:bodyPr rtlCol="0" anchor="ctr"/>
+          <a:lstStyle/>
+          <a:p>
+            <a:pPr algn="ctr"/>
+            <a:endParaRPr lang="pt-PT"/>
+          </a:p>
+        </p:txBody>
+      </p:sp>
+      <p:sp>
+        <p:nvSpPr>
+          <p:cNvPr id="16" name="TextBox 15">
+            <a:extLst>
+              <a:ext uri="{FF2B5EF4-FFF2-40B4-BE49-F238E27FC236}">
+                <a16:creationId xmlns:a16="http://schemas.microsoft.com/office/drawing/2014/main" id="{CE56DAEB-F854-D530-9089-2ACD583CBD76}"/>
+              </a:ext>
+            </a:extLst>
+          </p:cNvPr>
+          <p:cNvSpPr txBox="1"/>
+          <p:nvPr/>
+        </p:nvSpPr>
+        <p:spPr>
+          <a:xfrm>
+            <a:off x="609600" y="2920999"/>
+            <a:ext cx="431800" cy="508000"/>
+          </a:xfrm>
+          <a:prstGeom prst="rect">
+            <a:avLst/>
+          </a:prstGeom>
+          <a:noFill/>
+        </p:spPr>
+        <p:txBody>
+          <a:bodyPr vert="horz" wrap="square" lIns="0" tIns="0" rIns="0" bIns="0" rtlCol="0" anchor="ctr">
+            <a:noAutofit/>
+          </a:bodyPr>
+          <a:lstStyle/>
+          <a:p>
+            <a:r>
+              <a:rPr lang="pt-PT" sz="1400" b="1">
+                <a:solidFill>
+                  <a:srgbClr val="1E8A44"/>
+                </a:solidFill>
+                <a:latin typeface="Arial" panose="020B0604020202020204" pitchFamily="34" charset="0"/>
+              </a:rPr>
+              <a:t>H4</a:t>
+            </a:r>
+          </a:p>
+        </p:txBody>
+      </p:sp>
+      <p:sp>
+        <p:nvSpPr>
+          <p:cNvPr id="17" name="TextBox 16">
+            <a:extLst>
+              <a:ext uri="{FF2B5EF4-FFF2-40B4-BE49-F238E27FC236}">
+                <a16:creationId xmlns:a16="http://schemas.microsoft.com/office/drawing/2014/main" id="{A8FA62CA-249E-2BA5-E0DF-5CF7D20F5771}"/>
+              </a:ext>
+            </a:extLst>
+          </p:cNvPr>
+          <p:cNvSpPr txBox="1"/>
+          <p:nvPr/>
+        </p:nvSpPr>
+        <p:spPr>
+          <a:xfrm>
+            <a:off x="1066800" y="2920999"/>
+            <a:ext cx="2921000" cy="508000"/>
+          </a:xfrm>
+          <a:prstGeom prst="rect">
+            <a:avLst/>
+          </a:prstGeom>
+          <a:noFill/>
+        </p:spPr>
+        <p:txBody>
+          <a:bodyPr vert="horz" wrap="square" lIns="0" tIns="0" rIns="0" bIns="0" rtlCol="0" anchor="ctr">
+            <a:noAutofit/>
+          </a:bodyPr>
+          <a:lstStyle/>
+          <a:p>
+            <a:r>
+              <a:rPr lang="pt-PT" sz="1200">
+                <a:solidFill>
+                  <a:srgbClr val="1F2A24"/>
+                </a:solidFill>
+                <a:latin typeface="Calibri" panose="020F0502020204030204" pitchFamily="34" charset="0"/>
+              </a:rPr>
+              <a:t>Quem tem horta tem menos interesse</a:t>
+            </a:r>
+          </a:p>
+        </p:txBody>
+      </p:sp>
+      <p:sp>
+        <p:nvSpPr>
+          <p:cNvPr id="18" name="TextBox 17">
+            <a:extLst>
+              <a:ext uri="{FF2B5EF4-FFF2-40B4-BE49-F238E27FC236}">
+                <a16:creationId xmlns:a16="http://schemas.microsoft.com/office/drawing/2014/main" id="{4BD43B18-A90B-9DBD-7FC0-D27011B96D41}"/>
+              </a:ext>
+            </a:extLst>
+          </p:cNvPr>
+          <p:cNvSpPr txBox="1"/>
+          <p:nvPr/>
+        </p:nvSpPr>
+        <p:spPr>
+          <a:xfrm>
+            <a:off x="4038600" y="2920999"/>
+            <a:ext cx="1143000" cy="508000"/>
+          </a:xfrm>
+          <a:prstGeom prst="rect">
+            <a:avLst/>
+          </a:prstGeom>
+          <a:noFill/>
+        </p:spPr>
+        <p:txBody>
+          <a:bodyPr vert="horz" wrap="square" lIns="0" tIns="0" rIns="0" bIns="0" rtlCol="0" anchor="ctr">
+            <a:noAutofit/>
+          </a:bodyPr>
+          <a:lstStyle/>
+          <a:p>
+            <a:pPr algn="r"/>
+            <a:r>
+              <a:rPr lang="pt-PT" sz="1200" b="1">
+                <a:solidFill>
+                  <a:srgbClr val="5B6B60"/>
+                </a:solidFill>
+                <a:latin typeface="Calibri" panose="020F0502020204030204" pitchFamily="34" charset="0"/>
+              </a:rPr>
+              <a:t>Quase (p = 0,052)</a:t>
+            </a:r>
+          </a:p>
+        </p:txBody>
+      </p:sp>
+      <p:sp>
+        <p:nvSpPr>
+          <p:cNvPr id="19" name="Hipótese 5">
+            <a:extLst>
+              <a:ext uri="{FF2B5EF4-FFF2-40B4-BE49-F238E27FC236}">
+                <a16:creationId xmlns:a16="http://schemas.microsoft.com/office/drawing/2014/main" id="{537FE840-E34D-3C2C-601B-99FE909EFBD5}"/>
+              </a:ext>
+            </a:extLst>
+          </p:cNvPr>
+          <p:cNvSpPr/>
+          <p:nvPr/>
+        </p:nvSpPr>
+        <p:spPr>
+          <a:xfrm>
+            <a:off x="457200" y="3530600"/>
+            <a:ext cx="4876800" cy="508000"/>
+          </a:xfrm>
+          <a:prstGeom prst="roundRect">
+            <a:avLst>
+              <a:gd name="adj" fmla="val 8000"/>
+            </a:avLst>
+          </a:prstGeom>
+          <a:solidFill>
+            <a:srgbClr val="EEF5EF"/>
+          </a:solidFill>
+          <a:ln w="12700" cap="flat" cmpd="sng" algn="ctr">
+            <a:noFill/>
+            <a:prstDash val="solid"/>
+            <a:miter lim="800000"/>
+          </a:ln>
+          <a:effectLst/>
+          <a:extLst>
+            <a:ext uri="{91240B29-F687-4F45-9708-019B960494DF}">
+              <a14:hiddenLine xmlns:a14="http://schemas.microsoft.com/office/drawing/2010/main" w="12700" cap="flat" cmpd="sng" algn="ctr">
+                <a:solidFill>
+                  <a:schemeClr val="accent1">
+                    <a:shade val="15000"/>
+                  </a:schemeClr>
+                </a:solidFill>
+                <a:prstDash val="solid"/>
+                <a:miter lim="800000"/>
+              </a14:hiddenLine>
+            </a:ext>
+          </a:extLst>
+        </p:spPr>
+        <p:style>
+          <a:lnRef idx="2">
+            <a:schemeClr val="accent1">
+              <a:shade val="15000"/>
+            </a:schemeClr>
+          </a:lnRef>
+          <a:fillRef idx="1">
+            <a:schemeClr val="accent1"/>
+          </a:fillRef>
+          <a:effectRef idx="0">
+            <a:schemeClr val="accent1"/>
+          </a:effectRef>
+          <a:fontRef idx="minor">
+            <a:schemeClr val="lt1"/>
+          </a:fontRef>
+        </p:style>
+        <p:txBody>
+          <a:bodyPr rtlCol="0" anchor="ctr"/>
+          <a:lstStyle/>
+          <a:p>
+            <a:pPr algn="ctr"/>
+            <a:endParaRPr lang="pt-PT"/>
+          </a:p>
+        </p:txBody>
+      </p:sp>
+      <p:sp>
+        <p:nvSpPr>
+          <p:cNvPr id="20" name="TextBox 19">
+            <a:extLst>
+              <a:ext uri="{FF2B5EF4-FFF2-40B4-BE49-F238E27FC236}">
+                <a16:creationId xmlns:a16="http://schemas.microsoft.com/office/drawing/2014/main" id="{F8E17198-C7F4-864B-E3F2-FDADBDD27B85}"/>
+              </a:ext>
+            </a:extLst>
+          </p:cNvPr>
+          <p:cNvSpPr txBox="1"/>
+          <p:nvPr/>
+        </p:nvSpPr>
+        <p:spPr>
+          <a:xfrm>
+            <a:off x="609600" y="3530599"/>
+            <a:ext cx="431800" cy="508000"/>
+          </a:xfrm>
+          <a:prstGeom prst="rect">
+            <a:avLst/>
+          </a:prstGeom>
+          <a:noFill/>
+        </p:spPr>
+        <p:txBody>
+          <a:bodyPr vert="horz" wrap="square" lIns="0" tIns="0" rIns="0" bIns="0" rtlCol="0" anchor="ctr">
+            <a:noAutofit/>
+          </a:bodyPr>
+          <a:lstStyle/>
+          <a:p>
+            <a:r>
+              <a:rPr lang="pt-PT" sz="1400" b="1">
+                <a:solidFill>
+                  <a:srgbClr val="1E8A44"/>
+                </a:solidFill>
+                <a:latin typeface="Arial" panose="020B0604020202020204" pitchFamily="34" charset="0"/>
+              </a:rPr>
+              <a:t>H5</a:t>
+            </a:r>
+          </a:p>
+        </p:txBody>
+      </p:sp>
+      <p:sp>
+        <p:nvSpPr>
+          <p:cNvPr id="21" name="TextBox 20">
+            <a:extLst>
+              <a:ext uri="{FF2B5EF4-FFF2-40B4-BE49-F238E27FC236}">
+                <a16:creationId xmlns:a16="http://schemas.microsoft.com/office/drawing/2014/main" id="{18C2E39B-B1E1-2EAF-BD5A-C6FB3D81CA09}"/>
+              </a:ext>
+            </a:extLst>
+          </p:cNvPr>
+          <p:cNvSpPr txBox="1"/>
+          <p:nvPr/>
+        </p:nvSpPr>
+        <p:spPr>
+          <a:xfrm>
+            <a:off x="1066800" y="3530599"/>
+            <a:ext cx="2921000" cy="508000"/>
+          </a:xfrm>
+          <a:prstGeom prst="rect">
+            <a:avLst/>
+          </a:prstGeom>
+          <a:noFill/>
+        </p:spPr>
+        <p:txBody>
+          <a:bodyPr vert="horz" wrap="square" lIns="0" tIns="0" rIns="0" bIns="0" rtlCol="0" anchor="ctr">
+            <a:noAutofit/>
+          </a:bodyPr>
+          <a:lstStyle/>
+          <a:p>
+            <a:r>
+              <a:rPr lang="pt-PT" sz="1200">
+                <a:solidFill>
+                  <a:srgbClr val="1F2A24"/>
+                </a:solidFill>
+                <a:latin typeface="Calibri" panose="020F0502020204030204" pitchFamily="34" charset="0"/>
+              </a:rPr>
+              <a:t>Metade aceita deslocar-se mais de 10 min</a:t>
+            </a:r>
+          </a:p>
+        </p:txBody>
+      </p:sp>
+      <p:sp>
+        <p:nvSpPr>
+          <p:cNvPr id="22" name="TextBox 21">
+            <a:extLst>
+              <a:ext uri="{FF2B5EF4-FFF2-40B4-BE49-F238E27FC236}">
+                <a16:creationId xmlns:a16="http://schemas.microsoft.com/office/drawing/2014/main" id="{4CFE0055-D8F0-6C10-9ED0-DA165712031C}"/>
+              </a:ext>
+            </a:extLst>
+          </p:cNvPr>
+          <p:cNvSpPr txBox="1"/>
+          <p:nvPr/>
+        </p:nvSpPr>
+        <p:spPr>
+          <a:xfrm>
+            <a:off x="4038600" y="3530599"/>
+            <a:ext cx="1143000" cy="508000"/>
+          </a:xfrm>
+          <a:prstGeom prst="rect">
+            <a:avLst/>
+          </a:prstGeom>
+          <a:noFill/>
+        </p:spPr>
+        <p:txBody>
+          <a:bodyPr vert="horz" wrap="square" lIns="0" tIns="0" rIns="0" bIns="0" rtlCol="0" anchor="ctr">
+            <a:noAutofit/>
+          </a:bodyPr>
+          <a:lstStyle/>
+          <a:p>
+            <a:pPr algn="r"/>
+            <a:r>
+              <a:rPr lang="pt-PT" sz="1200" b="1">
+                <a:solidFill>
+                  <a:srgbClr val="E2672B"/>
+                </a:solidFill>
+                <a:latin typeface="Calibri" panose="020F0502020204030204" pitchFamily="34" charset="0"/>
+              </a:rPr>
+              <a:t>Rejeitada</a:t>
+            </a:r>
+          </a:p>
+        </p:txBody>
+      </p:sp>
+      <p:sp>
+        <p:nvSpPr>
+          <p:cNvPr id="23" name="Hipótese 6">
+            <a:extLst>
+              <a:ext uri="{FF2B5EF4-FFF2-40B4-BE49-F238E27FC236}">
+                <a16:creationId xmlns:a16="http://schemas.microsoft.com/office/drawing/2014/main" id="{20132588-75FD-63A9-20C9-FF8B7A1E3E57}"/>
+              </a:ext>
+            </a:extLst>
+          </p:cNvPr>
+          <p:cNvSpPr/>
+          <p:nvPr/>
+        </p:nvSpPr>
+        <p:spPr>
+          <a:xfrm>
+            <a:off x="457200" y="4140200"/>
+            <a:ext cx="4876800" cy="508000"/>
+          </a:xfrm>
+          <a:prstGeom prst="roundRect">
+            <a:avLst>
+              <a:gd name="adj" fmla="val 8000"/>
+            </a:avLst>
+          </a:prstGeom>
+          <a:solidFill>
+            <a:srgbClr val="EEF5EF"/>
+          </a:solidFill>
+          <a:ln w="12700" cap="flat" cmpd="sng" algn="ctr">
+            <a:noFill/>
+            <a:prstDash val="solid"/>
+            <a:miter lim="800000"/>
+          </a:ln>
+          <a:effectLst/>
+          <a:extLst>
+            <a:ext uri="{91240B29-F687-4F45-9708-019B960494DF}">
+              <a14:hiddenLine xmlns:a14="http://schemas.microsoft.com/office/drawing/2010/main" w="12700" cap="flat" cmpd="sng" algn="ctr">
+                <a:solidFill>
+                  <a:schemeClr val="accent1">
+                    <a:shade val="15000"/>
+                  </a:schemeClr>
+                </a:solidFill>
+                <a:prstDash val="solid"/>
+                <a:miter lim="800000"/>
+              </a14:hiddenLine>
+            </a:ext>
+          </a:extLst>
+        </p:spPr>
+        <p:style>
+          <a:lnRef idx="2">
+            <a:schemeClr val="accent1">
+              <a:shade val="15000"/>
+            </a:schemeClr>
+          </a:lnRef>
+          <a:fillRef idx="1">
+            <a:schemeClr val="accent1"/>
+          </a:fillRef>
+          <a:effectRef idx="0">
+            <a:schemeClr val="accent1"/>
+          </a:effectRef>
+          <a:fontRef idx="minor">
+            <a:schemeClr val="lt1"/>
+          </a:fontRef>
+        </p:style>
+        <p:txBody>
+          <a:bodyPr rtlCol="0" anchor="ctr"/>
+          <a:lstStyle/>
+          <a:p>
+            <a:pPr algn="ctr"/>
+            <a:endParaRPr lang="pt-PT"/>
+          </a:p>
+        </p:txBody>
+      </p:sp>
+      <p:sp>
+        <p:nvSpPr>
+          <p:cNvPr id="24" name="TextBox 23">
+            <a:extLst>
+              <a:ext uri="{FF2B5EF4-FFF2-40B4-BE49-F238E27FC236}">
+                <a16:creationId xmlns:a16="http://schemas.microsoft.com/office/drawing/2014/main" id="{70F9FD1B-0EA4-880A-7158-D9646F615119}"/>
+              </a:ext>
+            </a:extLst>
+          </p:cNvPr>
+          <p:cNvSpPr txBox="1"/>
+          <p:nvPr/>
+        </p:nvSpPr>
+        <p:spPr>
+          <a:xfrm>
+            <a:off x="609600" y="4140199"/>
+            <a:ext cx="431800" cy="508000"/>
+          </a:xfrm>
+          <a:prstGeom prst="rect">
+            <a:avLst/>
+          </a:prstGeom>
+          <a:noFill/>
+        </p:spPr>
+        <p:txBody>
+          <a:bodyPr vert="horz" wrap="square" lIns="0" tIns="0" rIns="0" bIns="0" rtlCol="0" anchor="ctr">
+            <a:noAutofit/>
+          </a:bodyPr>
+          <a:lstStyle/>
+          <a:p>
+            <a:r>
+              <a:rPr lang="pt-PT" sz="1400" b="1">
+                <a:solidFill>
+                  <a:srgbClr val="1E8A44"/>
+                </a:solidFill>
+                <a:latin typeface="Arial" panose="020B0604020202020204" pitchFamily="34" charset="0"/>
+              </a:rPr>
+              <a:t>H6</a:t>
+            </a:r>
+          </a:p>
+        </p:txBody>
+      </p:sp>
+      <p:sp>
+        <p:nvSpPr>
+          <p:cNvPr id="26" name="TextBox 25">
+            <a:extLst>
+              <a:ext uri="{FF2B5EF4-FFF2-40B4-BE49-F238E27FC236}">
+                <a16:creationId xmlns:a16="http://schemas.microsoft.com/office/drawing/2014/main" id="{4B31560B-7BD9-B3BD-27D8-2C920CEEF479}"/>
+              </a:ext>
+            </a:extLst>
+          </p:cNvPr>
+          <p:cNvSpPr txBox="1"/>
+          <p:nvPr/>
+        </p:nvSpPr>
+        <p:spPr>
+          <a:xfrm>
+            <a:off x="1066800" y="4140199"/>
+            <a:ext cx="2921000" cy="508000"/>
+          </a:xfrm>
+          <a:prstGeom prst="rect">
+            <a:avLst/>
+          </a:prstGeom>
+          <a:noFill/>
+        </p:spPr>
+        <p:txBody>
+          <a:bodyPr vert="horz" wrap="square" lIns="0" tIns="0" rIns="0" bIns="0" rtlCol="0" anchor="ctr">
+            <a:noAutofit/>
+          </a:bodyPr>
+          <a:lstStyle/>
+          <a:p>
+            <a:r>
+              <a:rPr lang="pt-PT" sz="1200">
+                <a:solidFill>
+                  <a:srgbClr val="1F2A24"/>
+                </a:solidFill>
+                <a:latin typeface="Calibri" panose="020F0502020204030204" pitchFamily="34" charset="0"/>
+              </a:rPr>
+              <a:t>Metade aceita a taxa de 1 €</a:t>
+            </a:r>
+          </a:p>
+        </p:txBody>
+      </p:sp>
+      <p:sp>
+        <p:nvSpPr>
+          <p:cNvPr id="27" name="TextBox 26">
+            <a:extLst>
+              <a:ext uri="{FF2B5EF4-FFF2-40B4-BE49-F238E27FC236}">
+                <a16:creationId xmlns:a16="http://schemas.microsoft.com/office/drawing/2014/main" id="{DD80FB48-156E-A5A2-2DB9-883C9B3D21EA}"/>
+              </a:ext>
+            </a:extLst>
+          </p:cNvPr>
+          <p:cNvSpPr txBox="1"/>
+          <p:nvPr/>
+        </p:nvSpPr>
+        <p:spPr>
+          <a:xfrm>
+            <a:off x="4038600" y="4140199"/>
+            <a:ext cx="1143000" cy="508000"/>
+          </a:xfrm>
+          <a:prstGeom prst="rect">
+            <a:avLst/>
+          </a:prstGeom>
+          <a:noFill/>
+        </p:spPr>
+        <p:txBody>
+          <a:bodyPr vert="horz" wrap="square" lIns="0" tIns="0" rIns="0" bIns="0" rtlCol="0" anchor="ctr">
+            <a:noAutofit/>
+          </a:bodyPr>
+          <a:lstStyle/>
+          <a:p>
+            <a:pPr algn="r"/>
+            <a:r>
+              <a:rPr lang="pt-PT" sz="1200" b="1">
+                <a:solidFill>
+                  <a:srgbClr val="1E8A44"/>
+                </a:solidFill>
+                <a:latin typeface="Calibri" panose="020F0502020204030204" pitchFamily="34" charset="0"/>
+              </a:rPr>
+              <a:t>Confirmada</a:t>
+            </a:r>
+          </a:p>
+        </p:txBody>
+      </p:sp>
+      <p:sp>
+        <p:nvSpPr>
+          <p:cNvPr id="28" name="Segmento">
+            <a:extLst>
+              <a:ext uri="{FF2B5EF4-FFF2-40B4-BE49-F238E27FC236}">
+                <a16:creationId xmlns:a16="http://schemas.microsoft.com/office/drawing/2014/main" id="{2137B77A-74AF-2ED1-E77F-A0BF87F549A5}"/>
+              </a:ext>
+            </a:extLst>
+          </p:cNvPr>
+          <p:cNvSpPr/>
+          <p:nvPr/>
+        </p:nvSpPr>
+        <p:spPr>
+          <a:xfrm>
+            <a:off x="5588000" y="1092200"/>
+            <a:ext cx="3098800" cy="3556000"/>
+          </a:xfrm>
+          <a:prstGeom prst="roundRect">
+            <a:avLst>
+              <a:gd name="adj" fmla="val 2459"/>
+            </a:avLst>
+          </a:prstGeom>
+          <a:solidFill>
+            <a:srgbClr val="17552E"/>
+          </a:solidFill>
+          <a:ln w="12700" cap="flat" cmpd="sng" algn="ctr">
+            <a:noFill/>
+            <a:prstDash val="solid"/>
+            <a:miter lim="800000"/>
+          </a:ln>
+          <a:effectLst/>
+          <a:extLst>
+            <a:ext uri="{91240B29-F687-4F45-9708-019B960494DF}">
+              <a14:hiddenLine xmlns:a14="http://schemas.microsoft.com/office/drawing/2010/main" w="12700" cap="flat" cmpd="sng" algn="ctr">
+                <a:solidFill>
+                  <a:schemeClr val="accent1">
+                    <a:shade val="15000"/>
+                  </a:schemeClr>
+                </a:solidFill>
+                <a:prstDash val="solid"/>
+                <a:miter lim="800000"/>
+              </a14:hiddenLine>
+            </a:ext>
+          </a:extLst>
+        </p:spPr>
+        <p:style>
+          <a:lnRef idx="2">
+            <a:schemeClr val="accent1">
+              <a:shade val="15000"/>
+            </a:schemeClr>
+          </a:lnRef>
+          <a:fillRef idx="1">
+            <a:schemeClr val="accent1"/>
+          </a:fillRef>
+          <a:effectRef idx="0">
+            <a:schemeClr val="accent1"/>
+          </a:effectRef>
+          <a:fontRef idx="minor">
+            <a:schemeClr val="lt1"/>
+          </a:fontRef>
+        </p:style>
+        <p:txBody>
+          <a:bodyPr rtlCol="0" anchor="ctr"/>
+          <a:lstStyle/>
+          <a:p>
+            <a:pPr algn="ctr"/>
+            <a:endParaRPr lang="pt-PT"/>
+          </a:p>
+        </p:txBody>
+      </p:sp>
+      <p:sp>
+        <p:nvSpPr>
+          <p:cNvPr id="29" name="TextBox 28">
+            <a:extLst>
+              <a:ext uri="{FF2B5EF4-FFF2-40B4-BE49-F238E27FC236}">
+                <a16:creationId xmlns:a16="http://schemas.microsoft.com/office/drawing/2014/main" id="{6B8EC2B3-32EF-E87A-3A24-539048BC9633}"/>
+              </a:ext>
+            </a:extLst>
+          </p:cNvPr>
+          <p:cNvSpPr txBox="1"/>
+          <p:nvPr/>
+        </p:nvSpPr>
+        <p:spPr>
+          <a:xfrm>
+            <a:off x="5791200" y="1269999"/>
+            <a:ext cx="2692400" cy="3200400"/>
+          </a:xfrm>
+          <a:prstGeom prst="rect">
+            <a:avLst/>
+          </a:prstGeom>
+          <a:noFill/>
+        </p:spPr>
+        <p:txBody>
+          <a:bodyPr vert="horz" wrap="square" lIns="0" tIns="0" rIns="0" bIns="0" rtlCol="0" anchor="t">
+            <a:noAutofit/>
+          </a:bodyPr>
+          <a:lstStyle/>
+          <a:p>
+            <a:pPr>
+              <a:spcAft>
+                <a:spcPts val="800"/>
+              </a:spcAft>
+            </a:pPr>
+            <a:r>
+              <a:rPr lang="pt-PT" sz="1600" b="1">
+                <a:solidFill>
+                  <a:srgbClr val="8CC63F"/>
+                </a:solidFill>
+                <a:latin typeface="Calibri" panose="020F0502020204030204" pitchFamily="34" charset="0"/>
+              </a:rPr>
+              <a:t>Segmento prioritário</a:t>
+            </a:r>
+          </a:p>
+          <a:p>
+            <a:pPr>
+              <a:spcAft>
+                <a:spcPts val="800"/>
+              </a:spcAft>
+            </a:pPr>
+            <a:r>
+              <a:rPr lang="pt-PT" sz="1400">
+                <a:solidFill>
+                  <a:srgbClr val="FFFFFF"/>
+                </a:solidFill>
+                <a:latin typeface="Calibri" panose="020F0502020204030204" pitchFamily="34" charset="0"/>
+              </a:rPr>
+              <a:t>Responsáveis pelas compras da casa</a:t>
+            </a:r>
+          </a:p>
+          <a:p>
+            <a:pPr>
+              <a:spcAft>
+                <a:spcPts val="800"/>
+              </a:spcAft>
+            </a:pPr>
+            <a:r>
+              <a:rPr lang="pt-PT" sz="1400">
+                <a:solidFill>
+                  <a:srgbClr val="FFFFFF"/>
+                </a:solidFill>
+                <a:latin typeface="Calibri" panose="020F0502020204030204" pitchFamily="34" charset="0"/>
+              </a:rPr>
+              <a:t>35 a 54 anos</a:t>
+            </a:r>
+          </a:p>
+          <a:p>
+            <a:pPr>
+              <a:spcAft>
+                <a:spcPts val="800"/>
+              </a:spcAft>
+            </a:pPr>
+            <a:r>
+              <a:rPr lang="pt-PT" sz="1400">
+                <a:solidFill>
+                  <a:srgbClr val="FFFFFF"/>
+                </a:solidFill>
+                <a:latin typeface="Calibri" panose="020F0502020204030204" pitchFamily="34" charset="0"/>
+              </a:rPr>
+              <a:t>Zona urbana ou suburbana</a:t>
+            </a:r>
+          </a:p>
+          <a:p>
+            <a:pPr>
+              <a:spcAft>
+                <a:spcPts val="800"/>
+              </a:spcAft>
+            </a:pPr>
+            <a:r>
+              <a:rPr lang="pt-PT" sz="1400">
+                <a:solidFill>
+                  <a:srgbClr val="FFFFFF"/>
+                </a:solidFill>
+                <a:latin typeface="Calibri" panose="020F0502020204030204" pitchFamily="34" charset="0"/>
+              </a:rPr>
+              <a:t>Sem horta própria ou de familiares</a:t>
+            </a:r>
+          </a:p>
+          <a:p>
+            <a:pPr>
+              <a:spcAft>
+                <a:spcPts val="800"/>
+              </a:spcAft>
+            </a:pPr>
+            <a:r>
+              <a:rPr lang="pt-PT" sz="1100" i="1">
+                <a:solidFill>
+                  <a:srgbClr val="FFFFFF"/>
+                </a:solidFill>
+                <a:latin typeface="Calibri" panose="020F0502020204030204" pitchFamily="34" charset="0"/>
+              </a:rPr>
+              <a:t>62 % interessados, contra 43 % de quem tem horta. Quem aceita pagar na app tem mais interesse (p = 0,014).</a:t>
+            </a:r>
           </a:p>
         </p:txBody>
       </p:sp>
     </p:spTree>
+    <p:extLst>
+      <p:ext uri="{BB962C8B-B14F-4D97-AF65-F5344CB8AC3E}">
+        <p14:creationId xmlns:p14="http://schemas.microsoft.com/office/powerpoint/2010/main" val="2627948160"/>
+      </p:ext>
+    </p:extLst>
   </p:cSld>
   <p:clrMapOvr>
     <a:masterClrMapping/>
@@ -5570,4 +9828,319 @@
     </a:ext>
   </a:extLst>
 </a:theme>
+</file>
+
+<file path=ppt/theme/theme2.xml><?xml version="1.0" encoding="utf-8"?>
+<a:theme xmlns:a="http://schemas.openxmlformats.org/drawingml/2006/main" name="Office Theme">
+  <a:themeElements>
+    <a:clrScheme name="Office">
+      <a:dk1>
+        <a:sysClr val="windowText" lastClr="000000"/>
+      </a:dk1>
+      <a:lt1>
+        <a:sysClr val="window" lastClr="FFFFFF"/>
+      </a:lt1>
+      <a:dk2>
+        <a:srgbClr val="0E2841"/>
+      </a:dk2>
+      <a:lt2>
+        <a:srgbClr val="E8E8E8"/>
+      </a:lt2>
+      <a:accent1>
+        <a:srgbClr val="156082"/>
+      </a:accent1>
+      <a:accent2>
+        <a:srgbClr val="E97132"/>
+      </a:accent2>
+      <a:accent3>
+        <a:srgbClr val="196B24"/>
+      </a:accent3>
+      <a:accent4>
+        <a:srgbClr val="0F9ED5"/>
+      </a:accent4>
+      <a:accent5>
+        <a:srgbClr val="A02B93"/>
+      </a:accent5>
+      <a:accent6>
+        <a:srgbClr val="4EA72E"/>
+      </a:accent6>
+      <a:hlink>
+        <a:srgbClr val="467886"/>
+      </a:hlink>
+      <a:folHlink>
+        <a:srgbClr val="96607D"/>
+      </a:folHlink>
+    </a:clrScheme>
+    <a:fontScheme name="Office">
+      <a:majorFont>
+        <a:latin typeface="Aptos Display" panose="02110004020202020204"/>
+        <a:ea typeface=""/>
+        <a:cs typeface=""/>
+        <a:font script="Jpan" typeface="游ゴシック Light"/>
+        <a:font script="Hang" typeface="맑은 고딕"/>
+        <a:font script="Hans" typeface="等线 Light"/>
+        <a:font script="Hant" typeface="新細明體"/>
+        <a:font script="Arab" typeface="Times New Roman"/>
+        <a:font script="Hebr" typeface="Times New Roman"/>
+        <a:font script="Thai" typeface="Angsana New"/>
+        <a:font script="Ethi" typeface="Nyala"/>
+        <a:font script="Beng" typeface="Vrinda"/>
+        <a:font script="Gujr" typeface="Shruti"/>
+        <a:font script="Khmr" typeface="MoolBoran"/>
+        <a:font script="Knda" typeface="Tunga"/>
+        <a:font script="Guru" typeface="Raavi"/>
+        <a:font script="Cans" typeface="Euphemia"/>
+        <a:font script="Cher" typeface="Plantagenet Cherokee"/>
+        <a:font script="Yiii" typeface="Microsoft Yi Baiti"/>
+        <a:font script="Tibt" typeface="Microsoft Himalaya"/>
+        <a:font script="Thaa" typeface="MV Boli"/>
+        <a:font script="Deva" typeface="Mangal"/>
+        <a:font script="Telu" typeface="Gautami"/>
+        <a:font script="Taml" typeface="Latha"/>
+        <a:font script="Syrc" typeface="Estrangelo Edessa"/>
+        <a:font script="Orya" typeface="Kalinga"/>
+        <a:font script="Mlym" typeface="Kartika"/>
+        <a:font script="Laoo" typeface="DokChampa"/>
+        <a:font script="Sinh" typeface="Iskoola Pota"/>
+        <a:font script="Mong" typeface="Mongolian Baiti"/>
+        <a:font script="Viet" typeface="Times New Roman"/>
+        <a:font script="Uigh" typeface="Microsoft Uighur"/>
+        <a:font script="Geor" typeface="Sylfaen"/>
+        <a:font script="Armn" typeface="Arial"/>
+        <a:font script="Bugi" typeface="Leelawadee UI"/>
+        <a:font script="Bopo" typeface="Microsoft JhengHei"/>
+        <a:font script="Java" typeface="Javanese Text"/>
+        <a:font script="Lisu" typeface="Segoe UI"/>
+        <a:font script="Mymr" typeface="Myanmar Text"/>
+        <a:font script="Nkoo" typeface="Ebrima"/>
+        <a:font script="Olck" typeface="Nirmala UI"/>
+        <a:font script="Osma" typeface="Ebrima"/>
+        <a:font script="Phag" typeface="Phagspa"/>
+        <a:font script="Syrn" typeface="Estrangelo Edessa"/>
+        <a:font script="Syrj" typeface="Estrangelo Edessa"/>
+        <a:font script="Syre" typeface="Estrangelo Edessa"/>
+        <a:font script="Sora" typeface="Nirmala UI"/>
+        <a:font script="Tale" typeface="Microsoft Tai Le"/>
+        <a:font script="Talu" typeface="Microsoft New Tai Lue"/>
+        <a:font script="Tfng" typeface="Ebrima"/>
+      </a:majorFont>
+      <a:minorFont>
+        <a:latin typeface="Aptos" panose="02110004020202020204"/>
+        <a:ea typeface=""/>
+        <a:cs typeface=""/>
+        <a:font script="Jpan" typeface="游ゴシック"/>
+        <a:font script="Hang" typeface="맑은 고딕"/>
+        <a:font script="Hans" typeface="等线"/>
+        <a:font script="Hant" typeface="新細明體"/>
+        <a:font script="Arab" typeface="Arial"/>
+        <a:font script="Hebr" typeface="Arial"/>
+        <a:font script="Thai" typeface="Cordia New"/>
+        <a:font script="Ethi" typeface="Nyala"/>
+        <a:font script="Beng" typeface="Vrinda"/>
+        <a:font script="Gujr" typeface="Shruti"/>
+        <a:font script="Khmr" typeface="DaunPenh"/>
+        <a:font script="Knda" typeface="Tunga"/>
+        <a:font script="Guru" typeface="Raavi"/>
+        <a:font script="Cans" typeface="Euphemia"/>
+        <a:font script="Cher" typeface="Plantagenet Cherokee"/>
+        <a:font script="Yiii" typeface="Microsoft Yi Baiti"/>
+        <a:font script="Tibt" typeface="Microsoft Himalaya"/>
+        <a:font script="Thaa" typeface="MV Boli"/>
+        <a:font script="Deva" typeface="Mangal"/>
+        <a:font script="Telu" typeface="Gautami"/>
+        <a:font script="Taml" typeface="Latha"/>
+        <a:font script="Syrc" typeface="Estrangelo Edessa"/>
+        <a:font script="Orya" typeface="Kalinga"/>
+        <a:font script="Mlym" typeface="Kartika"/>
+        <a:font script="Laoo" typeface="DokChampa"/>
+        <a:font script="Sinh" typeface="Iskoola Pota"/>
+        <a:font script="Mong" typeface="Mongolian Baiti"/>
+        <a:font script="Viet" typeface="Arial"/>
+        <a:font script="Uigh" typeface="Microsoft Uighur"/>
+        <a:font script="Geor" typeface="Sylfaen"/>
+        <a:font script="Armn" typeface="Arial"/>
+        <a:font script="Bugi" typeface="Leelawadee UI"/>
+        <a:font script="Bopo" typeface="Microsoft JhengHei"/>
+        <a:font script="Java" typeface="Javanese Text"/>
+        <a:font script="Lisu" typeface="Segoe UI"/>
+        <a:font script="Mymr" typeface="Myanmar Text"/>
+        <a:font script="Nkoo" typeface="Ebrima"/>
+        <a:font script="Olck" typeface="Nirmala UI"/>
+        <a:font script="Osma" typeface="Ebrima"/>
+        <a:font script="Phag" typeface="Phagspa"/>
+        <a:font script="Syrn" typeface="Estrangelo Edessa"/>
+        <a:font script="Syrj" typeface="Estrangelo Edessa"/>
+        <a:font script="Syre" typeface="Estrangelo Edessa"/>
+        <a:font script="Sora" typeface="Nirmala UI"/>
+        <a:font script="Tale" typeface="Microsoft Tai Le"/>
+        <a:font script="Talu" typeface="Microsoft New Tai Lue"/>
+        <a:font script="Tfng" typeface="Ebrima"/>
+      </a:minorFont>
+    </a:fontScheme>
+    <a:fmtScheme name="Office">
+      <a:fillStyleLst>
+        <a:solidFill>
+          <a:schemeClr val="phClr"/>
+        </a:solidFill>
+        <a:gradFill rotWithShape="1">
+          <a:gsLst>
+            <a:gs pos="0">
+              <a:schemeClr val="phClr">
+                <a:lumMod val="110000"/>
+                <a:satMod val="105000"/>
+                <a:tint val="67000"/>
+              </a:schemeClr>
+            </a:gs>
+            <a:gs pos="50000">
+              <a:schemeClr val="phClr">
+                <a:lumMod val="105000"/>
+                <a:satMod val="103000"/>
+                <a:tint val="73000"/>
+              </a:schemeClr>
+            </a:gs>
+            <a:gs pos="100000">
+              <a:schemeClr val="phClr">
+                <a:lumMod val="105000"/>
+                <a:satMod val="109000"/>
+                <a:tint val="81000"/>
+              </a:schemeClr>
+            </a:gs>
+          </a:gsLst>
+          <a:lin ang="5400000" scaled="0"/>
+        </a:gradFill>
+        <a:gradFill rotWithShape="1">
+          <a:gsLst>
+            <a:gs pos="0">
+              <a:schemeClr val="phClr">
+                <a:satMod val="103000"/>
+                <a:lumMod val="102000"/>
+                <a:tint val="94000"/>
+              </a:schemeClr>
+            </a:gs>
+            <a:gs pos="50000">
+              <a:schemeClr val="phClr">
+                <a:satMod val="110000"/>
+                <a:lumMod val="100000"/>
+                <a:shade val="100000"/>
+              </a:schemeClr>
+            </a:gs>
+            <a:gs pos="100000">
+              <a:schemeClr val="phClr">
+                <a:lumMod val="99000"/>
+                <a:satMod val="120000"/>
+                <a:shade val="78000"/>
+              </a:schemeClr>
+            </a:gs>
+          </a:gsLst>
+          <a:lin ang="5400000" scaled="0"/>
+        </a:gradFill>
+      </a:fillStyleLst>
+      <a:lnStyleLst>
+        <a:ln w="12700" cap="flat" cmpd="sng" algn="ctr">
+          <a:solidFill>
+            <a:schemeClr val="phClr"/>
+          </a:solidFill>
+          <a:prstDash val="solid"/>
+          <a:miter lim="800000"/>
+        </a:ln>
+        <a:ln w="19050" cap="flat" cmpd="sng" algn="ctr">
+          <a:solidFill>
+            <a:schemeClr val="phClr"/>
+          </a:solidFill>
+          <a:prstDash val="solid"/>
+          <a:miter lim="800000"/>
+        </a:ln>
+        <a:ln w="25400" cap="flat" cmpd="sng" algn="ctr">
+          <a:solidFill>
+            <a:schemeClr val="phClr"/>
+          </a:solidFill>
+          <a:prstDash val="solid"/>
+          <a:miter lim="800000"/>
+        </a:ln>
+      </a:lnStyleLst>
+      <a:effectStyleLst>
+        <a:effectStyle>
+          <a:effectLst/>
+        </a:effectStyle>
+        <a:effectStyle>
+          <a:effectLst/>
+        </a:effectStyle>
+        <a:effectStyle>
+          <a:effectLst>
+            <a:outerShdw blurRad="57150" dist="19050" dir="5400000" algn="ctr" rotWithShape="0">
+              <a:srgbClr val="000000">
+                <a:alpha val="63000"/>
+              </a:srgbClr>
+            </a:outerShdw>
+          </a:effectLst>
+        </a:effectStyle>
+      </a:effectStyleLst>
+      <a:bgFillStyleLst>
+        <a:solidFill>
+          <a:schemeClr val="phClr"/>
+        </a:solidFill>
+        <a:solidFill>
+          <a:schemeClr val="phClr">
+            <a:tint val="95000"/>
+            <a:satMod val="170000"/>
+          </a:schemeClr>
+        </a:solidFill>
+        <a:gradFill rotWithShape="1">
+          <a:gsLst>
+            <a:gs pos="0">
+              <a:schemeClr val="phClr">
+                <a:tint val="93000"/>
+                <a:satMod val="150000"/>
+                <a:shade val="98000"/>
+                <a:lumMod val="102000"/>
+              </a:schemeClr>
+            </a:gs>
+            <a:gs pos="50000">
+              <a:schemeClr val="phClr">
+                <a:tint val="98000"/>
+                <a:satMod val="130000"/>
+                <a:shade val="90000"/>
+                <a:lumMod val="103000"/>
+              </a:schemeClr>
+            </a:gs>
+            <a:gs pos="100000">
+              <a:schemeClr val="phClr">
+                <a:shade val="63000"/>
+                <a:satMod val="120000"/>
+              </a:schemeClr>
+            </a:gs>
+          </a:gsLst>
+          <a:lin ang="5400000" scaled="0"/>
+        </a:gradFill>
+      </a:bgFillStyleLst>
+    </a:fmtScheme>
+  </a:themeElements>
+  <a:objectDefaults>
+    <a:lnDef>
+      <a:spPr/>
+      <a:bodyPr/>
+      <a:lstStyle/>
+      <a:style>
+        <a:lnRef idx="2">
+          <a:schemeClr val="accent1"/>
+        </a:lnRef>
+        <a:fillRef idx="0">
+          <a:schemeClr val="accent1"/>
+        </a:fillRef>
+        <a:effectRef idx="1">
+          <a:schemeClr val="accent1"/>
+        </a:effectRef>
+        <a:fontRef idx="minor">
+          <a:schemeClr val="tx1"/>
+        </a:fontRef>
+      </a:style>
+    </a:lnDef>
+  </a:objectDefaults>
+  <a:extraClrSchemeLst/>
+  <a:extLst>
+    <a:ext uri="{05A4C25C-085E-4340-85A3-A5531E510DB2}">
+      <thm15:themeFamily xmlns:thm15="http://schemas.microsoft.com/office/thememl/2012/main" name="Office Theme" id="{2E142A2C-CD16-42D6-873A-C26D2A0506FA}" vid="{1BDDFF52-6CD6-40A5-AB3C-68EB2F1E4D0A}"/>
+    </a:ext>
+  </a:extLst>
+</a:theme>
 </file>